--- a/materials/A2/A2_3B_Put_it_in_your_calendar.pptx
+++ b/materials/A2/A2_3B_Put_it_in_your_calendar.pptx
@@ -22,9 +22,10 @@
     <p:sldId id="270" r:id="rId16"/>
     <p:sldId id="271" r:id="rId17"/>
     <p:sldId id="272" r:id="rId18"/>
+    <p:sldId id="273" r:id="rId19"/>
   </p:sldIdLst>
   <p:notesMasterIdLst>
-    <p:notesMasterId r:id="rId19"/>
+    <p:notesMasterId r:id="rId20"/>
   </p:notesMasterIdLst>
   <p:sldSz cx="9144000" cy="5143500"/>
   <p:notesSz cx="5143500" cy="9144000"/>
@@ -696,8 +697,8 @@
           <a:p>
             <a:r>
               <a:rPr lang="en-US" dirty="0"/>
-              <a:t>11. Grammar · present continuous for the future (4 min)
-GRAMMAR (4 min). 1 is the example. Key (TG): 1 going 2 having 3 giving 4 doing 5 getting married. Click 1 = 'all future'. Italian speakers say 'What do you do this evening?' ✗ → What are you doing this evening? ✓</a:t>
+              <a:t>11. Speaking · retell (TPRS) (3 min)
+RETELL (3 min, automatic after every class story). A tells lines 1–3, B the rest, then swap. Only the prompts – no reading! Last line: change two things (place, person, ending). Listen for today's grammar.</a:t>
             </a:r>
             <a:endParaRPr lang="en-US" dirty="0"/>
           </a:p>
@@ -785,8 +786,8 @@
           <a:p>
             <a:r>
               <a:rPr lang="en-US" dirty="0"/>
-              <a:t>12. Grammar Bank 3B · the rule (3 min)
-RULE (3 min). TG: often both are possible for plans (What are you going to do tonight? / What are you doing tonight?). Present continuous is very common with leave, arrive, go, come. Never for predictions. GB exercises p.131 (homework or now): a 1N 2F 3F 4N 5N 6F 7F 8N 9N 10F · b 1 I'm packing 2 I'm flying 3 are you going 4 I'm meeting 5 are you seeing 6 He's working.</a:t>
+              <a:t>12. Grammar · present continuous for the future (4 min)
+GRAMMAR (4 min). 1 is the example. Key (TG): 1 going 2 having 3 giving 4 doing 5 getting married. Click 1 = 'all future'. Italian speakers say 'What do you do this evening?' ✗ → What are you doing this evening? ✓</a:t>
             </a:r>
             <a:endParaRPr lang="en-US" dirty="0"/>
           </a:p>
@@ -874,8 +875,8 @@
           <a:p>
             <a:r>
               <a:rPr lang="en-US" dirty="0"/>
-              <a:t>13. Grammar · practice (3 min)
-JAKE'S CALENDAR (3 min). SB 4c – the first question is the book's example. Pairs ask and answer, then swap.</a:t>
+              <a:t>13. Grammar Bank 3B · the rule (3 min)
+RULE (3 min). TG: often both are possible for plans (What are you going to do tonight? / What are you doing tonight?). Present continuous is very common with leave, arrive, go, come. Never for predictions. GB exercises p.131 (homework or now): a 1N 2F 3F 4N 5N 6F 7F 8N 9N 10F · b 1 I'm packing 2 I'm flying 3 are you going 4 I'm meeting 5 are you seeing 6 He's working.</a:t>
             </a:r>
             <a:endParaRPr lang="en-US" dirty="0"/>
           </a:p>
@@ -963,8 +964,8 @@
           <a:p>
             <a:r>
               <a:rPr lang="en-US" dirty="0"/>
-              <a:t>14. Speaking · making arrangements (3 min)
-INTONATION (3 min). No audio 3.13: YOU model the conversation – B sounds enthusiastic (I'd love to! Great!) and apologetic (Sorry). Class repeats line by line, then pairs practise and swap.</a:t>
+              <a:t>14. Grammar · practice (3 min)
+JAKE'S CALENDAR (3 min). SB 4c – the first question is the book's example. Pairs ask and answer, then swap.</a:t>
             </a:r>
             <a:endParaRPr lang="en-US" dirty="0"/>
           </a:p>
@@ -1052,8 +1053,8 @@
           <a:p>
             <a:r>
               <a:rPr lang="en-US" dirty="0"/>
-              <a:t>15. Speaking · mingle (7 min)
-MINGLE (7 min). TG: students write activities without 'I'm going…' (e.g. 'cinema with friends'), as in a real diary. Then mingle and fill every free evening with a different person. Feedback: who is doing what when?</a:t>
+              <a:t>15. Speaking · making arrangements (3 min)
+INTONATION (3 min). No audio 3.13: YOU model the conversation – B sounds enthusiastic (I'd love to! Great!) and apologetic (Sorry). Class repeats line by line, then pairs practise and swap.</a:t>
             </a:r>
             <a:endParaRPr lang="en-US" dirty="0"/>
           </a:p>
@@ -1141,8 +1142,8 @@
           <a:p>
             <a:r>
               <a:rPr lang="en-US" dirty="0"/>
-              <a:t>16. Exit · what can you remember? (2 min)
-EXIT (2 min). Pairs, books closed.</a:t>
+              <a:t>16. Speaking · mingle (7 min)
+MINGLE (7 min). TG: students write activities without 'I'm going…' (e.g. 'cinema with friends'), as in a real diary. Then mingle and fill every free evening with a different person. Feedback: who is doing what when?</a:t>
             </a:r>
             <a:endParaRPr lang="en-US" dirty="0"/>
           </a:p>
@@ -1230,8 +1231,8 @@
           <a:p>
             <a:r>
               <a:rPr lang="en-US" dirty="0"/>
-              <a:t>17. Review · what did you do today? (1 min)
-TODAY YOU… (1 min). Read each line (one per click: the tick appears). Students show thumbs up / middle / down: can they do it now? Note any thumbs down for the next lesson's recap.</a:t>
+              <a:t>17. Exit · what can you remember? (2 min)
+EXIT (2 min). Pairs, books closed.</a:t>
             </a:r>
             <a:endParaRPr lang="en-US" dirty="0"/>
           </a:p>
@@ -1255,6 +1256,95 @@
             <a:fld id="{F7021451-1387-4CA6-816F-3879F97B5CBC}" type="slidenum">
               <a:rPr lang="en-US"/>
               <a:t>17</a:t>
+            </a:fld>
+            <a:endParaRPr lang="en-US"/>
+          </a:p>
+        </p:txBody>
+      </p:sp>
+    </p:spTree>
+    <p:extLst>
+      <p:ext uri="{BB962C8B-B14F-4D97-AF65-F5344CB8AC3E}">
+        <p14:creationId xmlns:p14="http://schemas.microsoft.com/office/powerpoint/2010/main" val="1024086991"/>
+      </p:ext>
+    </p:extLst>
+  </p:cSld>
+  <p:clrMapOvr>
+    <a:masterClrMapping/>
+  </p:clrMapOvr>
+</p:notes>
+</file>
+
+<file path=ppt/notesSlides/notesSlide18.xml><?xml version="1.0" encoding="utf-8"?>
+<p:notes xmlns:a="http://schemas.openxmlformats.org/drawingml/2006/main" xmlns:r="http://schemas.openxmlformats.org/officeDocument/2006/relationships" xmlns:p="http://schemas.openxmlformats.org/presentationml/2006/main">
+  <p:cSld>
+    <p:spTree>
+      <p:nvGrpSpPr>
+        <p:cNvPr id="1" name=""/>
+        <p:cNvGrpSpPr/>
+        <p:nvPr/>
+      </p:nvGrpSpPr>
+      <p:grpSpPr>
+        <a:xfrm>
+          <a:off x="0" y="0"/>
+          <a:ext cx="0" cy="0"/>
+          <a:chOff x="0" y="0"/>
+          <a:chExt cx="0" cy="0"/>
+        </a:xfrm>
+      </p:grpSpPr>
+      <p:sp>
+        <p:nvSpPr>
+          <p:cNvPr id="2" name="Slide Image Placeholder 1"/>
+          <p:cNvSpPr>
+            <a:spLocks noGrp="1" noRot="1" noChangeAspect="1"/>
+          </p:cNvSpPr>
+          <p:nvPr>
+            <p:ph type="sldImg"/>
+          </p:nvPr>
+        </p:nvSpPr>
+        <p:spPr/>
+      </p:sp>
+      <p:sp>
+        <p:nvSpPr>
+          <p:cNvPr id="3" name="Notes Placeholder 2"/>
+          <p:cNvSpPr>
+            <a:spLocks noGrp="1"/>
+          </p:cNvSpPr>
+          <p:nvPr>
+            <p:ph type="body" idx="1"/>
+          </p:nvPr>
+        </p:nvSpPr>
+        <p:spPr/>
+        <p:txBody>
+          <a:bodyPr/>
+          <a:lstStyle/>
+          <a:p>
+            <a:r>
+              <a:rPr lang="en-US" dirty="0"/>
+              <a:t>18. Review · what did you do today? (1 min)
+TODAY YOU… (1 min). Read each line (one per click: the tick appears). Students show thumbs up / middle / down: can they do it now? Note any thumbs down for the next lesson's recap.</a:t>
+            </a:r>
+            <a:endParaRPr lang="en-US" dirty="0"/>
+          </a:p>
+        </p:txBody>
+      </p:sp>
+      <p:sp>
+        <p:nvSpPr>
+          <p:cNvPr id="4" name="Slide Number Placeholder 3"/>
+          <p:cNvSpPr>
+            <a:spLocks noGrp="1"/>
+          </p:cNvSpPr>
+          <p:nvPr>
+            <p:ph type="sldNum" sz="quarter" idx="10"/>
+          </p:nvPr>
+        </p:nvSpPr>
+        <p:spPr/>
+        <p:txBody>
+          <a:bodyPr/>
+          <a:lstStyle/>
+          <a:p>
+            <a:fld id="{F7021451-1387-4CA6-816F-3879F97B5CBC}" type="slidenum">
+              <a:rPr lang="en-US"/>
+              <a:t>18</a:t>
             </a:fld>
             <a:endParaRPr lang="en-US"/>
           </a:p>
@@ -3343,7 +3433,7 @@
                 <a:ea typeface="Segoe UI Semibold" pitchFamily="34" charset="-122"/>
                 <a:cs typeface="Segoe UI Semibold" pitchFamily="34" charset="-120"/>
               </a:rPr>
-              <a:t>Listen. Do you think they're going to meet again? Why (not)?</a:t>
+              <a:t>Read. Do you think they're going to meet again? Why (not)?</a:t>
             </a:r>
             <a:endParaRPr lang="en-US" sz="1200" dirty="0"/>
           </a:p>
@@ -3384,7 +3474,7 @@
                 <a:ea typeface="Segoe UI Semibold" pitchFamily="34" charset="-122"/>
                 <a:cs typeface="Segoe UI Semibold" pitchFamily="34" charset="-120"/>
               </a:rPr>
-              <a:t>Ascolta. Pensi che si rivedranno? Perché (no)?</a:t>
+              <a:t>Leggi. Pensi che si rivedranno? Perché (no)?</a:t>
             </a:r>
             <a:endParaRPr lang="en-US" sz="950" dirty="0"/>
           </a:p>
@@ -4054,7 +4144,69 @@
                 <a:ea typeface="Segoe UI Semibold" pitchFamily="34" charset="-122"/>
                 <a:cs typeface="Segoe UI Semibold" pitchFamily="34" charset="-120"/>
               </a:rPr>
-              <a:t>Jake arrives late. 'Sarah! Sorry I'm late!' – 'Same old Jake. You were always late.'</a:t>
+              <a:t>Jake </a:t>
+            </a:r>
+            <a:pPr indent="0" marL="0">
+              <a:buNone/>
+            </a:pPr>
+            <a:r>
+              <a:rPr lang="en-US" sz="1050" b="1" dirty="0">
+                <a:solidFill>
+                  <a:srgbClr val="7B5CD6"/>
+                </a:solidFill>
+                <a:highlight>
+                  <a:srgbClr val="FFF1A8"/>
+                </a:highlight>
+                <a:latin typeface="Segoe UI Semibold" pitchFamily="34" charset="0"/>
+                <a:ea typeface="Segoe UI Semibold" pitchFamily="34" charset="-122"/>
+                <a:cs typeface="Segoe UI Semibold" pitchFamily="34" charset="-120"/>
+              </a:rPr>
+              <a:t>arrives late</a:t>
+            </a:r>
+            <a:pPr indent="0" marL="0">
+              <a:buNone/>
+            </a:pPr>
+            <a:r>
+              <a:rPr lang="en-US" sz="1050" dirty="0">
+                <a:solidFill>
+                  <a:srgbClr val="1B2559"/>
+                </a:solidFill>
+                <a:latin typeface="Segoe UI Semibold" pitchFamily="34" charset="0"/>
+                <a:ea typeface="Segoe UI Semibold" pitchFamily="34" charset="-122"/>
+                <a:cs typeface="Segoe UI Semibold" pitchFamily="34" charset="-120"/>
+              </a:rPr>
+              <a:t>. 'Sarah! Sorry I'm late!' – '</a:t>
+            </a:r>
+            <a:pPr indent="0" marL="0">
+              <a:buNone/>
+            </a:pPr>
+            <a:r>
+              <a:rPr lang="en-US" sz="1050" b="1" dirty="0">
+                <a:solidFill>
+                  <a:srgbClr val="7B5CD6"/>
+                </a:solidFill>
+                <a:highlight>
+                  <a:srgbClr val="FFF1A8"/>
+                </a:highlight>
+                <a:latin typeface="Segoe UI Semibold" pitchFamily="34" charset="0"/>
+                <a:ea typeface="Segoe UI Semibold" pitchFamily="34" charset="-122"/>
+                <a:cs typeface="Segoe UI Semibold" pitchFamily="34" charset="-120"/>
+              </a:rPr>
+              <a:t>Same old Jake</a:t>
+            </a:r>
+            <a:pPr indent="0" marL="0">
+              <a:buNone/>
+            </a:pPr>
+            <a:r>
+              <a:rPr lang="en-US" sz="1050" dirty="0">
+                <a:solidFill>
+                  <a:srgbClr val="1B2559"/>
+                </a:solidFill>
+                <a:latin typeface="Segoe UI Semibold" pitchFamily="34" charset="0"/>
+                <a:ea typeface="Segoe UI Semibold" pitchFamily="34" charset="-122"/>
+                <a:cs typeface="Segoe UI Semibold" pitchFamily="34" charset="-120"/>
+              </a:rPr>
+              <a:t>. You were always late.'</a:t>
             </a:r>
             <a:endParaRPr lang="en-US" sz="1050" dirty="0"/>
           </a:p>
@@ -4177,7 +4329,69 @@
                 <a:ea typeface="Segoe UI Semibold" pitchFamily="34" charset="-122"/>
                 <a:cs typeface="Segoe UI Semibold" pitchFamily="34" charset="-120"/>
               </a:rPr>
-              <a:t>They order two cappuccinos and a croissant.</a:t>
+              <a:t>They </a:t>
+            </a:r>
+            <a:pPr indent="0" marL="0">
+              <a:buNone/>
+            </a:pPr>
+            <a:r>
+              <a:rPr lang="en-US" sz="1150" b="1" dirty="0">
+                <a:solidFill>
+                  <a:srgbClr val="7B5CD6"/>
+                </a:solidFill>
+                <a:highlight>
+                  <a:srgbClr val="FFF1A8"/>
+                </a:highlight>
+                <a:latin typeface="Segoe UI Semibold" pitchFamily="34" charset="0"/>
+                <a:ea typeface="Segoe UI Semibold" pitchFamily="34" charset="-122"/>
+                <a:cs typeface="Segoe UI Semibold" pitchFamily="34" charset="-120"/>
+              </a:rPr>
+              <a:t>order two cappuccinos</a:t>
+            </a:r>
+            <a:pPr indent="0" marL="0">
+              <a:buNone/>
+            </a:pPr>
+            <a:r>
+              <a:rPr lang="en-US" sz="1150" dirty="0">
+                <a:solidFill>
+                  <a:srgbClr val="1B2559"/>
+                </a:solidFill>
+                <a:latin typeface="Segoe UI Semibold" pitchFamily="34" charset="0"/>
+                <a:ea typeface="Segoe UI Semibold" pitchFamily="34" charset="-122"/>
+                <a:cs typeface="Segoe UI Semibold" pitchFamily="34" charset="-120"/>
+              </a:rPr>
+              <a:t> and </a:t>
+            </a:r>
+            <a:pPr indent="0" marL="0">
+              <a:buNone/>
+            </a:pPr>
+            <a:r>
+              <a:rPr lang="en-US" sz="1150" b="1" dirty="0">
+                <a:solidFill>
+                  <a:srgbClr val="7B5CD6"/>
+                </a:solidFill>
+                <a:highlight>
+                  <a:srgbClr val="FFF1A8"/>
+                </a:highlight>
+                <a:latin typeface="Segoe UI Semibold" pitchFamily="34" charset="0"/>
+                <a:ea typeface="Segoe UI Semibold" pitchFamily="34" charset="-122"/>
+                <a:cs typeface="Segoe UI Semibold" pitchFamily="34" charset="-120"/>
+              </a:rPr>
+              <a:t>a croissant</a:t>
+            </a:r>
+            <a:pPr indent="0" marL="0">
+              <a:buNone/>
+            </a:pPr>
+            <a:r>
+              <a:rPr lang="en-US" sz="1150" dirty="0">
+                <a:solidFill>
+                  <a:srgbClr val="1B2559"/>
+                </a:solidFill>
+                <a:latin typeface="Segoe UI Semibold" pitchFamily="34" charset="0"/>
+                <a:ea typeface="Segoe UI Semibold" pitchFamily="34" charset="-122"/>
+                <a:cs typeface="Segoe UI Semibold" pitchFamily="34" charset="-120"/>
+              </a:rPr>
+              <a:t>.</a:t>
             </a:r>
             <a:endParaRPr lang="en-US" sz="1150" dirty="0"/>
           </a:p>
@@ -4300,7 +4514,69 @@
                 <a:ea typeface="Segoe UI Semibold" pitchFamily="34" charset="-122"/>
                 <a:cs typeface="Segoe UI Semibold" pitchFamily="34" charset="-120"/>
               </a:rPr>
-              <a:t>Jake: 'It's great to see you again – just like old times. Are you doing anything on Saturday?'</a:t>
+              <a:t>Jake: 'It's great to see you again – </a:t>
+            </a:r>
+            <a:pPr indent="0" marL="0">
+              <a:buNone/>
+            </a:pPr>
+            <a:r>
+              <a:rPr lang="en-US" sz="1050" b="1" dirty="0">
+                <a:solidFill>
+                  <a:srgbClr val="7B5CD6"/>
+                </a:solidFill>
+                <a:highlight>
+                  <a:srgbClr val="FFF1A8"/>
+                </a:highlight>
+                <a:latin typeface="Segoe UI Semibold" pitchFamily="34" charset="0"/>
+                <a:ea typeface="Segoe UI Semibold" pitchFamily="34" charset="-122"/>
+                <a:cs typeface="Segoe UI Semibold" pitchFamily="34" charset="-120"/>
+              </a:rPr>
+              <a:t>just like old times</a:t>
+            </a:r>
+            <a:pPr indent="0" marL="0">
+              <a:buNone/>
+            </a:pPr>
+            <a:r>
+              <a:rPr lang="en-US" sz="1050" dirty="0">
+                <a:solidFill>
+                  <a:srgbClr val="1B2559"/>
+                </a:solidFill>
+                <a:latin typeface="Segoe UI Semibold" pitchFamily="34" charset="0"/>
+                <a:ea typeface="Segoe UI Semibold" pitchFamily="34" charset="-122"/>
+                <a:cs typeface="Segoe UI Semibold" pitchFamily="34" charset="-120"/>
+              </a:rPr>
+              <a:t>. </a:t>
+            </a:r>
+            <a:pPr indent="0" marL="0">
+              <a:buNone/>
+            </a:pPr>
+            <a:r>
+              <a:rPr lang="en-US" sz="1050" b="1" dirty="0">
+                <a:solidFill>
+                  <a:srgbClr val="7B5CD6"/>
+                </a:solidFill>
+                <a:highlight>
+                  <a:srgbClr val="FFF1A8"/>
+                </a:highlight>
+                <a:latin typeface="Segoe UI Semibold" pitchFamily="34" charset="0"/>
+                <a:ea typeface="Segoe UI Semibold" pitchFamily="34" charset="-122"/>
+                <a:cs typeface="Segoe UI Semibold" pitchFamily="34" charset="-120"/>
+              </a:rPr>
+              <a:t>Are you doing anything on Saturday</a:t>
+            </a:r>
+            <a:pPr indent="0" marL="0">
+              <a:buNone/>
+            </a:pPr>
+            <a:r>
+              <a:rPr lang="en-US" sz="1050" dirty="0">
+                <a:solidFill>
+                  <a:srgbClr val="1B2559"/>
+                </a:solidFill>
+                <a:latin typeface="Segoe UI Semibold" pitchFamily="34" charset="0"/>
+                <a:ea typeface="Segoe UI Semibold" pitchFamily="34" charset="-122"/>
+                <a:cs typeface="Segoe UI Semibold" pitchFamily="34" charset="-120"/>
+              </a:rPr>
+              <a:t>?'</a:t>
             </a:r>
             <a:endParaRPr lang="en-US" sz="1050" dirty="0"/>
           </a:p>
@@ -4423,7 +4699,100 @@
                 <a:ea typeface="Segoe UI Semibold" pitchFamily="34" charset="-122"/>
                 <a:cs typeface="Segoe UI Semibold" pitchFamily="34" charset="-120"/>
               </a:rPr>
-              <a:t>Sarah: 'I'm not single now. I'm with someone. He's called Mike, and… we're getting married on Saturday.'</a:t>
+              <a:t>Sarah: '</a:t>
+            </a:r>
+            <a:pPr indent="0" marL="0">
+              <a:buNone/>
+            </a:pPr>
+            <a:r>
+              <a:rPr lang="en-US" sz="1050" b="1" dirty="0">
+                <a:solidFill>
+                  <a:srgbClr val="7B5CD6"/>
+                </a:solidFill>
+                <a:highlight>
+                  <a:srgbClr val="FFF1A8"/>
+                </a:highlight>
+                <a:latin typeface="Segoe UI Semibold" pitchFamily="34" charset="0"/>
+                <a:ea typeface="Segoe UI Semibold" pitchFamily="34" charset="-122"/>
+                <a:cs typeface="Segoe UI Semibold" pitchFamily="34" charset="-120"/>
+              </a:rPr>
+              <a:t>I'm not single now</a:t>
+            </a:r>
+            <a:pPr indent="0" marL="0">
+              <a:buNone/>
+            </a:pPr>
+            <a:r>
+              <a:rPr lang="en-US" sz="1050" dirty="0">
+                <a:solidFill>
+                  <a:srgbClr val="1B2559"/>
+                </a:solidFill>
+                <a:latin typeface="Segoe UI Semibold" pitchFamily="34" charset="0"/>
+                <a:ea typeface="Segoe UI Semibold" pitchFamily="34" charset="-122"/>
+                <a:cs typeface="Segoe UI Semibold" pitchFamily="34" charset="-120"/>
+              </a:rPr>
+              <a:t>. I'm with someone. He's called </a:t>
+            </a:r>
+            <a:pPr indent="0" marL="0">
+              <a:buNone/>
+            </a:pPr>
+            <a:r>
+              <a:rPr lang="en-US" sz="1050" b="1" dirty="0">
+                <a:solidFill>
+                  <a:srgbClr val="7B5CD6"/>
+                </a:solidFill>
+                <a:highlight>
+                  <a:srgbClr val="FFF1A8"/>
+                </a:highlight>
+                <a:latin typeface="Segoe UI Semibold" pitchFamily="34" charset="0"/>
+                <a:ea typeface="Segoe UI Semibold" pitchFamily="34" charset="-122"/>
+                <a:cs typeface="Segoe UI Semibold" pitchFamily="34" charset="-120"/>
+              </a:rPr>
+              <a:t>Mike</a:t>
+            </a:r>
+            <a:pPr indent="0" marL="0">
+              <a:buNone/>
+            </a:pPr>
+            <a:r>
+              <a:rPr lang="en-US" sz="1050" dirty="0">
+                <a:solidFill>
+                  <a:srgbClr val="1B2559"/>
+                </a:solidFill>
+                <a:latin typeface="Segoe UI Semibold" pitchFamily="34" charset="0"/>
+                <a:ea typeface="Segoe UI Semibold" pitchFamily="34" charset="-122"/>
+                <a:cs typeface="Segoe UI Semibold" pitchFamily="34" charset="-120"/>
+              </a:rPr>
+              <a:t>, and… </a:t>
+            </a:r>
+            <a:pPr indent="0" marL="0">
+              <a:buNone/>
+            </a:pPr>
+            <a:r>
+              <a:rPr lang="en-US" sz="1050" b="1" dirty="0">
+                <a:solidFill>
+                  <a:srgbClr val="7B5CD6"/>
+                </a:solidFill>
+                <a:highlight>
+                  <a:srgbClr val="FFF1A8"/>
+                </a:highlight>
+                <a:latin typeface="Segoe UI Semibold" pitchFamily="34" charset="0"/>
+                <a:ea typeface="Segoe UI Semibold" pitchFamily="34" charset="-122"/>
+                <a:cs typeface="Segoe UI Semibold" pitchFamily="34" charset="-120"/>
+              </a:rPr>
+              <a:t>we're getting married</a:t>
+            </a:r>
+            <a:pPr indent="0" marL="0">
+              <a:buNone/>
+            </a:pPr>
+            <a:r>
+              <a:rPr lang="en-US" sz="1050" dirty="0">
+                <a:solidFill>
+                  <a:srgbClr val="1B2559"/>
+                </a:solidFill>
+                <a:latin typeface="Segoe UI Semibold" pitchFamily="34" charset="0"/>
+                <a:ea typeface="Segoe UI Semibold" pitchFamily="34" charset="-122"/>
+                <a:cs typeface="Segoe UI Semibold" pitchFamily="34" charset="-120"/>
+              </a:rPr>
+              <a:t> on Saturday.'</a:t>
             </a:r>
             <a:endParaRPr lang="en-US" sz="1050" dirty="0"/>
           </a:p>
@@ -4546,7 +4915,69 @@
                 <a:ea typeface="Segoe UI Semibold" pitchFamily="34" charset="-122"/>
                 <a:cs typeface="Segoe UI Semibold" pitchFamily="34" charset="-120"/>
               </a:rPr>
-              <a:t>Jake: 'Wow! That's… that's great news! I wish you all the best!'</a:t>
+              <a:t>Jake: 'Wow! That's… that's </a:t>
+            </a:r>
+            <a:pPr indent="0" marL="0">
+              <a:buNone/>
+            </a:pPr>
+            <a:r>
+              <a:rPr lang="en-US" sz="1150" b="1" dirty="0">
+                <a:solidFill>
+                  <a:srgbClr val="7B5CD6"/>
+                </a:solidFill>
+                <a:highlight>
+                  <a:srgbClr val="FFF1A8"/>
+                </a:highlight>
+                <a:latin typeface="Segoe UI Semibold" pitchFamily="34" charset="0"/>
+                <a:ea typeface="Segoe UI Semibold" pitchFamily="34" charset="-122"/>
+                <a:cs typeface="Segoe UI Semibold" pitchFamily="34" charset="-120"/>
+              </a:rPr>
+              <a:t>great news</a:t>
+            </a:r>
+            <a:pPr indent="0" marL="0">
+              <a:buNone/>
+            </a:pPr>
+            <a:r>
+              <a:rPr lang="en-US" sz="1150" dirty="0">
+                <a:solidFill>
+                  <a:srgbClr val="1B2559"/>
+                </a:solidFill>
+                <a:latin typeface="Segoe UI Semibold" pitchFamily="34" charset="0"/>
+                <a:ea typeface="Segoe UI Semibold" pitchFamily="34" charset="-122"/>
+                <a:cs typeface="Segoe UI Semibold" pitchFamily="34" charset="-120"/>
+              </a:rPr>
+              <a:t>! </a:t>
+            </a:r>
+            <a:pPr indent="0" marL="0">
+              <a:buNone/>
+            </a:pPr>
+            <a:r>
+              <a:rPr lang="en-US" sz="1150" b="1" dirty="0">
+                <a:solidFill>
+                  <a:srgbClr val="7B5CD6"/>
+                </a:solidFill>
+                <a:highlight>
+                  <a:srgbClr val="FFF1A8"/>
+                </a:highlight>
+                <a:latin typeface="Segoe UI Semibold" pitchFamily="34" charset="0"/>
+                <a:ea typeface="Segoe UI Semibold" pitchFamily="34" charset="-122"/>
+                <a:cs typeface="Segoe UI Semibold" pitchFamily="34" charset="-120"/>
+              </a:rPr>
+              <a:t>I wish you all the best</a:t>
+            </a:r>
+            <a:pPr indent="0" marL="0">
+              <a:buNone/>
+            </a:pPr>
+            <a:r>
+              <a:rPr lang="en-US" sz="1150" dirty="0">
+                <a:solidFill>
+                  <a:srgbClr val="1B2559"/>
+                </a:solidFill>
+                <a:latin typeface="Segoe UI Semibold" pitchFamily="34" charset="0"/>
+                <a:ea typeface="Segoe UI Semibold" pitchFamily="34" charset="-122"/>
+                <a:cs typeface="Segoe UI Semibold" pitchFamily="34" charset="-120"/>
+              </a:rPr>
+              <a:t>!'</a:t>
             </a:r>
             <a:endParaRPr lang="en-US" sz="1150" dirty="0"/>
           </a:p>
@@ -5096,11 +5527,11 @@
             <a:avLst/>
           </a:prstGeom>
           <a:solidFill>
-            <a:srgbClr val="2EB872"/>
+            <a:srgbClr val="7B5CD6"/>
           </a:solidFill>
           <a:ln w="28575">
             <a:solidFill>
-              <a:srgbClr val="A8E5BE"/>
+              <a:srgbClr val="CDBFF3"/>
             </a:solidFill>
           </a:ln>
           <a:effectLst>
@@ -5150,7 +5581,7 @@
         <p:spPr>
           <a:xfrm>
             <a:off x="1097280" y="146304"/>
-            <a:ext cx="3562502" cy="621792"/>
+            <a:ext cx="2304288" cy="621792"/>
           </a:xfrm>
           <a:prstGeom prst="rect">
             <a:avLst/>
@@ -5166,7 +5597,7 @@
         <p:spPr>
           <a:xfrm>
             <a:off x="1261872" y="164592"/>
-            <a:ext cx="3288182" cy="566928"/>
+            <a:ext cx="2029968" cy="566928"/>
           </a:xfrm>
           <a:prstGeom prst="rect">
             <a:avLst/>
@@ -5192,7 +5623,7 @@
                 <a:ea typeface="Arial Rounded MT Bold" pitchFamily="34" charset="-122"/>
                 <a:cs typeface="Arial Rounded MT Bold" pitchFamily="34" charset="-120"/>
               </a:rPr>
-              <a:t>Present or future?</a:t>
+              <a:t>Retell it!</a:t>
             </a:r>
             <a:endParaRPr lang="en-US" sz="2500" dirty="0"/>
           </a:p>
@@ -5215,7 +5646,7 @@
         <p:spPr>
           <a:xfrm>
             <a:off x="1207008" y="731520"/>
-            <a:ext cx="5257800" cy="402336"/>
+            <a:ext cx="5074920" cy="402336"/>
           </a:xfrm>
           <a:prstGeom prst="rect">
             <a:avLst/>
@@ -5231,7 +5662,7 @@
         <p:spPr>
           <a:xfrm>
             <a:off x="1353312" y="731520"/>
-            <a:ext cx="5001768" cy="402336"/>
+            <a:ext cx="4818888" cy="402336"/>
           </a:xfrm>
           <a:prstGeom prst="rect">
             <a:avLst/>
@@ -5257,7 +5688,7 @@
                 <a:ea typeface="Segoe UI Semibold" pitchFamily="34" charset="-122"/>
                 <a:cs typeface="Segoe UI Semibold" pitchFamily="34" charset="-120"/>
               </a:rPr>
-              <a:t>Complete with the present continuous. Present or future?</a:t>
+              <a:t>Retell the story to your partner. Use the prompts!</a:t>
             </a:r>
             <a:endParaRPr lang="en-US" sz="1250" dirty="0"/>
           </a:p>
@@ -5298,7 +5729,7 @@
                 <a:ea typeface="Segoe UI Semibold" pitchFamily="34" charset="-122"/>
                 <a:cs typeface="Segoe UI Semibold" pitchFamily="34" charset="-120"/>
               </a:rPr>
-              <a:t>Completa con il present continuous. Presente o futuro?</a:t>
+              <a:t>Racconta di nuovo la storia al compagno. Usa gli spunti!</a:t>
             </a:r>
             <a:endParaRPr lang="en-US" sz="950" dirty="0"/>
           </a:p>
@@ -5344,7 +5775,7 @@
               <a:buNone/>
             </a:pPr>
             <a:r>
-              <a:rPr lang="en-US" sz="1150" dirty="0">
+              <a:rPr lang="en-US" sz="1250" dirty="0">
                 <a:solidFill>
                   <a:srgbClr val="1B2559"/>
                 </a:solidFill>
@@ -5352,24 +5783,13 @@
                 <a:ea typeface="Arial Rounded MT Bold" pitchFamily="34" charset="-122"/>
                 <a:cs typeface="Arial Rounded MT Bold" pitchFamily="34" charset="-120"/>
               </a:rPr>
-              <a:t>✏️ FILL THE GAPS</a:t>
+              <a:t>💬 TALK</a:t>
             </a:r>
             <a:pPr algn="ctr" indent="0" marL="0">
               <a:buNone/>
             </a:pPr>
             <a:r>
-              <a:rPr lang="en-US" sz="1200" dirty="0">
-                <a:solidFill>
-                  <a:srgbClr val="5B6785"/>
-                </a:solidFill>
-              </a:rPr>
-              <a:t> → </a:t>
-            </a:r>
-            <a:pPr algn="ctr" indent="0" marL="0">
-              <a:buNone/>
-            </a:pPr>
-            <a:r>
-              <a:rPr lang="en-US" sz="1150" dirty="0">
+              <a:rPr lang="en-US" sz="1250" dirty="0">
                 <a:solidFill>
                   <a:srgbClr val="1B2559"/>
                 </a:solidFill>
@@ -5377,9 +5797,9 @@
                 <a:ea typeface="Arial Rounded MT Bold" pitchFamily="34" charset="-122"/>
                 <a:cs typeface="Arial Rounded MT Bold" pitchFamily="34" charset="-120"/>
               </a:rPr>
-              <a:t>💡 THINK</a:t>
-            </a:r>
-            <a:endParaRPr lang="en-US" sz="1150" dirty="0"/>
+              <a:t> · PARLA</a:t>
+            </a:r>
+            <a:endParaRPr lang="en-US" sz="1250" dirty="0"/>
           </a:p>
           <a:p>
             <a:pPr algn="ctr" indent="0" marL="0">
@@ -5394,9 +5814,9 @@
                 <a:ea typeface="Segoe UI Semibold" pitchFamily="34" charset="-122"/>
                 <a:cs typeface="Segoe UI Semibold" pitchFamily="34" charset="-120"/>
               </a:rPr>
-              <a:t>⏱ 4 min   👥 pairs</a:t>
-            </a:r>
-            <a:endParaRPr lang="en-US" sz="1150" dirty="0"/>
+              <a:t>⏱ 3 min   👥 pairs</a:t>
+            </a:r>
+            <a:endParaRPr lang="en-US" sz="1250" dirty="0"/>
           </a:p>
           <a:p>
             <a:pPr algn="ctr" indent="0" marL="0">
@@ -5411,9 +5831,9 @@
                 <a:ea typeface="Segoe UI Semibold" pitchFamily="34" charset="-122"/>
                 <a:cs typeface="Segoe UI Semibold" pitchFamily="34" charset="-120"/>
               </a:rPr>
-              <a:t>🎯 Grammar · Guided discovery</a:t>
-            </a:r>
-            <a:endParaRPr lang="en-US" sz="1150" dirty="0"/>
+              <a:t>🎯 Speaking · TPRS · retell</a:t>
+            </a:r>
+            <a:endParaRPr lang="en-US" sz="1250" dirty="0"/>
           </a:p>
         </p:txBody>
       </p:sp>
@@ -5474,6 +5894,1743 @@
                 <a:ea typeface="Segoe UI Semibold" pitchFamily="34" charset="-122"/>
                 <a:cs typeface="Segoe UI Semibold" pitchFamily="34" charset="-120"/>
               </a:rPr>
+              <a:t>3B · Speaking · retell (TPRS)</a:t>
+            </a:r>
+            <a:endParaRPr lang="en-US" sz="800" dirty="0"/>
+          </a:p>
+        </p:txBody>
+      </p:sp>
+      <p:sp>
+        <p:nvSpPr>
+          <p:cNvPr id="12" name="R1_sb286"/>
+          <p:cNvSpPr/>
+          <p:nvPr/>
+        </p:nvSpPr>
+        <p:spPr>
+          <a:xfrm>
+            <a:off x="457200" y="1453896"/>
+            <a:ext cx="310896" cy="310896"/>
+          </a:xfrm>
+          <a:prstGeom prst="ellipse">
+            <a:avLst/>
+          </a:prstGeom>
+          <a:solidFill>
+            <a:srgbClr val="E8508F"/>
+          </a:solidFill>
+          <a:ln w="28575">
+            <a:solidFill>
+              <a:srgbClr val="F7A6C4"/>
+            </a:solidFill>
+          </a:ln>
+          <a:effectLst>
+            <a:outerShdw sx="100000" sy="100000" kx="0" ky="0" algn="bl" rotWithShape="0" blurRad="88900" dist="31750" dir="5400000">
+              <a:srgbClr val="1B2559">
+                <a:alpha val="15000"/>
+              </a:srgbClr>
+            </a:outerShdw>
+          </a:effectLst>
+        </p:spPr>
+        <p:txBody>
+          <a:bodyPr wrap="square" lIns="0" tIns="0" rIns="0" bIns="0" rtlCol="0" anchor="ctr"/>
+          <a:lstStyle/>
+          <a:p>
+            <a:pPr algn="ctr" indent="0" marL="0">
+              <a:buNone/>
+            </a:pPr>
+            <a:r>
+              <a:rPr lang="en-US" sz="1000" dirty="0">
+                <a:solidFill>
+                  <a:srgbClr val="FFFFFF"/>
+                </a:solidFill>
+                <a:latin typeface="Arial Rounded MT Bold" pitchFamily="34" charset="0"/>
+                <a:ea typeface="Arial Rounded MT Bold" pitchFamily="34" charset="-122"/>
+                <a:cs typeface="Arial Rounded MT Bold" pitchFamily="34" charset="-120"/>
+              </a:rPr>
+              <a:t>1</a:t>
+            </a:r>
+            <a:endParaRPr lang="en-US" sz="1000" dirty="0"/>
+          </a:p>
+        </p:txBody>
+      </p:sp>
+      <p:sp>
+        <p:nvSpPr>
+          <p:cNvPr id="13" name="R1_sl287"/>
+          <p:cNvSpPr/>
+          <p:nvPr/>
+        </p:nvSpPr>
+        <p:spPr>
+          <a:xfrm>
+            <a:off x="841248" y="1417320"/>
+            <a:ext cx="8046720" cy="499872"/>
+          </a:xfrm>
+          <a:prstGeom prst="roundRect">
+            <a:avLst>
+              <a:gd name="adj" fmla="val 21951"/>
+            </a:avLst>
+          </a:prstGeom>
+          <a:solidFill>
+            <a:srgbClr val="FFFFFF"/>
+          </a:solidFill>
+          <a:ln w="28575">
+            <a:solidFill>
+              <a:srgbClr val="F7A6C4"/>
+            </a:solidFill>
+          </a:ln>
+          <a:effectLst>
+            <a:outerShdw sx="100000" sy="100000" kx="0" ky="0" algn="bl" rotWithShape="0" blurRad="88900" dist="31750" dir="5400000">
+              <a:srgbClr val="1B2559">
+                <a:alpha val="8000"/>
+              </a:srgbClr>
+            </a:outerShdw>
+          </a:effectLst>
+        </p:spPr>
+        <p:txBody>
+          <a:bodyPr wrap="square" lIns="127000" tIns="25400" rIns="127000" bIns="25400" rtlCol="0" anchor="ctr"/>
+          <a:lstStyle/>
+          <a:p>
+            <a:pPr indent="0" marL="0">
+              <a:buNone/>
+            </a:pPr>
+            <a:r>
+              <a:rPr lang="en-US" sz="1250" dirty="0">
+                <a:solidFill>
+                  <a:srgbClr val="1B2559"/>
+                </a:solidFill>
+                <a:latin typeface="Segoe UI Semibold" pitchFamily="34" charset="0"/>
+                <a:ea typeface="Segoe UI Semibold" pitchFamily="34" charset="-122"/>
+                <a:cs typeface="Segoe UI Semibold" pitchFamily="34" charset="-120"/>
+              </a:rPr>
+              <a:t>arrives late · Same old Jake</a:t>
+            </a:r>
+            <a:endParaRPr lang="en-US" sz="1250" dirty="0"/>
+          </a:p>
+          <a:p>
+            <a:pPr indent="0" marL="0">
+              <a:buNone/>
+            </a:pPr>
+            <a:r>
+              <a:rPr lang="en-US" sz="900" i="1" dirty="0">
+                <a:solidFill>
+                  <a:srgbClr val="5B6785"/>
+                </a:solidFill>
+                <a:latin typeface="Segoe UI Semibold" pitchFamily="34" charset="0"/>
+                <a:ea typeface="Segoe UI Semibold" pitchFamily="34" charset="-122"/>
+                <a:cs typeface="Segoe UI Semibold" pitchFamily="34" charset="-120"/>
+              </a:rPr>
+              <a:t>💬 Jake arrives late.…</a:t>
+            </a:r>
+            <a:endParaRPr lang="en-US" sz="1250" dirty="0"/>
+          </a:p>
+        </p:txBody>
+      </p:sp>
+      <p:sp>
+        <p:nvSpPr>
+          <p:cNvPr id="14" name="R2_sb288"/>
+          <p:cNvSpPr/>
+          <p:nvPr/>
+        </p:nvSpPr>
+        <p:spPr>
+          <a:xfrm>
+            <a:off x="457200" y="2017776"/>
+            <a:ext cx="310896" cy="310896"/>
+          </a:xfrm>
+          <a:prstGeom prst="ellipse">
+            <a:avLst/>
+          </a:prstGeom>
+          <a:solidFill>
+            <a:srgbClr val="2F8DE4"/>
+          </a:solidFill>
+          <a:ln w="28575">
+            <a:solidFill>
+              <a:srgbClr val="A9D3F5"/>
+            </a:solidFill>
+          </a:ln>
+          <a:effectLst>
+            <a:outerShdw sx="100000" sy="100000" kx="0" ky="0" algn="bl" rotWithShape="0" blurRad="88900" dist="31750" dir="5400000">
+              <a:srgbClr val="1B2559">
+                <a:alpha val="15000"/>
+              </a:srgbClr>
+            </a:outerShdw>
+          </a:effectLst>
+        </p:spPr>
+        <p:txBody>
+          <a:bodyPr wrap="square" lIns="0" tIns="0" rIns="0" bIns="0" rtlCol="0" anchor="ctr"/>
+          <a:lstStyle/>
+          <a:p>
+            <a:pPr algn="ctr" indent="0" marL="0">
+              <a:buNone/>
+            </a:pPr>
+            <a:r>
+              <a:rPr lang="en-US" sz="1000" dirty="0">
+                <a:solidFill>
+                  <a:srgbClr val="FFFFFF"/>
+                </a:solidFill>
+                <a:latin typeface="Arial Rounded MT Bold" pitchFamily="34" charset="0"/>
+                <a:ea typeface="Arial Rounded MT Bold" pitchFamily="34" charset="-122"/>
+                <a:cs typeface="Arial Rounded MT Bold" pitchFamily="34" charset="-120"/>
+              </a:rPr>
+              <a:t>2</a:t>
+            </a:r>
+            <a:endParaRPr lang="en-US" sz="1000" dirty="0"/>
+          </a:p>
+        </p:txBody>
+      </p:sp>
+      <p:sp>
+        <p:nvSpPr>
+          <p:cNvPr id="15" name="R2_sl289"/>
+          <p:cNvSpPr/>
+          <p:nvPr/>
+        </p:nvSpPr>
+        <p:spPr>
+          <a:xfrm>
+            <a:off x="841248" y="1981200"/>
+            <a:ext cx="8046720" cy="499872"/>
+          </a:xfrm>
+          <a:prstGeom prst="roundRect">
+            <a:avLst>
+              <a:gd name="adj" fmla="val 21951"/>
+            </a:avLst>
+          </a:prstGeom>
+          <a:solidFill>
+            <a:srgbClr val="FFFFFF"/>
+          </a:solidFill>
+          <a:ln w="28575">
+            <a:solidFill>
+              <a:srgbClr val="A9D3F5"/>
+            </a:solidFill>
+          </a:ln>
+          <a:effectLst>
+            <a:outerShdw sx="100000" sy="100000" kx="0" ky="0" algn="bl" rotWithShape="0" blurRad="88900" dist="31750" dir="5400000">
+              <a:srgbClr val="1B2559">
+                <a:alpha val="8000"/>
+              </a:srgbClr>
+            </a:outerShdw>
+          </a:effectLst>
+        </p:spPr>
+        <p:txBody>
+          <a:bodyPr wrap="square" lIns="127000" tIns="25400" rIns="127000" bIns="25400" rtlCol="0" anchor="ctr"/>
+          <a:lstStyle/>
+          <a:p>
+            <a:pPr indent="0" marL="0">
+              <a:buNone/>
+            </a:pPr>
+            <a:r>
+              <a:rPr lang="en-US" sz="1250" dirty="0">
+                <a:solidFill>
+                  <a:srgbClr val="1B2559"/>
+                </a:solidFill>
+                <a:latin typeface="Segoe UI Semibold" pitchFamily="34" charset="0"/>
+                <a:ea typeface="Segoe UI Semibold" pitchFamily="34" charset="-122"/>
+                <a:cs typeface="Segoe UI Semibold" pitchFamily="34" charset="-120"/>
+              </a:rPr>
+              <a:t>order two cappuccinos · a croissant</a:t>
+            </a:r>
+            <a:endParaRPr lang="en-US" sz="1250" dirty="0"/>
+          </a:p>
+          <a:p>
+            <a:pPr indent="0" marL="0">
+              <a:buNone/>
+            </a:pPr>
+            <a:r>
+              <a:rPr lang="en-US" sz="900" i="1" dirty="0">
+                <a:solidFill>
+                  <a:srgbClr val="5B6785"/>
+                </a:solidFill>
+                <a:latin typeface="Segoe UI Semibold" pitchFamily="34" charset="0"/>
+                <a:ea typeface="Segoe UI Semibold" pitchFamily="34" charset="-122"/>
+                <a:cs typeface="Segoe UI Semibold" pitchFamily="34" charset="-120"/>
+              </a:rPr>
+              <a:t>💬 They order two…</a:t>
+            </a:r>
+            <a:endParaRPr lang="en-US" sz="1250" dirty="0"/>
+          </a:p>
+        </p:txBody>
+      </p:sp>
+      <p:sp>
+        <p:nvSpPr>
+          <p:cNvPr id="16" name="R3_sb290"/>
+          <p:cNvSpPr/>
+          <p:nvPr/>
+        </p:nvSpPr>
+        <p:spPr>
+          <a:xfrm>
+            <a:off x="457200" y="2581656"/>
+            <a:ext cx="310896" cy="310896"/>
+          </a:xfrm>
+          <a:prstGeom prst="ellipse">
+            <a:avLst/>
+          </a:prstGeom>
+          <a:solidFill>
+            <a:srgbClr val="2EB872"/>
+          </a:solidFill>
+          <a:ln w="28575">
+            <a:solidFill>
+              <a:srgbClr val="A8E5BE"/>
+            </a:solidFill>
+          </a:ln>
+          <a:effectLst>
+            <a:outerShdw sx="100000" sy="100000" kx="0" ky="0" algn="bl" rotWithShape="0" blurRad="88900" dist="31750" dir="5400000">
+              <a:srgbClr val="1B2559">
+                <a:alpha val="15000"/>
+              </a:srgbClr>
+            </a:outerShdw>
+          </a:effectLst>
+        </p:spPr>
+        <p:txBody>
+          <a:bodyPr wrap="square" lIns="0" tIns="0" rIns="0" bIns="0" rtlCol="0" anchor="ctr"/>
+          <a:lstStyle/>
+          <a:p>
+            <a:pPr algn="ctr" indent="0" marL="0">
+              <a:buNone/>
+            </a:pPr>
+            <a:r>
+              <a:rPr lang="en-US" sz="1000" dirty="0">
+                <a:solidFill>
+                  <a:srgbClr val="FFFFFF"/>
+                </a:solidFill>
+                <a:latin typeface="Arial Rounded MT Bold" pitchFamily="34" charset="0"/>
+                <a:ea typeface="Arial Rounded MT Bold" pitchFamily="34" charset="-122"/>
+                <a:cs typeface="Arial Rounded MT Bold" pitchFamily="34" charset="-120"/>
+              </a:rPr>
+              <a:t>3</a:t>
+            </a:r>
+            <a:endParaRPr lang="en-US" sz="1000" dirty="0"/>
+          </a:p>
+        </p:txBody>
+      </p:sp>
+      <p:sp>
+        <p:nvSpPr>
+          <p:cNvPr id="17" name="R3_sl291"/>
+          <p:cNvSpPr/>
+          <p:nvPr/>
+        </p:nvSpPr>
+        <p:spPr>
+          <a:xfrm>
+            <a:off x="841248" y="2545080"/>
+            <a:ext cx="8046720" cy="499872"/>
+          </a:xfrm>
+          <a:prstGeom prst="roundRect">
+            <a:avLst>
+              <a:gd name="adj" fmla="val 21951"/>
+            </a:avLst>
+          </a:prstGeom>
+          <a:solidFill>
+            <a:srgbClr val="FFFFFF"/>
+          </a:solidFill>
+          <a:ln w="28575">
+            <a:solidFill>
+              <a:srgbClr val="A8E5BE"/>
+            </a:solidFill>
+          </a:ln>
+          <a:effectLst>
+            <a:outerShdw sx="100000" sy="100000" kx="0" ky="0" algn="bl" rotWithShape="0" blurRad="88900" dist="31750" dir="5400000">
+              <a:srgbClr val="1B2559">
+                <a:alpha val="8000"/>
+              </a:srgbClr>
+            </a:outerShdw>
+          </a:effectLst>
+        </p:spPr>
+        <p:txBody>
+          <a:bodyPr wrap="square" lIns="127000" tIns="25400" rIns="127000" bIns="25400" rtlCol="0" anchor="ctr"/>
+          <a:lstStyle/>
+          <a:p>
+            <a:pPr indent="0" marL="0">
+              <a:buNone/>
+            </a:pPr>
+            <a:r>
+              <a:rPr lang="en-US" sz="1250" dirty="0">
+                <a:solidFill>
+                  <a:srgbClr val="1B2559"/>
+                </a:solidFill>
+                <a:latin typeface="Segoe UI Semibold" pitchFamily="34" charset="0"/>
+                <a:ea typeface="Segoe UI Semibold" pitchFamily="34" charset="-122"/>
+                <a:cs typeface="Segoe UI Semibold" pitchFamily="34" charset="-120"/>
+              </a:rPr>
+              <a:t>just like old times · Are you doing anything on Saturday</a:t>
+            </a:r>
+            <a:endParaRPr lang="en-US" sz="1250" dirty="0"/>
+          </a:p>
+          <a:p>
+            <a:pPr indent="0" marL="0">
+              <a:buNone/>
+            </a:pPr>
+            <a:r>
+              <a:rPr lang="en-US" sz="900" i="1" dirty="0">
+                <a:solidFill>
+                  <a:srgbClr val="5B6785"/>
+                </a:solidFill>
+                <a:latin typeface="Segoe UI Semibold" pitchFamily="34" charset="0"/>
+                <a:ea typeface="Segoe UI Semibold" pitchFamily="34" charset="-122"/>
+                <a:cs typeface="Segoe UI Semibold" pitchFamily="34" charset="-120"/>
+              </a:rPr>
+              <a:t>💬 Jake: 'It's great…</a:t>
+            </a:r>
+            <a:endParaRPr lang="en-US" sz="1250" dirty="0"/>
+          </a:p>
+        </p:txBody>
+      </p:sp>
+      <p:sp>
+        <p:nvSpPr>
+          <p:cNvPr id="18" name="R4_sb292"/>
+          <p:cNvSpPr/>
+          <p:nvPr/>
+        </p:nvSpPr>
+        <p:spPr>
+          <a:xfrm>
+            <a:off x="457200" y="3145536"/>
+            <a:ext cx="310896" cy="310896"/>
+          </a:xfrm>
+          <a:prstGeom prst="ellipse">
+            <a:avLst/>
+          </a:prstGeom>
+          <a:solidFill>
+            <a:srgbClr val="F2B705"/>
+          </a:solidFill>
+          <a:ln w="28575">
+            <a:solidFill>
+              <a:srgbClr val="FFE07A"/>
+            </a:solidFill>
+          </a:ln>
+          <a:effectLst>
+            <a:outerShdw sx="100000" sy="100000" kx="0" ky="0" algn="bl" rotWithShape="0" blurRad="88900" dist="31750" dir="5400000">
+              <a:srgbClr val="1B2559">
+                <a:alpha val="15000"/>
+              </a:srgbClr>
+            </a:outerShdw>
+          </a:effectLst>
+        </p:spPr>
+        <p:txBody>
+          <a:bodyPr wrap="square" lIns="0" tIns="0" rIns="0" bIns="0" rtlCol="0" anchor="ctr"/>
+          <a:lstStyle/>
+          <a:p>
+            <a:pPr algn="ctr" indent="0" marL="0">
+              <a:buNone/>
+            </a:pPr>
+            <a:r>
+              <a:rPr lang="en-US" sz="1000" dirty="0">
+                <a:solidFill>
+                  <a:srgbClr val="FFFFFF"/>
+                </a:solidFill>
+                <a:latin typeface="Arial Rounded MT Bold" pitchFamily="34" charset="0"/>
+                <a:ea typeface="Arial Rounded MT Bold" pitchFamily="34" charset="-122"/>
+                <a:cs typeface="Arial Rounded MT Bold" pitchFamily="34" charset="-120"/>
+              </a:rPr>
+              <a:t>4</a:t>
+            </a:r>
+            <a:endParaRPr lang="en-US" sz="1000" dirty="0"/>
+          </a:p>
+        </p:txBody>
+      </p:sp>
+      <p:sp>
+        <p:nvSpPr>
+          <p:cNvPr id="19" name="R4_sl293"/>
+          <p:cNvSpPr/>
+          <p:nvPr/>
+        </p:nvSpPr>
+        <p:spPr>
+          <a:xfrm>
+            <a:off x="841248" y="3108960"/>
+            <a:ext cx="8046720" cy="499872"/>
+          </a:xfrm>
+          <a:prstGeom prst="roundRect">
+            <a:avLst>
+              <a:gd name="adj" fmla="val 21951"/>
+            </a:avLst>
+          </a:prstGeom>
+          <a:solidFill>
+            <a:srgbClr val="FFFFFF"/>
+          </a:solidFill>
+          <a:ln w="28575">
+            <a:solidFill>
+              <a:srgbClr val="FFE07A"/>
+            </a:solidFill>
+          </a:ln>
+          <a:effectLst>
+            <a:outerShdw sx="100000" sy="100000" kx="0" ky="0" algn="bl" rotWithShape="0" blurRad="88900" dist="31750" dir="5400000">
+              <a:srgbClr val="1B2559">
+                <a:alpha val="8000"/>
+              </a:srgbClr>
+            </a:outerShdw>
+          </a:effectLst>
+        </p:spPr>
+        <p:txBody>
+          <a:bodyPr wrap="square" lIns="127000" tIns="25400" rIns="127000" bIns="25400" rtlCol="0" anchor="ctr"/>
+          <a:lstStyle/>
+          <a:p>
+            <a:pPr indent="0" marL="0">
+              <a:buNone/>
+            </a:pPr>
+            <a:r>
+              <a:rPr lang="en-US" sz="1250" dirty="0">
+                <a:solidFill>
+                  <a:srgbClr val="1B2559"/>
+                </a:solidFill>
+                <a:latin typeface="Segoe UI Semibold" pitchFamily="34" charset="0"/>
+                <a:ea typeface="Segoe UI Semibold" pitchFamily="34" charset="-122"/>
+                <a:cs typeface="Segoe UI Semibold" pitchFamily="34" charset="-120"/>
+              </a:rPr>
+              <a:t>I'm not single now · Mike · we're getting married</a:t>
+            </a:r>
+            <a:endParaRPr lang="en-US" sz="1250" dirty="0"/>
+          </a:p>
+          <a:p>
+            <a:pPr indent="0" marL="0">
+              <a:buNone/>
+            </a:pPr>
+            <a:r>
+              <a:rPr lang="en-US" sz="900" i="1" dirty="0">
+                <a:solidFill>
+                  <a:srgbClr val="5B6785"/>
+                </a:solidFill>
+                <a:latin typeface="Segoe UI Semibold" pitchFamily="34" charset="0"/>
+                <a:ea typeface="Segoe UI Semibold" pitchFamily="34" charset="-122"/>
+                <a:cs typeface="Segoe UI Semibold" pitchFamily="34" charset="-120"/>
+              </a:rPr>
+              <a:t>💬 Sarah: 'I'm not…</a:t>
+            </a:r>
+            <a:endParaRPr lang="en-US" sz="1250" dirty="0"/>
+          </a:p>
+        </p:txBody>
+      </p:sp>
+      <p:sp>
+        <p:nvSpPr>
+          <p:cNvPr id="20" name="R5_sb294"/>
+          <p:cNvSpPr/>
+          <p:nvPr/>
+        </p:nvSpPr>
+        <p:spPr>
+          <a:xfrm>
+            <a:off x="457200" y="3709416"/>
+            <a:ext cx="310896" cy="310896"/>
+          </a:xfrm>
+          <a:prstGeom prst="ellipse">
+            <a:avLst/>
+          </a:prstGeom>
+          <a:solidFill>
+            <a:srgbClr val="E8508F"/>
+          </a:solidFill>
+          <a:ln w="28575">
+            <a:solidFill>
+              <a:srgbClr val="F7A6C4"/>
+            </a:solidFill>
+          </a:ln>
+          <a:effectLst>
+            <a:outerShdw sx="100000" sy="100000" kx="0" ky="0" algn="bl" rotWithShape="0" blurRad="88900" dist="31750" dir="5400000">
+              <a:srgbClr val="1B2559">
+                <a:alpha val="15000"/>
+              </a:srgbClr>
+            </a:outerShdw>
+          </a:effectLst>
+        </p:spPr>
+        <p:txBody>
+          <a:bodyPr wrap="square" lIns="0" tIns="0" rIns="0" bIns="0" rtlCol="0" anchor="ctr"/>
+          <a:lstStyle/>
+          <a:p>
+            <a:pPr algn="ctr" indent="0" marL="0">
+              <a:buNone/>
+            </a:pPr>
+            <a:r>
+              <a:rPr lang="en-US" sz="1000" dirty="0">
+                <a:solidFill>
+                  <a:srgbClr val="FFFFFF"/>
+                </a:solidFill>
+                <a:latin typeface="Arial Rounded MT Bold" pitchFamily="34" charset="0"/>
+                <a:ea typeface="Arial Rounded MT Bold" pitchFamily="34" charset="-122"/>
+                <a:cs typeface="Arial Rounded MT Bold" pitchFamily="34" charset="-120"/>
+              </a:rPr>
+              <a:t>5</a:t>
+            </a:r>
+            <a:endParaRPr lang="en-US" sz="1000" dirty="0"/>
+          </a:p>
+        </p:txBody>
+      </p:sp>
+      <p:sp>
+        <p:nvSpPr>
+          <p:cNvPr id="21" name="R5_sl295"/>
+          <p:cNvSpPr/>
+          <p:nvPr/>
+        </p:nvSpPr>
+        <p:spPr>
+          <a:xfrm>
+            <a:off x="841248" y="3672840"/>
+            <a:ext cx="8046720" cy="499872"/>
+          </a:xfrm>
+          <a:prstGeom prst="roundRect">
+            <a:avLst>
+              <a:gd name="adj" fmla="val 21951"/>
+            </a:avLst>
+          </a:prstGeom>
+          <a:solidFill>
+            <a:srgbClr val="FFFFFF"/>
+          </a:solidFill>
+          <a:ln w="28575">
+            <a:solidFill>
+              <a:srgbClr val="F7A6C4"/>
+            </a:solidFill>
+          </a:ln>
+          <a:effectLst>
+            <a:outerShdw sx="100000" sy="100000" kx="0" ky="0" algn="bl" rotWithShape="0" blurRad="88900" dist="31750" dir="5400000">
+              <a:srgbClr val="1B2559">
+                <a:alpha val="8000"/>
+              </a:srgbClr>
+            </a:outerShdw>
+          </a:effectLst>
+        </p:spPr>
+        <p:txBody>
+          <a:bodyPr wrap="square" lIns="127000" tIns="25400" rIns="127000" bIns="25400" rtlCol="0" anchor="ctr"/>
+          <a:lstStyle/>
+          <a:p>
+            <a:pPr indent="0" marL="0">
+              <a:buNone/>
+            </a:pPr>
+            <a:r>
+              <a:rPr lang="en-US" sz="1250" dirty="0">
+                <a:solidFill>
+                  <a:srgbClr val="1B2559"/>
+                </a:solidFill>
+                <a:latin typeface="Segoe UI Semibold" pitchFamily="34" charset="0"/>
+                <a:ea typeface="Segoe UI Semibold" pitchFamily="34" charset="-122"/>
+                <a:cs typeface="Segoe UI Semibold" pitchFamily="34" charset="-120"/>
+              </a:rPr>
+              <a:t>great news · I wish you all the best</a:t>
+            </a:r>
+            <a:endParaRPr lang="en-US" sz="1250" dirty="0"/>
+          </a:p>
+          <a:p>
+            <a:pPr indent="0" marL="0">
+              <a:buNone/>
+            </a:pPr>
+            <a:r>
+              <a:rPr lang="en-US" sz="900" i="1" dirty="0">
+                <a:solidFill>
+                  <a:srgbClr val="5B6785"/>
+                </a:solidFill>
+                <a:latin typeface="Segoe UI Semibold" pitchFamily="34" charset="0"/>
+                <a:ea typeface="Segoe UI Semibold" pitchFamily="34" charset="-122"/>
+                <a:cs typeface="Segoe UI Semibold" pitchFamily="34" charset="-120"/>
+              </a:rPr>
+              <a:t>💬 Jake: 'Wow! That's……</a:t>
+            </a:r>
+            <a:endParaRPr lang="en-US" sz="1250" dirty="0"/>
+          </a:p>
+        </p:txBody>
+      </p:sp>
+      <p:sp>
+        <p:nvSpPr>
+          <p:cNvPr id="22" name="R6_sb296"/>
+          <p:cNvSpPr/>
+          <p:nvPr/>
+        </p:nvSpPr>
+        <p:spPr>
+          <a:xfrm>
+            <a:off x="457200" y="4273296"/>
+            <a:ext cx="310896" cy="310896"/>
+          </a:xfrm>
+          <a:prstGeom prst="ellipse">
+            <a:avLst/>
+          </a:prstGeom>
+          <a:solidFill>
+            <a:srgbClr val="2F8DE4"/>
+          </a:solidFill>
+          <a:ln w="28575">
+            <a:solidFill>
+              <a:srgbClr val="A9D3F5"/>
+            </a:solidFill>
+          </a:ln>
+          <a:effectLst>
+            <a:outerShdw sx="100000" sy="100000" kx="0" ky="0" algn="bl" rotWithShape="0" blurRad="88900" dist="31750" dir="5400000">
+              <a:srgbClr val="1B2559">
+                <a:alpha val="15000"/>
+              </a:srgbClr>
+            </a:outerShdw>
+          </a:effectLst>
+        </p:spPr>
+        <p:txBody>
+          <a:bodyPr wrap="square" lIns="0" tIns="0" rIns="0" bIns="0" rtlCol="0" anchor="ctr"/>
+          <a:lstStyle/>
+          <a:p>
+            <a:pPr algn="ctr" indent="0" marL="0">
+              <a:buNone/>
+            </a:pPr>
+            <a:r>
+              <a:rPr lang="en-US" sz="1000" dirty="0">
+                <a:solidFill>
+                  <a:srgbClr val="FFFFFF"/>
+                </a:solidFill>
+                <a:latin typeface="Arial Rounded MT Bold" pitchFamily="34" charset="0"/>
+                <a:ea typeface="Arial Rounded MT Bold" pitchFamily="34" charset="-122"/>
+                <a:cs typeface="Arial Rounded MT Bold" pitchFamily="34" charset="-120"/>
+              </a:rPr>
+              <a:t>6</a:t>
+            </a:r>
+            <a:endParaRPr lang="en-US" sz="1000" dirty="0"/>
+          </a:p>
+        </p:txBody>
+      </p:sp>
+      <p:sp>
+        <p:nvSpPr>
+          <p:cNvPr id="23" name="R6_sl297"/>
+          <p:cNvSpPr/>
+          <p:nvPr/>
+        </p:nvSpPr>
+        <p:spPr>
+          <a:xfrm>
+            <a:off x="841248" y="4236720"/>
+            <a:ext cx="8046720" cy="499872"/>
+          </a:xfrm>
+          <a:prstGeom prst="roundRect">
+            <a:avLst>
+              <a:gd name="adj" fmla="val 21951"/>
+            </a:avLst>
+          </a:prstGeom>
+          <a:solidFill>
+            <a:srgbClr val="FFFFFF"/>
+          </a:solidFill>
+          <a:ln w="28575">
+            <a:solidFill>
+              <a:srgbClr val="A9D3F5"/>
+            </a:solidFill>
+          </a:ln>
+          <a:effectLst>
+            <a:outerShdw sx="100000" sy="100000" kx="0" ky="0" algn="bl" rotWithShape="0" blurRad="88900" dist="31750" dir="5400000">
+              <a:srgbClr val="1B2559">
+                <a:alpha val="8000"/>
+              </a:srgbClr>
+            </a:outerShdw>
+          </a:effectLst>
+        </p:spPr>
+        <p:txBody>
+          <a:bodyPr wrap="square" lIns="127000" tIns="25400" rIns="127000" bIns="25400" rtlCol="0" anchor="ctr"/>
+          <a:lstStyle/>
+          <a:p>
+            <a:pPr indent="0" marL="0">
+              <a:buNone/>
+            </a:pPr>
+            <a:r>
+              <a:rPr lang="en-US" sz="1250" dirty="0">
+                <a:solidFill>
+                  <a:srgbClr val="1B2559"/>
+                </a:solidFill>
+                <a:latin typeface="Segoe UI Semibold" pitchFamily="34" charset="0"/>
+                <a:ea typeface="Segoe UI Semibold" pitchFamily="34" charset="-122"/>
+                <a:cs typeface="Segoe UI Semibold" pitchFamily="34" charset="-120"/>
+              </a:rPr>
+              <a:t>Change 2 things in the story!</a:t>
+            </a:r>
+            <a:endParaRPr lang="en-US" sz="1250" dirty="0"/>
+          </a:p>
+          <a:p>
+            <a:pPr indent="0" marL="0">
+              <a:buNone/>
+            </a:pPr>
+            <a:r>
+              <a:rPr lang="en-US" sz="900" i="1" dirty="0">
+                <a:solidFill>
+                  <a:srgbClr val="5B6785"/>
+                </a:solidFill>
+                <a:latin typeface="Segoe UI Semibold" pitchFamily="34" charset="0"/>
+                <a:ea typeface="Segoe UI Semibold" pitchFamily="34" charset="-122"/>
+                <a:cs typeface="Segoe UI Semibold" pitchFamily="34" charset="-120"/>
+              </a:rPr>
+              <a:t>💬 In my story…</a:t>
+            </a:r>
+            <a:endParaRPr lang="en-US" sz="1250" dirty="0"/>
+          </a:p>
+        </p:txBody>
+      </p:sp>
+    </p:spTree>
+  </p:cSld>
+  <p:clrMapOvr>
+    <a:masterClrMapping/>
+  </p:clrMapOvr>
+  <p:transition spd="med">
+    <p:push dir="l"/>
+  </p:transition>
+  <p:timing>
+    <p:tnLst>
+      <p:par>
+        <p:cTn id="1" dur="indefinite" restart="never" nodeType="tmRoot">
+          <p:childTnLst>
+            <p:seq concurrent="1" nextAc="seek">
+              <p:cTn id="2" dur="indefinite" nodeType="mainSeq">
+                <p:childTnLst>
+                  <p:par>
+                    <p:cTn id="3" fill="hold">
+                      <p:stCondLst>
+                        <p:cond delay="indefinite"/>
+                      </p:stCondLst>
+                      <p:childTnLst>
+                        <p:par>
+                          <p:cTn id="4" fill="hold">
+                            <p:stCondLst>
+                              <p:cond delay="0"/>
+                            </p:stCondLst>
+                            <p:childTnLst>
+                              <p:par>
+                                <p:cTn id="5" presetID="10" presetClass="entr" presetSubtype="0" fill="hold" nodeType="clickEffect">
+                                  <p:stCondLst>
+                                    <p:cond delay="0"/>
+                                  </p:stCondLst>
+                                  <p:childTnLst>
+                                    <p:set>
+                                      <p:cBhvr>
+                                        <p:cTn id="6" dur="1" fill="hold">
+                                          <p:stCondLst>
+                                            <p:cond delay="0"/>
+                                          </p:stCondLst>
+                                        </p:cTn>
+                                        <p:tgtEl>
+                                          <p:spTgt spid="12"/>
+                                        </p:tgtEl>
+                                        <p:attrNameLst>
+                                          <p:attrName>style.visibility</p:attrName>
+                                        </p:attrNameLst>
+                                      </p:cBhvr>
+                                      <p:to>
+                                        <p:strVal val="visible"/>
+                                      </p:to>
+                                    </p:set>
+                                    <p:animEffect transition="in" filter="fade">
+                                      <p:cBhvr>
+                                        <p:cTn id="7" dur="400"/>
+                                        <p:tgtEl>
+                                          <p:spTgt spid="12"/>
+                                        </p:tgtEl>
+                                      </p:cBhvr>
+                                    </p:animEffect>
+                                  </p:childTnLst>
+                                </p:cTn>
+                              </p:par>
+                              <p:par>
+                                <p:cTn id="8" presetID="10" presetClass="entr" presetSubtype="0" fill="hold" nodeType="withEffect">
+                                  <p:stCondLst>
+                                    <p:cond delay="0"/>
+                                  </p:stCondLst>
+                                  <p:childTnLst>
+                                    <p:set>
+                                      <p:cBhvr>
+                                        <p:cTn id="9" dur="1" fill="hold">
+                                          <p:stCondLst>
+                                            <p:cond delay="0"/>
+                                          </p:stCondLst>
+                                        </p:cTn>
+                                        <p:tgtEl>
+                                          <p:spTgt spid="13"/>
+                                        </p:tgtEl>
+                                        <p:attrNameLst>
+                                          <p:attrName>style.visibility</p:attrName>
+                                        </p:attrNameLst>
+                                      </p:cBhvr>
+                                      <p:to>
+                                        <p:strVal val="visible"/>
+                                      </p:to>
+                                    </p:set>
+                                    <p:animEffect transition="in" filter="fade">
+                                      <p:cBhvr>
+                                        <p:cTn id="10" dur="400"/>
+                                        <p:tgtEl>
+                                          <p:spTgt spid="13"/>
+                                        </p:tgtEl>
+                                      </p:cBhvr>
+                                    </p:animEffect>
+                                  </p:childTnLst>
+                                </p:cTn>
+                              </p:par>
+                            </p:childTnLst>
+                          </p:cTn>
+                        </p:par>
+                      </p:childTnLst>
+                    </p:cTn>
+                  </p:par>
+                  <p:par>
+                    <p:cTn id="11" fill="hold">
+                      <p:stCondLst>
+                        <p:cond delay="indefinite"/>
+                      </p:stCondLst>
+                      <p:childTnLst>
+                        <p:par>
+                          <p:cTn id="12" fill="hold">
+                            <p:stCondLst>
+                              <p:cond delay="0"/>
+                            </p:stCondLst>
+                            <p:childTnLst>
+                              <p:par>
+                                <p:cTn id="13" presetID="10" presetClass="entr" presetSubtype="0" fill="hold" nodeType="clickEffect">
+                                  <p:stCondLst>
+                                    <p:cond delay="0"/>
+                                  </p:stCondLst>
+                                  <p:childTnLst>
+                                    <p:set>
+                                      <p:cBhvr>
+                                        <p:cTn id="14" dur="1" fill="hold">
+                                          <p:stCondLst>
+                                            <p:cond delay="0"/>
+                                          </p:stCondLst>
+                                        </p:cTn>
+                                        <p:tgtEl>
+                                          <p:spTgt spid="14"/>
+                                        </p:tgtEl>
+                                        <p:attrNameLst>
+                                          <p:attrName>style.visibility</p:attrName>
+                                        </p:attrNameLst>
+                                      </p:cBhvr>
+                                      <p:to>
+                                        <p:strVal val="visible"/>
+                                      </p:to>
+                                    </p:set>
+                                    <p:animEffect transition="in" filter="fade">
+                                      <p:cBhvr>
+                                        <p:cTn id="15" dur="400"/>
+                                        <p:tgtEl>
+                                          <p:spTgt spid="14"/>
+                                        </p:tgtEl>
+                                      </p:cBhvr>
+                                    </p:animEffect>
+                                  </p:childTnLst>
+                                </p:cTn>
+                              </p:par>
+                              <p:par>
+                                <p:cTn id="16" presetID="10" presetClass="entr" presetSubtype="0" fill="hold" nodeType="withEffect">
+                                  <p:stCondLst>
+                                    <p:cond delay="0"/>
+                                  </p:stCondLst>
+                                  <p:childTnLst>
+                                    <p:set>
+                                      <p:cBhvr>
+                                        <p:cTn id="17" dur="1" fill="hold">
+                                          <p:stCondLst>
+                                            <p:cond delay="0"/>
+                                          </p:stCondLst>
+                                        </p:cTn>
+                                        <p:tgtEl>
+                                          <p:spTgt spid="15"/>
+                                        </p:tgtEl>
+                                        <p:attrNameLst>
+                                          <p:attrName>style.visibility</p:attrName>
+                                        </p:attrNameLst>
+                                      </p:cBhvr>
+                                      <p:to>
+                                        <p:strVal val="visible"/>
+                                      </p:to>
+                                    </p:set>
+                                    <p:animEffect transition="in" filter="fade">
+                                      <p:cBhvr>
+                                        <p:cTn id="18" dur="400"/>
+                                        <p:tgtEl>
+                                          <p:spTgt spid="15"/>
+                                        </p:tgtEl>
+                                      </p:cBhvr>
+                                    </p:animEffect>
+                                  </p:childTnLst>
+                                </p:cTn>
+                              </p:par>
+                            </p:childTnLst>
+                          </p:cTn>
+                        </p:par>
+                      </p:childTnLst>
+                    </p:cTn>
+                  </p:par>
+                  <p:par>
+                    <p:cTn id="19" fill="hold">
+                      <p:stCondLst>
+                        <p:cond delay="indefinite"/>
+                      </p:stCondLst>
+                      <p:childTnLst>
+                        <p:par>
+                          <p:cTn id="20" fill="hold">
+                            <p:stCondLst>
+                              <p:cond delay="0"/>
+                            </p:stCondLst>
+                            <p:childTnLst>
+                              <p:par>
+                                <p:cTn id="21" presetID="10" presetClass="entr" presetSubtype="0" fill="hold" nodeType="clickEffect">
+                                  <p:stCondLst>
+                                    <p:cond delay="0"/>
+                                  </p:stCondLst>
+                                  <p:childTnLst>
+                                    <p:set>
+                                      <p:cBhvr>
+                                        <p:cTn id="22" dur="1" fill="hold">
+                                          <p:stCondLst>
+                                            <p:cond delay="0"/>
+                                          </p:stCondLst>
+                                        </p:cTn>
+                                        <p:tgtEl>
+                                          <p:spTgt spid="16"/>
+                                        </p:tgtEl>
+                                        <p:attrNameLst>
+                                          <p:attrName>style.visibility</p:attrName>
+                                        </p:attrNameLst>
+                                      </p:cBhvr>
+                                      <p:to>
+                                        <p:strVal val="visible"/>
+                                      </p:to>
+                                    </p:set>
+                                    <p:animEffect transition="in" filter="fade">
+                                      <p:cBhvr>
+                                        <p:cTn id="23" dur="400"/>
+                                        <p:tgtEl>
+                                          <p:spTgt spid="16"/>
+                                        </p:tgtEl>
+                                      </p:cBhvr>
+                                    </p:animEffect>
+                                  </p:childTnLst>
+                                </p:cTn>
+                              </p:par>
+                              <p:par>
+                                <p:cTn id="24" presetID="10" presetClass="entr" presetSubtype="0" fill="hold" nodeType="withEffect">
+                                  <p:stCondLst>
+                                    <p:cond delay="0"/>
+                                  </p:stCondLst>
+                                  <p:childTnLst>
+                                    <p:set>
+                                      <p:cBhvr>
+                                        <p:cTn id="25" dur="1" fill="hold">
+                                          <p:stCondLst>
+                                            <p:cond delay="0"/>
+                                          </p:stCondLst>
+                                        </p:cTn>
+                                        <p:tgtEl>
+                                          <p:spTgt spid="17"/>
+                                        </p:tgtEl>
+                                        <p:attrNameLst>
+                                          <p:attrName>style.visibility</p:attrName>
+                                        </p:attrNameLst>
+                                      </p:cBhvr>
+                                      <p:to>
+                                        <p:strVal val="visible"/>
+                                      </p:to>
+                                    </p:set>
+                                    <p:animEffect transition="in" filter="fade">
+                                      <p:cBhvr>
+                                        <p:cTn id="26" dur="400"/>
+                                        <p:tgtEl>
+                                          <p:spTgt spid="17"/>
+                                        </p:tgtEl>
+                                      </p:cBhvr>
+                                    </p:animEffect>
+                                  </p:childTnLst>
+                                </p:cTn>
+                              </p:par>
+                            </p:childTnLst>
+                          </p:cTn>
+                        </p:par>
+                      </p:childTnLst>
+                    </p:cTn>
+                  </p:par>
+                  <p:par>
+                    <p:cTn id="27" fill="hold">
+                      <p:stCondLst>
+                        <p:cond delay="indefinite"/>
+                      </p:stCondLst>
+                      <p:childTnLst>
+                        <p:par>
+                          <p:cTn id="28" fill="hold">
+                            <p:stCondLst>
+                              <p:cond delay="0"/>
+                            </p:stCondLst>
+                            <p:childTnLst>
+                              <p:par>
+                                <p:cTn id="29" presetID="10" presetClass="entr" presetSubtype="0" fill="hold" nodeType="clickEffect">
+                                  <p:stCondLst>
+                                    <p:cond delay="0"/>
+                                  </p:stCondLst>
+                                  <p:childTnLst>
+                                    <p:set>
+                                      <p:cBhvr>
+                                        <p:cTn id="30" dur="1" fill="hold">
+                                          <p:stCondLst>
+                                            <p:cond delay="0"/>
+                                          </p:stCondLst>
+                                        </p:cTn>
+                                        <p:tgtEl>
+                                          <p:spTgt spid="18"/>
+                                        </p:tgtEl>
+                                        <p:attrNameLst>
+                                          <p:attrName>style.visibility</p:attrName>
+                                        </p:attrNameLst>
+                                      </p:cBhvr>
+                                      <p:to>
+                                        <p:strVal val="visible"/>
+                                      </p:to>
+                                    </p:set>
+                                    <p:animEffect transition="in" filter="fade">
+                                      <p:cBhvr>
+                                        <p:cTn id="31" dur="400"/>
+                                        <p:tgtEl>
+                                          <p:spTgt spid="18"/>
+                                        </p:tgtEl>
+                                      </p:cBhvr>
+                                    </p:animEffect>
+                                  </p:childTnLst>
+                                </p:cTn>
+                              </p:par>
+                              <p:par>
+                                <p:cTn id="32" presetID="10" presetClass="entr" presetSubtype="0" fill="hold" nodeType="withEffect">
+                                  <p:stCondLst>
+                                    <p:cond delay="0"/>
+                                  </p:stCondLst>
+                                  <p:childTnLst>
+                                    <p:set>
+                                      <p:cBhvr>
+                                        <p:cTn id="33" dur="1" fill="hold">
+                                          <p:stCondLst>
+                                            <p:cond delay="0"/>
+                                          </p:stCondLst>
+                                        </p:cTn>
+                                        <p:tgtEl>
+                                          <p:spTgt spid="19"/>
+                                        </p:tgtEl>
+                                        <p:attrNameLst>
+                                          <p:attrName>style.visibility</p:attrName>
+                                        </p:attrNameLst>
+                                      </p:cBhvr>
+                                      <p:to>
+                                        <p:strVal val="visible"/>
+                                      </p:to>
+                                    </p:set>
+                                    <p:animEffect transition="in" filter="fade">
+                                      <p:cBhvr>
+                                        <p:cTn id="34" dur="400"/>
+                                        <p:tgtEl>
+                                          <p:spTgt spid="19"/>
+                                        </p:tgtEl>
+                                      </p:cBhvr>
+                                    </p:animEffect>
+                                  </p:childTnLst>
+                                </p:cTn>
+                              </p:par>
+                            </p:childTnLst>
+                          </p:cTn>
+                        </p:par>
+                      </p:childTnLst>
+                    </p:cTn>
+                  </p:par>
+                  <p:par>
+                    <p:cTn id="35" fill="hold">
+                      <p:stCondLst>
+                        <p:cond delay="indefinite"/>
+                      </p:stCondLst>
+                      <p:childTnLst>
+                        <p:par>
+                          <p:cTn id="36" fill="hold">
+                            <p:stCondLst>
+                              <p:cond delay="0"/>
+                            </p:stCondLst>
+                            <p:childTnLst>
+                              <p:par>
+                                <p:cTn id="37" presetID="10" presetClass="entr" presetSubtype="0" fill="hold" nodeType="clickEffect">
+                                  <p:stCondLst>
+                                    <p:cond delay="0"/>
+                                  </p:stCondLst>
+                                  <p:childTnLst>
+                                    <p:set>
+                                      <p:cBhvr>
+                                        <p:cTn id="38" dur="1" fill="hold">
+                                          <p:stCondLst>
+                                            <p:cond delay="0"/>
+                                          </p:stCondLst>
+                                        </p:cTn>
+                                        <p:tgtEl>
+                                          <p:spTgt spid="20"/>
+                                        </p:tgtEl>
+                                        <p:attrNameLst>
+                                          <p:attrName>style.visibility</p:attrName>
+                                        </p:attrNameLst>
+                                      </p:cBhvr>
+                                      <p:to>
+                                        <p:strVal val="visible"/>
+                                      </p:to>
+                                    </p:set>
+                                    <p:animEffect transition="in" filter="fade">
+                                      <p:cBhvr>
+                                        <p:cTn id="39" dur="400"/>
+                                        <p:tgtEl>
+                                          <p:spTgt spid="20"/>
+                                        </p:tgtEl>
+                                      </p:cBhvr>
+                                    </p:animEffect>
+                                  </p:childTnLst>
+                                </p:cTn>
+                              </p:par>
+                              <p:par>
+                                <p:cTn id="40" presetID="10" presetClass="entr" presetSubtype="0" fill="hold" nodeType="withEffect">
+                                  <p:stCondLst>
+                                    <p:cond delay="0"/>
+                                  </p:stCondLst>
+                                  <p:childTnLst>
+                                    <p:set>
+                                      <p:cBhvr>
+                                        <p:cTn id="41" dur="1" fill="hold">
+                                          <p:stCondLst>
+                                            <p:cond delay="0"/>
+                                          </p:stCondLst>
+                                        </p:cTn>
+                                        <p:tgtEl>
+                                          <p:spTgt spid="21"/>
+                                        </p:tgtEl>
+                                        <p:attrNameLst>
+                                          <p:attrName>style.visibility</p:attrName>
+                                        </p:attrNameLst>
+                                      </p:cBhvr>
+                                      <p:to>
+                                        <p:strVal val="visible"/>
+                                      </p:to>
+                                    </p:set>
+                                    <p:animEffect transition="in" filter="fade">
+                                      <p:cBhvr>
+                                        <p:cTn id="42" dur="400"/>
+                                        <p:tgtEl>
+                                          <p:spTgt spid="21"/>
+                                        </p:tgtEl>
+                                      </p:cBhvr>
+                                    </p:animEffect>
+                                  </p:childTnLst>
+                                </p:cTn>
+                              </p:par>
+                            </p:childTnLst>
+                          </p:cTn>
+                        </p:par>
+                      </p:childTnLst>
+                    </p:cTn>
+                  </p:par>
+                  <p:par>
+                    <p:cTn id="43" fill="hold">
+                      <p:stCondLst>
+                        <p:cond delay="indefinite"/>
+                      </p:stCondLst>
+                      <p:childTnLst>
+                        <p:par>
+                          <p:cTn id="44" fill="hold">
+                            <p:stCondLst>
+                              <p:cond delay="0"/>
+                            </p:stCondLst>
+                            <p:childTnLst>
+                              <p:par>
+                                <p:cTn id="45" presetID="10" presetClass="entr" presetSubtype="0" fill="hold" nodeType="clickEffect">
+                                  <p:stCondLst>
+                                    <p:cond delay="0"/>
+                                  </p:stCondLst>
+                                  <p:childTnLst>
+                                    <p:set>
+                                      <p:cBhvr>
+                                        <p:cTn id="46" dur="1" fill="hold">
+                                          <p:stCondLst>
+                                            <p:cond delay="0"/>
+                                          </p:stCondLst>
+                                        </p:cTn>
+                                        <p:tgtEl>
+                                          <p:spTgt spid="22"/>
+                                        </p:tgtEl>
+                                        <p:attrNameLst>
+                                          <p:attrName>style.visibility</p:attrName>
+                                        </p:attrNameLst>
+                                      </p:cBhvr>
+                                      <p:to>
+                                        <p:strVal val="visible"/>
+                                      </p:to>
+                                    </p:set>
+                                    <p:animEffect transition="in" filter="fade">
+                                      <p:cBhvr>
+                                        <p:cTn id="47" dur="400"/>
+                                        <p:tgtEl>
+                                          <p:spTgt spid="22"/>
+                                        </p:tgtEl>
+                                      </p:cBhvr>
+                                    </p:animEffect>
+                                  </p:childTnLst>
+                                </p:cTn>
+                              </p:par>
+                              <p:par>
+                                <p:cTn id="48" presetID="10" presetClass="entr" presetSubtype="0" fill="hold" nodeType="withEffect">
+                                  <p:stCondLst>
+                                    <p:cond delay="0"/>
+                                  </p:stCondLst>
+                                  <p:childTnLst>
+                                    <p:set>
+                                      <p:cBhvr>
+                                        <p:cTn id="49" dur="1" fill="hold">
+                                          <p:stCondLst>
+                                            <p:cond delay="0"/>
+                                          </p:stCondLst>
+                                        </p:cTn>
+                                        <p:tgtEl>
+                                          <p:spTgt spid="23"/>
+                                        </p:tgtEl>
+                                        <p:attrNameLst>
+                                          <p:attrName>style.visibility</p:attrName>
+                                        </p:attrNameLst>
+                                      </p:cBhvr>
+                                      <p:to>
+                                        <p:strVal val="visible"/>
+                                      </p:to>
+                                    </p:set>
+                                    <p:animEffect transition="in" filter="fade">
+                                      <p:cBhvr>
+                                        <p:cTn id="50" dur="400"/>
+                                        <p:tgtEl>
+                                          <p:spTgt spid="23"/>
+                                        </p:tgtEl>
+                                      </p:cBhvr>
+                                    </p:animEffect>
+                                  </p:childTnLst>
+                                </p:cTn>
+                              </p:par>
+                            </p:childTnLst>
+                          </p:cTn>
+                        </p:par>
+                      </p:childTnLst>
+                    </p:cTn>
+                  </p:par>
+                </p:childTnLst>
+              </p:cTn>
+              <p:prevCondLst>
+                <p:cond evt="onPrev" delay="0">
+                  <p:tgtEl>
+                    <p:sldTgt/>
+                  </p:tgtEl>
+                </p:cond>
+              </p:prevCondLst>
+              <p:nextCondLst>
+                <p:cond evt="onNext" delay="0">
+                  <p:tgtEl>
+                    <p:sldTgt/>
+                  </p:tgtEl>
+                </p:cond>
+              </p:nextCondLst>
+            </p:seq>
+          </p:childTnLst>
+        </p:cTn>
+      </p:par>
+    </p:tnLst>
+  </p:timing>
+</p:sld>
+</file>
+
+<file path=ppt/slides/slide12.xml><?xml version="1.0" encoding="utf-8"?>
+<p:sld xmlns:a="http://schemas.openxmlformats.org/drawingml/2006/main" xmlns:r="http://schemas.openxmlformats.org/officeDocument/2006/relationships" xmlns:p="http://schemas.openxmlformats.org/presentationml/2006/main">
+  <p:cSld name="Slide 12">
+    <p:bg>
+      <p:bgPr>
+        <a:blipFill dpi="0" rotWithShape="1">
+          <a:blip r:embed="rId1">
+            <a:lum/>
+          </a:blip>
+          <a:srcRect/>
+          <a:stretch>
+            <a:fillRect/>
+          </a:stretch>
+        </a:blipFill>
+        <a:effectLst/>
+      </p:bgPr>
+    </p:bg>
+    <p:spTree>
+      <p:nvGrpSpPr>
+        <p:cNvPr id="2" name=""/>
+        <p:cNvGrpSpPr/>
+        <p:nvPr/>
+      </p:nvGrpSpPr>
+      <p:grpSpPr>
+        <a:xfrm>
+          <a:off x="0" y="0"/>
+          <a:ext cx="0" cy="0"/>
+          <a:chOff x="0" y="0"/>
+          <a:chExt cx="0" cy="0"/>
+        </a:xfrm>
+      </p:grpSpPr>
+      <p:sp>
+        <p:nvSpPr>
+          <p:cNvPr id="3" name="bd_298"/>
+          <p:cNvSpPr/>
+          <p:nvPr/>
+        </p:nvSpPr>
+        <p:spPr>
+          <a:xfrm>
+            <a:off x="201168" y="164592"/>
+            <a:ext cx="841248" cy="841248"/>
+          </a:xfrm>
+          <a:prstGeom prst="ellipse">
+            <a:avLst/>
+          </a:prstGeom>
+          <a:solidFill>
+            <a:srgbClr val="2EB872"/>
+          </a:solidFill>
+          <a:ln w="28575">
+            <a:solidFill>
+              <a:srgbClr val="A8E5BE"/>
+            </a:solidFill>
+          </a:ln>
+          <a:effectLst>
+            <a:outerShdw sx="100000" sy="100000" kx="0" ky="0" algn="bl" rotWithShape="0" blurRad="88900" dist="31750" dir="5400000">
+              <a:srgbClr val="1B2559">
+                <a:alpha val="15000"/>
+              </a:srgbClr>
+            </a:outerShdw>
+          </a:effectLst>
+        </p:spPr>
+        <p:txBody>
+          <a:bodyPr wrap="square" lIns="0" tIns="0" rIns="0" bIns="0" rtlCol="0" anchor="ctr"/>
+          <a:lstStyle/>
+          <a:p>
+            <a:pPr algn="ctr" indent="0" marL="0">
+              <a:buNone/>
+            </a:pPr>
+            <a:r>
+              <a:rPr lang="en-US" sz="2200" dirty="0">
+                <a:solidFill>
+                  <a:srgbClr val="FFFFFF"/>
+                </a:solidFill>
+                <a:latin typeface="Arial Rounded MT Bold" pitchFamily="34" charset="0"/>
+                <a:ea typeface="Arial Rounded MT Bold" pitchFamily="34" charset="-122"/>
+                <a:cs typeface="Arial Rounded MT Bold" pitchFamily="34" charset="-120"/>
+              </a:rPr>
+              <a:t>12</a:t>
+            </a:r>
+            <a:endParaRPr lang="en-US" sz="2200" dirty="0"/>
+          </a:p>
+        </p:txBody>
+      </p:sp>
+      <p:pic>
+        <p:nvPicPr>
+          <p:cNvPr id="4" name="brY_299" descr="/home/claude/lls-course/v2/assets/brush-yellow.png">    </p:cNvPr>
+          <p:cNvPicPr>
+            <a:picLocks noChangeAspect="1"/>
+          </p:cNvPicPr>
+          <p:nvPr/>
+        </p:nvPicPr>
+        <p:blipFill>
+          <a:blip r:embed="rId2"/>
+          <a:stretch>
+            <a:fillRect/>
+          </a:stretch>
+        </p:blipFill>
+        <p:spPr>
+          <a:xfrm>
+            <a:off x="1097280" y="146304"/>
+            <a:ext cx="3562502" cy="621792"/>
+          </a:xfrm>
+          <a:prstGeom prst="rect">
+            <a:avLst/>
+          </a:prstGeom>
+        </p:spPr>
+      </p:pic>
+      <p:sp>
+        <p:nvSpPr>
+          <p:cNvPr id="5" name="title_300"/>
+          <p:cNvSpPr/>
+          <p:nvPr/>
+        </p:nvSpPr>
+        <p:spPr>
+          <a:xfrm>
+            <a:off x="1261872" y="164592"/>
+            <a:ext cx="3288182" cy="566928"/>
+          </a:xfrm>
+          <a:prstGeom prst="rect">
+            <a:avLst/>
+          </a:prstGeom>
+          <a:noFill/>
+          <a:ln/>
+        </p:spPr>
+        <p:txBody>
+          <a:bodyPr wrap="square" lIns="0" tIns="0" rIns="0" bIns="0" rtlCol="0" anchor="ctr">
+            <a:normAutofit/>
+          </a:bodyPr>
+          <a:lstStyle/>
+          <a:p>
+            <a:pPr indent="0" marL="0">
+              <a:buNone/>
+            </a:pPr>
+            <a:r>
+              <a:rPr lang="en-US" sz="2500" dirty="0">
+                <a:solidFill>
+                  <a:srgbClr val="1B2559"/>
+                </a:solidFill>
+                <a:latin typeface="Arial Rounded MT Bold" pitchFamily="34" charset="0"/>
+                <a:ea typeface="Arial Rounded MT Bold" pitchFamily="34" charset="-122"/>
+                <a:cs typeface="Arial Rounded MT Bold" pitchFamily="34" charset="-120"/>
+              </a:rPr>
+              <a:t>Present or future?</a:t>
+            </a:r>
+            <a:endParaRPr lang="en-US" sz="2500" dirty="0"/>
+          </a:p>
+        </p:txBody>
+      </p:sp>
+      <p:pic>
+        <p:nvPicPr>
+          <p:cNvPr id="6" name="brP_301" descr="/home/claude/lls-course/v2/assets/brush-pink.png">    </p:cNvPr>
+          <p:cNvPicPr>
+            <a:picLocks noChangeAspect="1"/>
+          </p:cNvPicPr>
+          <p:nvPr/>
+        </p:nvPicPr>
+        <p:blipFill>
+          <a:blip r:embed="rId3"/>
+          <a:stretch>
+            <a:fillRect/>
+          </a:stretch>
+        </p:blipFill>
+        <p:spPr>
+          <a:xfrm>
+            <a:off x="1207008" y="731520"/>
+            <a:ext cx="5257800" cy="402336"/>
+          </a:xfrm>
+          <a:prstGeom prst="rect">
+            <a:avLst/>
+          </a:prstGeom>
+        </p:spPr>
+      </p:pic>
+      <p:sp>
+        <p:nvSpPr>
+          <p:cNvPr id="7" name="ins_302"/>
+          <p:cNvSpPr/>
+          <p:nvPr/>
+        </p:nvSpPr>
+        <p:spPr>
+          <a:xfrm>
+            <a:off x="1353312" y="731520"/>
+            <a:ext cx="5001768" cy="402336"/>
+          </a:xfrm>
+          <a:prstGeom prst="rect">
+            <a:avLst/>
+          </a:prstGeom>
+          <a:noFill/>
+          <a:ln/>
+        </p:spPr>
+        <p:txBody>
+          <a:bodyPr wrap="square" lIns="0" tIns="0" rIns="0" bIns="0" rtlCol="0" anchor="ctr">
+            <a:normAutofit/>
+          </a:bodyPr>
+          <a:lstStyle/>
+          <a:p>
+            <a:pPr indent="0" marL="0">
+              <a:buNone/>
+            </a:pPr>
+            <a:r>
+              <a:rPr lang="en-US" sz="1250" i="1" dirty="0">
+                <a:solidFill>
+                  <a:srgbClr val="1B2559"/>
+                </a:solidFill>
+                <a:latin typeface="Segoe UI Semibold" pitchFamily="34" charset="0"/>
+                <a:ea typeface="Segoe UI Semibold" pitchFamily="34" charset="-122"/>
+                <a:cs typeface="Segoe UI Semibold" pitchFamily="34" charset="-120"/>
+              </a:rPr>
+              <a:t>Complete with the present continuous. Present or future?</a:t>
+            </a:r>
+            <a:endParaRPr lang="en-US" sz="1250" dirty="0"/>
+          </a:p>
+        </p:txBody>
+      </p:sp>
+      <p:sp>
+        <p:nvSpPr>
+          <p:cNvPr id="8" name="insIT_303"/>
+          <p:cNvSpPr/>
+          <p:nvPr/>
+        </p:nvSpPr>
+        <p:spPr>
+          <a:xfrm>
+            <a:off x="1371600" y="1115568"/>
+            <a:ext cx="5074920" cy="219456"/>
+          </a:xfrm>
+          <a:prstGeom prst="rect">
+            <a:avLst/>
+          </a:prstGeom>
+          <a:noFill/>
+          <a:ln/>
+        </p:spPr>
+        <p:txBody>
+          <a:bodyPr wrap="square" lIns="0" tIns="0" rIns="0" bIns="0" rtlCol="0" anchor="ctr">
+            <a:normAutofit/>
+          </a:bodyPr>
+          <a:lstStyle/>
+          <a:p>
+            <a:pPr indent="0" marL="0">
+              <a:buNone/>
+            </a:pPr>
+            <a:r>
+              <a:rPr lang="en-US" sz="950" i="1" dirty="0">
+                <a:solidFill>
+                  <a:srgbClr val="5B6785"/>
+                </a:solidFill>
+                <a:latin typeface="Segoe UI Semibold" pitchFamily="34" charset="0"/>
+                <a:ea typeface="Segoe UI Semibold" pitchFamily="34" charset="-122"/>
+                <a:cs typeface="Segoe UI Semibold" pitchFamily="34" charset="-120"/>
+              </a:rPr>
+              <a:t>Completa con il present continuous. Presente o futuro?</a:t>
+            </a:r>
+            <a:endParaRPr lang="en-US" sz="950" dirty="0"/>
+          </a:p>
+        </p:txBody>
+      </p:sp>
+      <p:sp>
+        <p:nvSpPr>
+          <p:cNvPr id="9" name="note_304"/>
+          <p:cNvSpPr/>
+          <p:nvPr/>
+        </p:nvSpPr>
+        <p:spPr>
+          <a:xfrm rot="180000">
+            <a:off x="6382512" y="128016"/>
+            <a:ext cx="2029968" cy="1024128"/>
+          </a:xfrm>
+          <a:prstGeom prst="rect">
+            <a:avLst/>
+          </a:prstGeom>
+          <a:solidFill>
+            <a:srgbClr val="FFC2DA"/>
+          </a:solidFill>
+          <a:ln>
+            <a:solidFill>
+              <a:srgbClr val="FFC2DA"/>
+            </a:solidFill>
+          </a:ln>
+          <a:effectLst>
+            <a:outerShdw sx="100000" sy="100000" kx="0" ky="0" algn="bl" rotWithShape="0" blurRad="88900" dist="31750" dir="5400000">
+              <a:srgbClr val="1B2559">
+                <a:alpha val="15000"/>
+              </a:srgbClr>
+            </a:outerShdw>
+          </a:effectLst>
+        </p:spPr>
+        <p:txBody>
+          <a:bodyPr wrap="square" lIns="50800" tIns="50800" rIns="50800" bIns="50800" rtlCol="0" anchor="ctr">
+            <a:normAutofit/>
+          </a:bodyPr>
+          <a:lstStyle/>
+          <a:p>
+            <a:pPr algn="ctr" indent="0" marL="0">
+              <a:buNone/>
+            </a:pPr>
+            <a:r>
+              <a:rPr lang="en-US" sz="1150" dirty="0">
+                <a:solidFill>
+                  <a:srgbClr val="1B2559"/>
+                </a:solidFill>
+                <a:latin typeface="Arial Rounded MT Bold" pitchFamily="34" charset="0"/>
+                <a:ea typeface="Arial Rounded MT Bold" pitchFamily="34" charset="-122"/>
+                <a:cs typeface="Arial Rounded MT Bold" pitchFamily="34" charset="-120"/>
+              </a:rPr>
+              <a:t>✏️ FILL THE GAPS</a:t>
+            </a:r>
+            <a:pPr algn="ctr" indent="0" marL="0">
+              <a:buNone/>
+            </a:pPr>
+            <a:r>
+              <a:rPr lang="en-US" sz="1200" dirty="0">
+                <a:solidFill>
+                  <a:srgbClr val="5B6785"/>
+                </a:solidFill>
+              </a:rPr>
+              <a:t> → </a:t>
+            </a:r>
+            <a:pPr algn="ctr" indent="0" marL="0">
+              <a:buNone/>
+            </a:pPr>
+            <a:r>
+              <a:rPr lang="en-US" sz="1150" dirty="0">
+                <a:solidFill>
+                  <a:srgbClr val="1B2559"/>
+                </a:solidFill>
+                <a:latin typeface="Arial Rounded MT Bold" pitchFamily="34" charset="0"/>
+                <a:ea typeface="Arial Rounded MT Bold" pitchFamily="34" charset="-122"/>
+                <a:cs typeface="Arial Rounded MT Bold" pitchFamily="34" charset="-120"/>
+              </a:rPr>
+              <a:t>💡 THINK</a:t>
+            </a:r>
+            <a:endParaRPr lang="en-US" sz="1150" dirty="0"/>
+          </a:p>
+          <a:p>
+            <a:pPr algn="ctr" indent="0" marL="0">
+              <a:buNone/>
+            </a:pPr>
+            <a:r>
+              <a:rPr lang="en-US" sz="1100" dirty="0">
+                <a:solidFill>
+                  <a:srgbClr val="1B2559"/>
+                </a:solidFill>
+                <a:latin typeface="Segoe UI Semibold" pitchFamily="34" charset="0"/>
+                <a:ea typeface="Segoe UI Semibold" pitchFamily="34" charset="-122"/>
+                <a:cs typeface="Segoe UI Semibold" pitchFamily="34" charset="-120"/>
+              </a:rPr>
+              <a:t>⏱ 4 min   👥 pairs</a:t>
+            </a:r>
+            <a:endParaRPr lang="en-US" sz="1150" dirty="0"/>
+          </a:p>
+          <a:p>
+            <a:pPr algn="ctr" indent="0" marL="0">
+              <a:buNone/>
+            </a:pPr>
+            <a:r>
+              <a:rPr lang="en-US" sz="900" dirty="0">
+                <a:solidFill>
+                  <a:srgbClr val="5B6785"/>
+                </a:solidFill>
+                <a:latin typeface="Segoe UI Semibold" pitchFamily="34" charset="0"/>
+                <a:ea typeface="Segoe UI Semibold" pitchFamily="34" charset="-122"/>
+                <a:cs typeface="Segoe UI Semibold" pitchFamily="34" charset="-120"/>
+              </a:rPr>
+              <a:t>🎯 Grammar · Guided discovery</a:t>
+            </a:r>
+            <a:endParaRPr lang="en-US" sz="1150" dirty="0"/>
+          </a:p>
+        </p:txBody>
+      </p:sp>
+      <p:pic>
+        <p:nvPicPr>
+          <p:cNvPr id="10" name="logo_305" descr="/home/claude/lls-course/v2/img/logo.png">    </p:cNvPr>
+          <p:cNvPicPr>
+            <a:picLocks noChangeAspect="1"/>
+          </p:cNvPicPr>
+          <p:nvPr/>
+        </p:nvPicPr>
+        <p:blipFill>
+          <a:blip r:embed="rId4"/>
+          <a:stretch>
+            <a:fillRect/>
+          </a:stretch>
+        </p:blipFill>
+        <p:spPr>
+          <a:xfrm>
+            <a:off x="8485632" y="128016"/>
+            <a:ext cx="502920" cy="502920"/>
+          </a:xfrm>
+          <a:prstGeom prst="rect">
+            <a:avLst/>
+          </a:prstGeom>
+        </p:spPr>
+      </p:pic>
+      <p:sp>
+        <p:nvSpPr>
+          <p:cNvPr id="11" name="foot_306"/>
+          <p:cNvSpPr/>
+          <p:nvPr/>
+        </p:nvSpPr>
+        <p:spPr>
+          <a:xfrm>
+            <a:off x="274320" y="4873752"/>
+            <a:ext cx="6858000" cy="219456"/>
+          </a:xfrm>
+          <a:prstGeom prst="rect">
+            <a:avLst/>
+          </a:prstGeom>
+          <a:noFill/>
+          <a:ln/>
+        </p:spPr>
+        <p:txBody>
+          <a:bodyPr wrap="square" lIns="0" tIns="0" rIns="0" bIns="0" rtlCol="0" anchor="ctr"/>
+          <a:lstStyle/>
+          <a:p>
+            <a:pPr indent="0" marL="0">
+              <a:buNone/>
+            </a:pPr>
+            <a:r>
+              <a:rPr lang="en-US" sz="800" dirty="0">
+                <a:solidFill>
+                  <a:srgbClr val="5B6785"/>
+                </a:solidFill>
+                <a:latin typeface="Segoe UI Semibold" pitchFamily="34" charset="0"/>
+                <a:ea typeface="Segoe UI Semibold" pitchFamily="34" charset="-122"/>
+                <a:cs typeface="Segoe UI Semibold" pitchFamily="34" charset="-120"/>
+              </a:rPr>
               <a:t>3B · Grammar · present continuous for the future   ·   📖 SB p.25 · 4a · audio 3.11 (TG key)</a:t>
             </a:r>
             <a:endParaRPr lang="en-US" sz="800" dirty="0"/>
@@ -5482,7 +7639,7 @@
       </p:sp>
       <p:sp>
         <p:nvSpPr>
-          <p:cNvPr id="12" name="cd_286"/>
+          <p:cNvPr id="12" name="cd_307"/>
           <p:cNvSpPr/>
           <p:nvPr/>
         </p:nvSpPr>
@@ -5516,7 +7673,7 @@
       </p:sp>
       <p:sp>
         <p:nvSpPr>
-          <p:cNvPr id="13" name="rd_287"/>
+          <p:cNvPr id="13" name="rd_308"/>
           <p:cNvSpPr/>
           <p:nvPr/>
         </p:nvSpPr>
@@ -5899,7 +8056,7 @@
       </p:sp>
       <p:sp>
         <p:nvSpPr>
-          <p:cNvPr id="14" name="R2_rdA288"/>
+          <p:cNvPr id="14" name="R2_rdA309"/>
           <p:cNvSpPr/>
           <p:nvPr/>
         </p:nvSpPr>
@@ -6287,7 +8444,7 @@
       </p:sp>
       <p:sp>
         <p:nvSpPr>
-          <p:cNvPr id="15" name="R3_rdA289"/>
+          <p:cNvPr id="15" name="R3_rdA310"/>
           <p:cNvSpPr/>
           <p:nvPr/>
         </p:nvSpPr>
@@ -6678,7 +8835,7 @@
       </p:sp>
       <p:sp>
         <p:nvSpPr>
-          <p:cNvPr id="16" name="R4_rdA290"/>
+          <p:cNvPr id="16" name="R4_rdA311"/>
           <p:cNvSpPr/>
           <p:nvPr/>
         </p:nvSpPr>
@@ -7072,7 +9229,7 @@
       </p:sp>
       <p:sp>
         <p:nvSpPr>
-          <p:cNvPr id="17" name="R5_rdA291"/>
+          <p:cNvPr id="17" name="R5_rdA312"/>
           <p:cNvSpPr/>
           <p:nvPr/>
         </p:nvSpPr>
@@ -7469,7 +9626,7 @@
       </p:sp>
       <p:sp>
         <p:nvSpPr>
-          <p:cNvPr id="18" name="R6_rdA292"/>
+          <p:cNvPr id="18" name="R6_rdA313"/>
           <p:cNvSpPr/>
           <p:nvPr/>
         </p:nvSpPr>
@@ -7869,7 +10026,7 @@
       </p:sp>
       <p:sp>
         <p:nvSpPr>
-          <p:cNvPr id="19" name="cd_293"/>
+          <p:cNvPr id="19" name="cd_314"/>
           <p:cNvSpPr/>
           <p:nvPr/>
         </p:nvSpPr>
@@ -7903,7 +10060,7 @@
       </p:sp>
       <p:sp>
         <p:nvSpPr>
-          <p:cNvPr id="20" name="ii_294"/>
+          <p:cNvPr id="20" name="ii_315"/>
           <p:cNvSpPr/>
           <p:nvPr/>
         </p:nvSpPr>
@@ -7939,7 +10096,7 @@
       </p:sp>
       <p:sp>
         <p:nvSpPr>
-          <p:cNvPr id="21" name="ih_295"/>
+          <p:cNvPr id="21" name="ih_316"/>
           <p:cNvSpPr/>
           <p:nvPr/>
         </p:nvSpPr>
@@ -7978,7 +10135,7 @@
       </p:sp>
       <p:sp>
         <p:nvSpPr>
-          <p:cNvPr id="22" name="il_296"/>
+          <p:cNvPr id="22" name="il_317"/>
           <p:cNvSpPr/>
           <p:nvPr/>
         </p:nvSpPr>
@@ -8071,7 +10228,7 @@
       </p:sp>
       <p:sp>
         <p:nvSpPr>
-          <p:cNvPr id="23" name="R1_chip297"/>
+          <p:cNvPr id="23" name="R1_chip318"/>
           <p:cNvSpPr/>
           <p:nvPr/>
         </p:nvSpPr>
@@ -8477,9 +10634,9 @@
 </p:sld>
 </file>
 
-<file path=ppt/slides/slide12.xml><?xml version="1.0" encoding="utf-8"?>
+<file path=ppt/slides/slide13.xml><?xml version="1.0" encoding="utf-8"?>
 <p:sld xmlns:a="http://schemas.openxmlformats.org/drawingml/2006/main" xmlns:r="http://schemas.openxmlformats.org/officeDocument/2006/relationships" xmlns:p="http://schemas.openxmlformats.org/presentationml/2006/main">
-  <p:cSld name="Slide 12">
+  <p:cSld name="Slide 13">
     <p:bg>
       <p:bgPr>
         <a:blipFill dpi="0" rotWithShape="1">
@@ -8510,7 +10667,7 @@
       </p:grpSpPr>
       <p:sp>
         <p:nvSpPr>
-          <p:cNvPr id="3" name="bd_298"/>
+          <p:cNvPr id="3" name="bd_319"/>
           <p:cNvSpPr/>
           <p:nvPr/>
         </p:nvSpPr>
@@ -8554,7 +10711,7 @@
                 <a:ea typeface="Arial Rounded MT Bold" pitchFamily="34" charset="-122"/>
                 <a:cs typeface="Arial Rounded MT Bold" pitchFamily="34" charset="-120"/>
               </a:rPr>
-              <a:t>12</a:t>
+              <a:t>13</a:t>
             </a:r>
             <a:endParaRPr lang="en-US" sz="2200" dirty="0"/>
           </a:p>
@@ -8562,7 +10719,7 @@
       </p:sp>
       <p:pic>
         <p:nvPicPr>
-          <p:cNvPr id="4" name="brY_299" descr="/home/claude/lls-course/v2/assets/brush-yellow.png">    </p:cNvPr>
+          <p:cNvPr id="4" name="brY_320" descr="/home/claude/lls-course/v2/assets/brush-yellow.png">    </p:cNvPr>
           <p:cNvPicPr>
             <a:picLocks noChangeAspect="1"/>
           </p:cNvPicPr>
@@ -8586,7 +10743,7 @@
       </p:pic>
       <p:sp>
         <p:nvSpPr>
-          <p:cNvPr id="5" name="title_300"/>
+          <p:cNvPr id="5" name="title_321"/>
           <p:cNvSpPr/>
           <p:nvPr/>
         </p:nvSpPr>
@@ -8627,7 +10784,7 @@
       </p:sp>
       <p:pic>
         <p:nvPicPr>
-          <p:cNvPr id="6" name="brP_301" descr="/home/claude/lls-course/v2/assets/brush-pink.png">    </p:cNvPr>
+          <p:cNvPr id="6" name="brP_322" descr="/home/claude/lls-course/v2/assets/brush-pink.png">    </p:cNvPr>
           <p:cNvPicPr>
             <a:picLocks noChangeAspect="1"/>
           </p:cNvPicPr>
@@ -8651,7 +10808,7 @@
       </p:pic>
       <p:sp>
         <p:nvSpPr>
-          <p:cNvPr id="7" name="ins_302"/>
+          <p:cNvPr id="7" name="ins_323"/>
           <p:cNvSpPr/>
           <p:nvPr/>
         </p:nvSpPr>
@@ -8692,7 +10849,7 @@
       </p:sp>
       <p:sp>
         <p:nvSpPr>
-          <p:cNvPr id="8" name="insIT_303"/>
+          <p:cNvPr id="8" name="insIT_324"/>
           <p:cNvSpPr/>
           <p:nvPr/>
         </p:nvSpPr>
@@ -8733,7 +10890,7 @@
       </p:sp>
       <p:sp>
         <p:nvSpPr>
-          <p:cNvPr id="9" name="note_304"/>
+          <p:cNvPr id="9" name="note_325"/>
           <p:cNvSpPr/>
           <p:nvPr/>
         </p:nvSpPr>
@@ -8835,7 +10992,7 @@
       </p:sp>
       <p:pic>
         <p:nvPicPr>
-          <p:cNvPr id="10" name="logo_305" descr="/home/claude/lls-course/v2/img/logo.png">    </p:cNvPr>
+          <p:cNvPr id="10" name="logo_326" descr="/home/claude/lls-course/v2/img/logo.png">    </p:cNvPr>
           <p:cNvPicPr>
             <a:picLocks noChangeAspect="1"/>
           </p:cNvPicPr>
@@ -8859,7 +11016,7 @@
       </p:pic>
       <p:sp>
         <p:nvSpPr>
-          <p:cNvPr id="11" name="foot_306"/>
+          <p:cNvPr id="11" name="foot_327"/>
           <p:cNvSpPr/>
           <p:nvPr/>
         </p:nvSpPr>
@@ -8898,7 +11055,7 @@
       </p:sp>
       <p:sp>
         <p:nvSpPr>
-          <p:cNvPr id="12" name="cd_307"/>
+          <p:cNvPr id="12" name="cd_328"/>
           <p:cNvSpPr/>
           <p:nvPr/>
         </p:nvSpPr>
@@ -8932,7 +11089,7 @@
       </p:sp>
       <p:sp>
         <p:nvSpPr>
-          <p:cNvPr id="13" name="rh_308"/>
+          <p:cNvPr id="13" name="rh_329"/>
           <p:cNvSpPr/>
           <p:nvPr/>
         </p:nvSpPr>
@@ -8977,7 +11134,7 @@
       </p:sp>
       <p:sp>
         <p:nvSpPr>
-          <p:cNvPr id="14" name="R1_rx309"/>
+          <p:cNvPr id="14" name="R1_rx330"/>
           <p:cNvSpPr/>
           <p:nvPr/>
         </p:nvSpPr>
@@ -9061,7 +11218,7 @@
       </p:sp>
       <p:sp>
         <p:nvSpPr>
-          <p:cNvPr id="15" name="R1_ri310"/>
+          <p:cNvPr id="15" name="R1_ri331"/>
           <p:cNvSpPr/>
           <p:nvPr/>
         </p:nvSpPr>
@@ -9102,7 +11259,7 @@
       </p:sp>
       <p:sp>
         <p:nvSpPr>
-          <p:cNvPr id="16" name="cd_311"/>
+          <p:cNvPr id="16" name="cd_332"/>
           <p:cNvSpPr/>
           <p:nvPr/>
         </p:nvSpPr>
@@ -9136,7 +11293,7 @@
       </p:sp>
       <p:sp>
         <p:nvSpPr>
-          <p:cNvPr id="17" name="rh_312"/>
+          <p:cNvPr id="17" name="rh_333"/>
           <p:cNvSpPr/>
           <p:nvPr/>
         </p:nvSpPr>
@@ -9181,7 +11338,7 @@
       </p:sp>
       <p:sp>
         <p:nvSpPr>
-          <p:cNvPr id="18" name="R2_rx313"/>
+          <p:cNvPr id="18" name="R2_rx334"/>
           <p:cNvSpPr/>
           <p:nvPr/>
         </p:nvSpPr>
@@ -9265,7 +11422,7 @@
       </p:sp>
       <p:sp>
         <p:nvSpPr>
-          <p:cNvPr id="19" name="R2_ri314"/>
+          <p:cNvPr id="19" name="R2_ri335"/>
           <p:cNvSpPr/>
           <p:nvPr/>
         </p:nvSpPr>
@@ -9306,7 +11463,7 @@
       </p:sp>
       <p:sp>
         <p:nvSpPr>
-          <p:cNvPr id="20" name="R3_wc315"/>
+          <p:cNvPr id="20" name="R3_wc336"/>
           <p:cNvSpPr/>
           <p:nvPr/>
         </p:nvSpPr>
@@ -9340,7 +11497,7 @@
       </p:sp>
       <p:sp>
         <p:nvSpPr>
-          <p:cNvPr id="21" name="R3_w316"/>
+          <p:cNvPr id="21" name="R3_w337"/>
           <p:cNvSpPr/>
           <p:nvPr/>
         </p:nvSpPr>
@@ -9684,9 +11841,9 @@
 </p:sld>
 </file>
 
-<file path=ppt/slides/slide13.xml><?xml version="1.0" encoding="utf-8"?>
+<file path=ppt/slides/slide14.xml><?xml version="1.0" encoding="utf-8"?>
 <p:sld xmlns:a="http://schemas.openxmlformats.org/drawingml/2006/main" xmlns:r="http://schemas.openxmlformats.org/officeDocument/2006/relationships" xmlns:p="http://schemas.openxmlformats.org/presentationml/2006/main">
-  <p:cSld name="Slide 13">
+  <p:cSld name="Slide 14">
     <p:bg>
       <p:bgPr>
         <a:blipFill dpi="0" rotWithShape="1">
@@ -9717,7 +11874,7 @@
       </p:grpSpPr>
       <p:sp>
         <p:nvSpPr>
-          <p:cNvPr id="3" name="bd_317"/>
+          <p:cNvPr id="3" name="bd_338"/>
           <p:cNvSpPr/>
           <p:nvPr/>
         </p:nvSpPr>
@@ -9761,7 +11918,7 @@
                 <a:ea typeface="Arial Rounded MT Bold" pitchFamily="34" charset="-122"/>
                 <a:cs typeface="Arial Rounded MT Bold" pitchFamily="34" charset="-120"/>
               </a:rPr>
-              <a:t>13</a:t>
+              <a:t>14</a:t>
             </a:r>
             <a:endParaRPr lang="en-US" sz="2200" dirty="0"/>
           </a:p>
@@ -9769,7 +11926,7 @@
       </p:sp>
       <p:pic>
         <p:nvPicPr>
-          <p:cNvPr id="4" name="brY_318" descr="/home/claude/lls-course/v2/assets/brush-yellow.png">    </p:cNvPr>
+          <p:cNvPr id="4" name="brY_339" descr="/home/claude/lls-course/v2/assets/brush-yellow.png">    </p:cNvPr>
           <p:cNvPicPr>
             <a:picLocks noChangeAspect="1"/>
           </p:cNvPicPr>
@@ -9793,7 +11950,7 @@
       </p:pic>
       <p:sp>
         <p:nvSpPr>
-          <p:cNvPr id="5" name="title_319"/>
+          <p:cNvPr id="5" name="title_340"/>
           <p:cNvSpPr/>
           <p:nvPr/>
         </p:nvSpPr>
@@ -9834,7 +11991,7 @@
       </p:sp>
       <p:pic>
         <p:nvPicPr>
-          <p:cNvPr id="6" name="brP_320" descr="/home/claude/lls-course/v2/assets/brush-pink.png">    </p:cNvPr>
+          <p:cNvPr id="6" name="brP_341" descr="/home/claude/lls-course/v2/assets/brush-pink.png">    </p:cNvPr>
           <p:cNvPicPr>
             <a:picLocks noChangeAspect="1"/>
           </p:cNvPicPr>
@@ -9858,7 +12015,7 @@
       </p:pic>
       <p:sp>
         <p:nvSpPr>
-          <p:cNvPr id="7" name="ins_321"/>
+          <p:cNvPr id="7" name="ins_342"/>
           <p:cNvSpPr/>
           <p:nvPr/>
         </p:nvSpPr>
@@ -9899,7 +12056,7 @@
       </p:sp>
       <p:sp>
         <p:nvSpPr>
-          <p:cNvPr id="8" name="insIT_322"/>
+          <p:cNvPr id="8" name="insIT_343"/>
           <p:cNvSpPr/>
           <p:nvPr/>
         </p:nvSpPr>
@@ -9940,7 +12097,7 @@
       </p:sp>
       <p:sp>
         <p:nvSpPr>
-          <p:cNvPr id="9" name="note_323"/>
+          <p:cNvPr id="9" name="note_344"/>
           <p:cNvSpPr/>
           <p:nvPr/>
         </p:nvSpPr>
@@ -10042,7 +12199,7 @@
       </p:sp>
       <p:pic>
         <p:nvPicPr>
-          <p:cNvPr id="10" name="logo_324" descr="/home/claude/lls-course/v2/img/logo.png">    </p:cNvPr>
+          <p:cNvPr id="10" name="logo_345" descr="/home/claude/lls-course/v2/img/logo.png">    </p:cNvPr>
           <p:cNvPicPr>
             <a:picLocks noChangeAspect="1"/>
           </p:cNvPicPr>
@@ -10066,7 +12223,7 @@
       </p:pic>
       <p:sp>
         <p:nvSpPr>
-          <p:cNvPr id="11" name="foot_325"/>
+          <p:cNvPr id="11" name="foot_346"/>
           <p:cNvSpPr/>
           <p:nvPr/>
         </p:nvSpPr>
@@ -10105,7 +12262,7 @@
       </p:sp>
       <p:sp>
         <p:nvSpPr>
-          <p:cNvPr id="12" name="pf_326"/>
+          <p:cNvPr id="12" name="pf_347"/>
           <p:cNvSpPr/>
           <p:nvPr/>
         </p:nvSpPr>
@@ -10139,7 +12296,7 @@
       </p:sp>
       <p:pic>
         <p:nvPicPr>
-          <p:cNvPr id="13" name="ph_327" descr="/home/claude/lls-course/v2/cache/a2_3b_jake_jpg_149x297_31.png">    </p:cNvPr>
+          <p:cNvPr id="13" name="ph_348" descr="/home/claude/lls-course/v2/cache/a2_3b_jake_jpg_149x297_31.png">    </p:cNvPr>
           <p:cNvPicPr>
             <a:picLocks noChangeAspect="1"/>
           </p:cNvPicPr>
@@ -10163,7 +12320,7 @@
       </p:pic>
       <p:sp>
         <p:nvSpPr>
-          <p:cNvPr id="14" name="cd_328"/>
+          <p:cNvPr id="14" name="cd_349"/>
           <p:cNvSpPr/>
           <p:nvPr/>
         </p:nvSpPr>
@@ -10197,7 +12354,7 @@
       </p:sp>
       <p:sp>
         <p:nvSpPr>
-          <p:cNvPr id="15" name="ii_329"/>
+          <p:cNvPr id="15" name="ii_350"/>
           <p:cNvSpPr/>
           <p:nvPr/>
         </p:nvSpPr>
@@ -10233,7 +12390,7 @@
       </p:sp>
       <p:sp>
         <p:nvSpPr>
-          <p:cNvPr id="16" name="ih_330"/>
+          <p:cNvPr id="16" name="ih_351"/>
           <p:cNvSpPr/>
           <p:nvPr/>
         </p:nvSpPr>
@@ -10272,7 +12429,7 @@
       </p:sp>
       <p:sp>
         <p:nvSpPr>
-          <p:cNvPr id="17" name="il_331"/>
+          <p:cNvPr id="17" name="il_352"/>
           <p:cNvSpPr/>
           <p:nvPr/>
         </p:nvSpPr>
@@ -10389,7 +12546,7 @@
       </p:sp>
       <p:sp>
         <p:nvSpPr>
-          <p:cNvPr id="18" name="R1_qb332"/>
+          <p:cNvPr id="18" name="R1_qb353"/>
           <p:cNvSpPr/>
           <p:nvPr/>
         </p:nvSpPr>
@@ -10441,7 +12598,7 @@
       </p:sp>
       <p:sp>
         <p:nvSpPr>
-          <p:cNvPr id="19" name="R1_sq333"/>
+          <p:cNvPr id="19" name="R1_sq354"/>
           <p:cNvSpPr/>
           <p:nvPr/>
         </p:nvSpPr>
@@ -10514,7 +12671,7 @@
       </p:sp>
       <p:sp>
         <p:nvSpPr>
-          <p:cNvPr id="20" name="R2_qb334"/>
+          <p:cNvPr id="20" name="R2_qb355"/>
           <p:cNvSpPr/>
           <p:nvPr/>
         </p:nvSpPr>
@@ -10566,7 +12723,7 @@
       </p:sp>
       <p:sp>
         <p:nvSpPr>
-          <p:cNvPr id="21" name="R2_sq335"/>
+          <p:cNvPr id="21" name="R2_sq356"/>
           <p:cNvSpPr/>
           <p:nvPr/>
         </p:nvSpPr>
@@ -10639,7 +12796,7 @@
       </p:sp>
       <p:sp>
         <p:nvSpPr>
-          <p:cNvPr id="22" name="R3_qb336"/>
+          <p:cNvPr id="22" name="R3_qb357"/>
           <p:cNvSpPr/>
           <p:nvPr/>
         </p:nvSpPr>
@@ -10691,7 +12848,7 @@
       </p:sp>
       <p:sp>
         <p:nvSpPr>
-          <p:cNvPr id="23" name="R3_sq337"/>
+          <p:cNvPr id="23" name="R3_sq358"/>
           <p:cNvSpPr/>
           <p:nvPr/>
         </p:nvSpPr>
@@ -10764,7 +12921,7 @@
       </p:sp>
       <p:sp>
         <p:nvSpPr>
-          <p:cNvPr id="24" name="R4_qb338"/>
+          <p:cNvPr id="24" name="R4_qb359"/>
           <p:cNvSpPr/>
           <p:nvPr/>
         </p:nvSpPr>
@@ -10816,7 +12973,7 @@
       </p:sp>
       <p:sp>
         <p:nvSpPr>
-          <p:cNvPr id="25" name="R4_sq339"/>
+          <p:cNvPr id="25" name="R4_sq360"/>
           <p:cNvSpPr/>
           <p:nvPr/>
         </p:nvSpPr>
@@ -11280,9 +13437,9 @@
 </p:sld>
 </file>
 
-<file path=ppt/slides/slide14.xml><?xml version="1.0" encoding="utf-8"?>
+<file path=ppt/slides/slide15.xml><?xml version="1.0" encoding="utf-8"?>
 <p:sld xmlns:a="http://schemas.openxmlformats.org/drawingml/2006/main" xmlns:r="http://schemas.openxmlformats.org/officeDocument/2006/relationships" xmlns:p="http://schemas.openxmlformats.org/presentationml/2006/main">
-  <p:cSld name="Slide 14">
+  <p:cSld name="Slide 15">
     <p:bg>
       <p:bgPr>
         <a:blipFill dpi="0" rotWithShape="1">
@@ -11313,7 +13470,7 @@
       </p:grpSpPr>
       <p:sp>
         <p:nvSpPr>
-          <p:cNvPr id="3" name="bd_340"/>
+          <p:cNvPr id="3" name="bd_361"/>
           <p:cNvSpPr/>
           <p:nvPr/>
         </p:nvSpPr>
@@ -11357,7 +13514,7 @@
                 <a:ea typeface="Arial Rounded MT Bold" pitchFamily="34" charset="-122"/>
                 <a:cs typeface="Arial Rounded MT Bold" pitchFamily="34" charset="-120"/>
               </a:rPr>
-              <a:t>14</a:t>
+              <a:t>15</a:t>
             </a:r>
             <a:endParaRPr lang="en-US" sz="2200" dirty="0"/>
           </a:p>
@@ -11365,7 +13522,7 @@
       </p:sp>
       <p:pic>
         <p:nvPicPr>
-          <p:cNvPr id="4" name="brY_341" descr="/home/claude/lls-course/v2/assets/brush-yellow.png">    </p:cNvPr>
+          <p:cNvPr id="4" name="brY_362" descr="/home/claude/lls-course/v2/assets/brush-yellow.png">    </p:cNvPr>
           <p:cNvPicPr>
             <a:picLocks noChangeAspect="1"/>
           </p:cNvPicPr>
@@ -11389,7 +13546,7 @@
       </p:pic>
       <p:sp>
         <p:nvSpPr>
-          <p:cNvPr id="5" name="title_342"/>
+          <p:cNvPr id="5" name="title_363"/>
           <p:cNvSpPr/>
           <p:nvPr/>
         </p:nvSpPr>
@@ -11430,7 +13587,7 @@
       </p:sp>
       <p:pic>
         <p:nvPicPr>
-          <p:cNvPr id="6" name="brP_343" descr="/home/claude/lls-course/v2/assets/brush-pink.png">    </p:cNvPr>
+          <p:cNvPr id="6" name="brP_364" descr="/home/claude/lls-course/v2/assets/brush-pink.png">    </p:cNvPr>
           <p:cNvPicPr>
             <a:picLocks noChangeAspect="1"/>
           </p:cNvPicPr>
@@ -11454,7 +13611,7 @@
       </p:pic>
       <p:sp>
         <p:nvSpPr>
-          <p:cNvPr id="7" name="ins_344"/>
+          <p:cNvPr id="7" name="ins_365"/>
           <p:cNvSpPr/>
           <p:nvPr/>
         </p:nvSpPr>
@@ -11495,7 +13652,7 @@
       </p:sp>
       <p:sp>
         <p:nvSpPr>
-          <p:cNvPr id="8" name="insIT_345"/>
+          <p:cNvPr id="8" name="insIT_366"/>
           <p:cNvSpPr/>
           <p:nvPr/>
         </p:nvSpPr>
@@ -11536,7 +13693,7 @@
       </p:sp>
       <p:sp>
         <p:nvSpPr>
-          <p:cNvPr id="9" name="note_346"/>
+          <p:cNvPr id="9" name="note_367"/>
           <p:cNvSpPr/>
           <p:nvPr/>
         </p:nvSpPr>
@@ -11649,7 +13806,7 @@
       </p:sp>
       <p:pic>
         <p:nvPicPr>
-          <p:cNvPr id="10" name="logo_347" descr="/home/claude/lls-course/v2/img/logo.png">    </p:cNvPr>
+          <p:cNvPr id="10" name="logo_368" descr="/home/claude/lls-course/v2/img/logo.png">    </p:cNvPr>
           <p:cNvPicPr>
             <a:picLocks noChangeAspect="1"/>
           </p:cNvPicPr>
@@ -11673,7 +13830,7 @@
       </p:pic>
       <p:sp>
         <p:nvSpPr>
-          <p:cNvPr id="11" name="foot_348"/>
+          <p:cNvPr id="11" name="foot_369"/>
           <p:cNvSpPr/>
           <p:nvPr/>
         </p:nvSpPr>
@@ -11712,7 +13869,7 @@
       </p:sp>
       <p:sp>
         <p:nvSpPr>
-          <p:cNvPr id="12" name="cd_349"/>
+          <p:cNvPr id="12" name="cd_370"/>
           <p:cNvSpPr/>
           <p:nvPr/>
         </p:nvSpPr>
@@ -11746,7 +13903,7 @@
       </p:sp>
       <p:sp>
         <p:nvSpPr>
-          <p:cNvPr id="13" name="ii_350"/>
+          <p:cNvPr id="13" name="ii_371"/>
           <p:cNvSpPr/>
           <p:nvPr/>
         </p:nvSpPr>
@@ -11782,7 +13939,7 @@
       </p:sp>
       <p:sp>
         <p:nvSpPr>
-          <p:cNvPr id="14" name="ih_351"/>
+          <p:cNvPr id="14" name="ih_372"/>
           <p:cNvSpPr/>
           <p:nvPr/>
         </p:nvSpPr>
@@ -11821,7 +13978,7 @@
       </p:sp>
       <p:sp>
         <p:nvSpPr>
-          <p:cNvPr id="15" name="il_352"/>
+          <p:cNvPr id="15" name="il_373"/>
           <p:cNvSpPr/>
           <p:nvPr/>
         </p:nvSpPr>
@@ -11938,7 +14095,7 @@
       </p:sp>
       <p:sp>
         <p:nvSpPr>
-          <p:cNvPr id="16" name="who_353"/>
+          <p:cNvPr id="16" name="who_374"/>
           <p:cNvSpPr/>
           <p:nvPr/>
         </p:nvSpPr>
@@ -11983,7 +14140,7 @@
       </p:sp>
       <p:sp>
         <p:nvSpPr>
-          <p:cNvPr id="17" name="sl_354"/>
+          <p:cNvPr id="17" name="sl_375"/>
           <p:cNvSpPr/>
           <p:nvPr/>
         </p:nvSpPr>
@@ -12032,7 +14189,7 @@
       </p:sp>
       <p:sp>
         <p:nvSpPr>
-          <p:cNvPr id="18" name="who_355"/>
+          <p:cNvPr id="18" name="who_376"/>
           <p:cNvSpPr/>
           <p:nvPr/>
         </p:nvSpPr>
@@ -12077,7 +14234,7 @@
       </p:sp>
       <p:sp>
         <p:nvSpPr>
-          <p:cNvPr id="19" name="sl_356"/>
+          <p:cNvPr id="19" name="sl_377"/>
           <p:cNvSpPr/>
           <p:nvPr/>
         </p:nvSpPr>
@@ -12126,7 +14283,7 @@
       </p:sp>
       <p:sp>
         <p:nvSpPr>
-          <p:cNvPr id="20" name="R1_slA357"/>
+          <p:cNvPr id="20" name="R1_slA378"/>
           <p:cNvSpPr/>
           <p:nvPr/>
         </p:nvSpPr>
@@ -12178,7 +14335,7 @@
       </p:sp>
       <p:sp>
         <p:nvSpPr>
-          <p:cNvPr id="21" name="who_358"/>
+          <p:cNvPr id="21" name="who_379"/>
           <p:cNvSpPr/>
           <p:nvPr/>
         </p:nvSpPr>
@@ -12223,7 +14380,7 @@
       </p:sp>
       <p:sp>
         <p:nvSpPr>
-          <p:cNvPr id="22" name="sl_359"/>
+          <p:cNvPr id="22" name="sl_380"/>
           <p:cNvSpPr/>
           <p:nvPr/>
         </p:nvSpPr>
@@ -12272,7 +14429,7 @@
       </p:sp>
       <p:sp>
         <p:nvSpPr>
-          <p:cNvPr id="23" name="who_360"/>
+          <p:cNvPr id="23" name="who_381"/>
           <p:cNvSpPr/>
           <p:nvPr/>
         </p:nvSpPr>
@@ -12317,7 +14474,7 @@
       </p:sp>
       <p:sp>
         <p:nvSpPr>
-          <p:cNvPr id="24" name="sl_361"/>
+          <p:cNvPr id="24" name="sl_382"/>
           <p:cNvSpPr/>
           <p:nvPr/>
         </p:nvSpPr>
@@ -12380,7 +14537,7 @@
       </p:sp>
       <p:sp>
         <p:nvSpPr>
-          <p:cNvPr id="25" name="R2_slA362"/>
+          <p:cNvPr id="25" name="R2_slA383"/>
           <p:cNvSpPr/>
           <p:nvPr/>
         </p:nvSpPr>
@@ -12446,7 +14603,7 @@
       </p:sp>
       <p:sp>
         <p:nvSpPr>
-          <p:cNvPr id="26" name="who_363"/>
+          <p:cNvPr id="26" name="who_384"/>
           <p:cNvSpPr/>
           <p:nvPr/>
         </p:nvSpPr>
@@ -12491,7 +14648,7 @@
       </p:sp>
       <p:sp>
         <p:nvSpPr>
-          <p:cNvPr id="27" name="sl_364"/>
+          <p:cNvPr id="27" name="sl_385"/>
           <p:cNvSpPr/>
           <p:nvPr/>
         </p:nvSpPr>
@@ -12540,7 +14697,7 @@
       </p:sp>
       <p:sp>
         <p:nvSpPr>
-          <p:cNvPr id="28" name="who_365"/>
+          <p:cNvPr id="28" name="who_386"/>
           <p:cNvSpPr/>
           <p:nvPr/>
         </p:nvSpPr>
@@ -12585,7 +14742,7 @@
       </p:sp>
       <p:sp>
         <p:nvSpPr>
-          <p:cNvPr id="29" name="sl_366"/>
+          <p:cNvPr id="29" name="sl_387"/>
           <p:cNvSpPr/>
           <p:nvPr/>
         </p:nvSpPr>
@@ -12634,7 +14791,7 @@
       </p:sp>
       <p:sp>
         <p:nvSpPr>
-          <p:cNvPr id="30" name="who_367"/>
+          <p:cNvPr id="30" name="who_388"/>
           <p:cNvSpPr/>
           <p:nvPr/>
         </p:nvSpPr>
@@ -12679,7 +14836,7 @@
       </p:sp>
       <p:sp>
         <p:nvSpPr>
-          <p:cNvPr id="31" name="sl_368"/>
+          <p:cNvPr id="31" name="sl_389"/>
           <p:cNvSpPr/>
           <p:nvPr/>
         </p:nvSpPr>
@@ -12728,7 +14885,7 @@
       </p:sp>
       <p:sp>
         <p:nvSpPr>
-          <p:cNvPr id="32" name="who_369"/>
+          <p:cNvPr id="32" name="who_390"/>
           <p:cNvSpPr/>
           <p:nvPr/>
         </p:nvSpPr>
@@ -12773,7 +14930,7 @@
       </p:sp>
       <p:sp>
         <p:nvSpPr>
-          <p:cNvPr id="33" name="sl_370"/>
+          <p:cNvPr id="33" name="sl_391"/>
           <p:cNvSpPr/>
           <p:nvPr/>
         </p:nvSpPr>
@@ -12822,7 +14979,7 @@
       </p:sp>
       <p:sp>
         <p:nvSpPr>
-          <p:cNvPr id="34" name="R3_slA371"/>
+          <p:cNvPr id="34" name="R3_slA392"/>
           <p:cNvSpPr/>
           <p:nvPr/>
         </p:nvSpPr>
@@ -13072,9 +15229,9 @@
 </p:sld>
 </file>
 
-<file path=ppt/slides/slide15.xml><?xml version="1.0" encoding="utf-8"?>
+<file path=ppt/slides/slide16.xml><?xml version="1.0" encoding="utf-8"?>
 <p:sld xmlns:a="http://schemas.openxmlformats.org/drawingml/2006/main" xmlns:r="http://schemas.openxmlformats.org/officeDocument/2006/relationships" xmlns:p="http://schemas.openxmlformats.org/presentationml/2006/main">
-  <p:cSld name="Slide 15">
+  <p:cSld name="Slide 16">
     <p:bg>
       <p:bgPr>
         <a:blipFill dpi="0" rotWithShape="1">
@@ -13105,7 +15262,7 @@
       </p:grpSpPr>
       <p:sp>
         <p:nvSpPr>
-          <p:cNvPr id="3" name="bd_372"/>
+          <p:cNvPr id="3" name="bd_393"/>
           <p:cNvSpPr/>
           <p:nvPr/>
         </p:nvSpPr>
@@ -13149,7 +15306,7 @@
                 <a:ea typeface="Arial Rounded MT Bold" pitchFamily="34" charset="-122"/>
                 <a:cs typeface="Arial Rounded MT Bold" pitchFamily="34" charset="-120"/>
               </a:rPr>
-              <a:t>15</a:t>
+              <a:t>16</a:t>
             </a:r>
             <a:endParaRPr lang="en-US" sz="2200" dirty="0"/>
           </a:p>
@@ -13157,7 +15314,7 @@
       </p:sp>
       <p:pic>
         <p:nvPicPr>
-          <p:cNvPr id="4" name="brY_373" descr="/home/claude/lls-course/v2/assets/brush-yellow.png">    </p:cNvPr>
+          <p:cNvPr id="4" name="brY_394" descr="/home/claude/lls-course/v2/assets/brush-yellow.png">    </p:cNvPr>
           <p:cNvPicPr>
             <a:picLocks noChangeAspect="1"/>
           </p:cNvPicPr>
@@ -13181,7 +15338,7 @@
       </p:pic>
       <p:sp>
         <p:nvSpPr>
-          <p:cNvPr id="5" name="title_374"/>
+          <p:cNvPr id="5" name="title_395"/>
           <p:cNvSpPr/>
           <p:nvPr/>
         </p:nvSpPr>
@@ -13222,7 +15379,7 @@
       </p:sp>
       <p:pic>
         <p:nvPicPr>
-          <p:cNvPr id="6" name="brP_375" descr="/home/claude/lls-course/v2/assets/brush-pink.png">    </p:cNvPr>
+          <p:cNvPr id="6" name="brP_396" descr="/home/claude/lls-course/v2/assets/brush-pink.png">    </p:cNvPr>
           <p:cNvPicPr>
             <a:picLocks noChangeAspect="1"/>
           </p:cNvPicPr>
@@ -13246,7 +15403,7 @@
       </p:pic>
       <p:sp>
         <p:nvSpPr>
-          <p:cNvPr id="7" name="ins_376"/>
+          <p:cNvPr id="7" name="ins_397"/>
           <p:cNvSpPr/>
           <p:nvPr/>
         </p:nvSpPr>
@@ -13287,7 +15444,7 @@
       </p:sp>
       <p:sp>
         <p:nvSpPr>
-          <p:cNvPr id="8" name="insIT_377"/>
+          <p:cNvPr id="8" name="insIT_398"/>
           <p:cNvSpPr/>
           <p:nvPr/>
         </p:nvSpPr>
@@ -13328,7 +15485,7 @@
       </p:sp>
       <p:sp>
         <p:nvSpPr>
-          <p:cNvPr id="9" name="note_378"/>
+          <p:cNvPr id="9" name="note_399"/>
           <p:cNvSpPr/>
           <p:nvPr/>
         </p:nvSpPr>
@@ -13441,7 +15598,7 @@
       </p:sp>
       <p:pic>
         <p:nvPicPr>
-          <p:cNvPr id="10" name="logo_379" descr="/home/claude/lls-course/v2/img/logo.png">    </p:cNvPr>
+          <p:cNvPr id="10" name="logo_400" descr="/home/claude/lls-course/v2/img/logo.png">    </p:cNvPr>
           <p:cNvPicPr>
             <a:picLocks noChangeAspect="1"/>
           </p:cNvPicPr>
@@ -13465,7 +15622,7 @@
       </p:pic>
       <p:sp>
         <p:nvSpPr>
-          <p:cNvPr id="11" name="foot_380"/>
+          <p:cNvPr id="11" name="foot_401"/>
           <p:cNvSpPr/>
           <p:nvPr/>
         </p:nvSpPr>
@@ -13504,7 +15661,7 @@
       </p:sp>
       <p:sp>
         <p:nvSpPr>
-          <p:cNvPr id="12" name="cd_381"/>
+          <p:cNvPr id="12" name="cd_402"/>
           <p:cNvSpPr/>
           <p:nvPr/>
         </p:nvSpPr>
@@ -13538,7 +15695,7 @@
       </p:sp>
       <p:sp>
         <p:nvSpPr>
-          <p:cNvPr id="13" name="ii_382"/>
+          <p:cNvPr id="13" name="ii_403"/>
           <p:cNvSpPr/>
           <p:nvPr/>
         </p:nvSpPr>
@@ -13574,7 +15731,7 @@
       </p:sp>
       <p:sp>
         <p:nvSpPr>
-          <p:cNvPr id="14" name="ih_383"/>
+          <p:cNvPr id="14" name="ih_404"/>
           <p:cNvSpPr/>
           <p:nvPr/>
         </p:nvSpPr>
@@ -13613,7 +15770,7 @@
       </p:sp>
       <p:sp>
         <p:nvSpPr>
-          <p:cNvPr id="15" name="il_384"/>
+          <p:cNvPr id="15" name="il_405"/>
           <p:cNvSpPr/>
           <p:nvPr/>
         </p:nvSpPr>
@@ -13754,7 +15911,7 @@
       </p:sp>
       <p:sp>
         <p:nvSpPr>
-          <p:cNvPr id="16" name="R1_qb385"/>
+          <p:cNvPr id="16" name="R1_qb406"/>
           <p:cNvSpPr/>
           <p:nvPr/>
         </p:nvSpPr>
@@ -13806,7 +15963,7 @@
       </p:sp>
       <p:sp>
         <p:nvSpPr>
-          <p:cNvPr id="17" name="R1_sq386"/>
+          <p:cNvPr id="17" name="R1_sq407"/>
           <p:cNvSpPr/>
           <p:nvPr/>
         </p:nvSpPr>
@@ -13879,7 +16036,7 @@
       </p:sp>
       <p:sp>
         <p:nvSpPr>
-          <p:cNvPr id="18" name="R2_qb387"/>
+          <p:cNvPr id="18" name="R2_qb408"/>
           <p:cNvSpPr/>
           <p:nvPr/>
         </p:nvSpPr>
@@ -13931,7 +16088,7 @@
       </p:sp>
       <p:sp>
         <p:nvSpPr>
-          <p:cNvPr id="19" name="R2_sq388"/>
+          <p:cNvPr id="19" name="R2_sq409"/>
           <p:cNvSpPr/>
           <p:nvPr/>
         </p:nvSpPr>
@@ -14004,7 +16161,7 @@
       </p:sp>
       <p:sp>
         <p:nvSpPr>
-          <p:cNvPr id="20" name="R3_qb389"/>
+          <p:cNvPr id="20" name="R3_qb410"/>
           <p:cNvSpPr/>
           <p:nvPr/>
         </p:nvSpPr>
@@ -14056,7 +16213,7 @@
       </p:sp>
       <p:sp>
         <p:nvSpPr>
-          <p:cNvPr id="21" name="R3_sq390"/>
+          <p:cNvPr id="21" name="R3_sq411"/>
           <p:cNvSpPr/>
           <p:nvPr/>
         </p:nvSpPr>
@@ -14129,7 +16286,7 @@
       </p:sp>
       <p:sp>
         <p:nvSpPr>
-          <p:cNvPr id="22" name="R4_qb391"/>
+          <p:cNvPr id="22" name="R4_qb412"/>
           <p:cNvSpPr/>
           <p:nvPr/>
         </p:nvSpPr>
@@ -14181,7 +16338,7 @@
       </p:sp>
       <p:sp>
         <p:nvSpPr>
-          <p:cNvPr id="23" name="R4_sq392"/>
+          <p:cNvPr id="23" name="R4_sq413"/>
           <p:cNvSpPr/>
           <p:nvPr/>
         </p:nvSpPr>
@@ -14645,961 +16802,6 @@
 </p:sld>
 </file>
 
-<file path=ppt/slides/slide16.xml><?xml version="1.0" encoding="utf-8"?>
-<p:sld xmlns:a="http://schemas.openxmlformats.org/drawingml/2006/main" xmlns:r="http://schemas.openxmlformats.org/officeDocument/2006/relationships" xmlns:p="http://schemas.openxmlformats.org/presentationml/2006/main">
-  <p:cSld name="Slide 16">
-    <p:bg>
-      <p:bgPr>
-        <a:blipFill dpi="0" rotWithShape="1">
-          <a:blip r:embed="rId1">
-            <a:lum/>
-          </a:blip>
-          <a:srcRect/>
-          <a:stretch>
-            <a:fillRect/>
-          </a:stretch>
-        </a:blipFill>
-        <a:effectLst/>
-      </p:bgPr>
-    </p:bg>
-    <p:spTree>
-      <p:nvGrpSpPr>
-        <p:cNvPr id="2" name=""/>
-        <p:cNvGrpSpPr/>
-        <p:nvPr/>
-      </p:nvGrpSpPr>
-      <p:grpSpPr>
-        <a:xfrm>
-          <a:off x="0" y="0"/>
-          <a:ext cx="0" cy="0"/>
-          <a:chOff x="0" y="0"/>
-          <a:chExt cx="0" cy="0"/>
-        </a:xfrm>
-      </p:grpSpPr>
-      <p:sp>
-        <p:nvSpPr>
-          <p:cNvPr id="3" name="bd_393"/>
-          <p:cNvSpPr/>
-          <p:nvPr/>
-        </p:nvSpPr>
-        <p:spPr>
-          <a:xfrm>
-            <a:off x="201168" y="164592"/>
-            <a:ext cx="841248" cy="841248"/>
-          </a:xfrm>
-          <a:prstGeom prst="ellipse">
-            <a:avLst/>
-          </a:prstGeom>
-          <a:solidFill>
-            <a:srgbClr val="2F8DE4"/>
-          </a:solidFill>
-          <a:ln w="28575">
-            <a:solidFill>
-              <a:srgbClr val="A9D3F5"/>
-            </a:solidFill>
-          </a:ln>
-          <a:effectLst>
-            <a:outerShdw sx="100000" sy="100000" kx="0" ky="0" algn="bl" rotWithShape="0" blurRad="88900" dist="31750" dir="5400000">
-              <a:srgbClr val="1B2559">
-                <a:alpha val="15000"/>
-              </a:srgbClr>
-            </a:outerShdw>
-          </a:effectLst>
-        </p:spPr>
-        <p:txBody>
-          <a:bodyPr wrap="square" lIns="0" tIns="0" rIns="0" bIns="0" rtlCol="0" anchor="ctr"/>
-          <a:lstStyle/>
-          <a:p>
-            <a:pPr algn="ctr" indent="0" marL="0">
-              <a:buNone/>
-            </a:pPr>
-            <a:r>
-              <a:rPr lang="en-US" sz="2200" dirty="0">
-                <a:solidFill>
-                  <a:srgbClr val="FFFFFF"/>
-                </a:solidFill>
-                <a:latin typeface="Arial Rounded MT Bold" pitchFamily="34" charset="0"/>
-                <a:ea typeface="Arial Rounded MT Bold" pitchFamily="34" charset="-122"/>
-                <a:cs typeface="Arial Rounded MT Bold" pitchFamily="34" charset="-120"/>
-              </a:rPr>
-              <a:t>16</a:t>
-            </a:r>
-            <a:endParaRPr lang="en-US" sz="2200" dirty="0"/>
-          </a:p>
-        </p:txBody>
-      </p:sp>
-      <p:pic>
-        <p:nvPicPr>
-          <p:cNvPr id="4" name="brY_394" descr="/home/claude/lls-course/v2/assets/brush-yellow.png">    </p:cNvPr>
-          <p:cNvPicPr>
-            <a:picLocks noChangeAspect="1"/>
-          </p:cNvPicPr>
-          <p:nvPr/>
-        </p:nvPicPr>
-        <p:blipFill>
-          <a:blip r:embed="rId2"/>
-          <a:stretch>
-            <a:fillRect/>
-          </a:stretch>
-        </p:blipFill>
-        <p:spPr>
-          <a:xfrm>
-            <a:off x="1097280" y="146304"/>
-            <a:ext cx="2147011" cy="621792"/>
-          </a:xfrm>
-          <a:prstGeom prst="rect">
-            <a:avLst/>
-          </a:prstGeom>
-        </p:spPr>
-      </p:pic>
-      <p:sp>
-        <p:nvSpPr>
-          <p:cNvPr id="5" name="title_395"/>
-          <p:cNvSpPr/>
-          <p:nvPr/>
-        </p:nvSpPr>
-        <p:spPr>
-          <a:xfrm>
-            <a:off x="1261872" y="164592"/>
-            <a:ext cx="1872691" cy="566928"/>
-          </a:xfrm>
-          <a:prstGeom prst="rect">
-            <a:avLst/>
-          </a:prstGeom>
-          <a:noFill/>
-          <a:ln/>
-        </p:spPr>
-        <p:txBody>
-          <a:bodyPr wrap="square" lIns="0" tIns="0" rIns="0" bIns="0" rtlCol="0" anchor="ctr">
-            <a:normAutofit/>
-          </a:bodyPr>
-          <a:lstStyle/>
-          <a:p>
-            <a:pPr indent="0" marL="0">
-              <a:buNone/>
-            </a:pPr>
-            <a:r>
-              <a:rPr lang="en-US" sz="2500" dirty="0">
-                <a:solidFill>
-                  <a:srgbClr val="1B2559"/>
-                </a:solidFill>
-                <a:latin typeface="Arial Rounded MT Bold" pitchFamily="34" charset="0"/>
-                <a:ea typeface="Arial Rounded MT Bold" pitchFamily="34" charset="-122"/>
-                <a:cs typeface="Arial Rounded MT Bold" pitchFamily="34" charset="-120"/>
-              </a:rPr>
-              <a:t>3 · 2 · 1</a:t>
-            </a:r>
-            <a:endParaRPr lang="en-US" sz="2500" dirty="0"/>
-          </a:p>
-        </p:txBody>
-      </p:sp>
-      <p:pic>
-        <p:nvPicPr>
-          <p:cNvPr id="6" name="brP_396" descr="/home/claude/lls-course/v2/assets/brush-pink.png">    </p:cNvPr>
-          <p:cNvPicPr>
-            <a:picLocks noChangeAspect="1"/>
-          </p:cNvPicPr>
-          <p:nvPr/>
-        </p:nvPicPr>
-        <p:blipFill>
-          <a:blip r:embed="rId3"/>
-          <a:stretch>
-            <a:fillRect/>
-          </a:stretch>
-        </p:blipFill>
-        <p:spPr>
-          <a:xfrm>
-            <a:off x="1207008" y="731520"/>
-            <a:ext cx="3511296" cy="402336"/>
-          </a:xfrm>
-          <a:prstGeom prst="rect">
-            <a:avLst/>
-          </a:prstGeom>
-        </p:spPr>
-      </p:pic>
-      <p:sp>
-        <p:nvSpPr>
-          <p:cNvPr id="7" name="ins_397"/>
-          <p:cNvSpPr/>
-          <p:nvPr/>
-        </p:nvSpPr>
-        <p:spPr>
-          <a:xfrm>
-            <a:off x="1353312" y="731520"/>
-            <a:ext cx="3255264" cy="402336"/>
-          </a:xfrm>
-          <a:prstGeom prst="rect">
-            <a:avLst/>
-          </a:prstGeom>
-          <a:noFill/>
-          <a:ln/>
-        </p:spPr>
-        <p:txBody>
-          <a:bodyPr wrap="square" lIns="0" tIns="0" rIns="0" bIns="0" rtlCol="0" anchor="ctr">
-            <a:normAutofit/>
-          </a:bodyPr>
-          <a:lstStyle/>
-          <a:p>
-            <a:pPr indent="0" marL="0">
-              <a:buNone/>
-            </a:pPr>
-            <a:r>
-              <a:rPr lang="en-US" sz="1250" i="1" dirty="0">
-                <a:solidFill>
-                  <a:srgbClr val="1B2559"/>
-                </a:solidFill>
-                <a:latin typeface="Segoe UI Semibold" pitchFamily="34" charset="0"/>
-                <a:ea typeface="Segoe UI Semibold" pitchFamily="34" charset="-122"/>
-                <a:cs typeface="Segoe UI Semibold" pitchFamily="34" charset="-120"/>
-              </a:rPr>
-              <a:t>Books closed! Tell your partner…</a:t>
-            </a:r>
-            <a:endParaRPr lang="en-US" sz="1250" dirty="0"/>
-          </a:p>
-        </p:txBody>
-      </p:sp>
-      <p:sp>
-        <p:nvSpPr>
-          <p:cNvPr id="8" name="insIT_398"/>
-          <p:cNvSpPr/>
-          <p:nvPr/>
-        </p:nvSpPr>
-        <p:spPr>
-          <a:xfrm>
-            <a:off x="1371600" y="1115568"/>
-            <a:ext cx="5074920" cy="219456"/>
-          </a:xfrm>
-          <a:prstGeom prst="rect">
-            <a:avLst/>
-          </a:prstGeom>
-          <a:noFill/>
-          <a:ln/>
-        </p:spPr>
-        <p:txBody>
-          <a:bodyPr wrap="square" lIns="0" tIns="0" rIns="0" bIns="0" rtlCol="0" anchor="ctr">
-            <a:normAutofit/>
-          </a:bodyPr>
-          <a:lstStyle/>
-          <a:p>
-            <a:pPr indent="0" marL="0">
-              <a:buNone/>
-            </a:pPr>
-            <a:r>
-              <a:rPr lang="en-US" sz="950" i="1" dirty="0">
-                <a:solidFill>
-                  <a:srgbClr val="5B6785"/>
-                </a:solidFill>
-                <a:latin typeface="Segoe UI Semibold" pitchFamily="34" charset="0"/>
-                <a:ea typeface="Segoe UI Semibold" pitchFamily="34" charset="-122"/>
-                <a:cs typeface="Segoe UI Semibold" pitchFamily="34" charset="-120"/>
-              </a:rPr>
-              <a:t>Libri chiusi! Di' al compagno…</a:t>
-            </a:r>
-            <a:endParaRPr lang="en-US" sz="950" dirty="0"/>
-          </a:p>
-        </p:txBody>
-      </p:sp>
-      <p:sp>
-        <p:nvSpPr>
-          <p:cNvPr id="9" name="note_399"/>
-          <p:cNvSpPr/>
-          <p:nvPr/>
-        </p:nvSpPr>
-        <p:spPr>
-          <a:xfrm rot="180000">
-            <a:off x="6382512" y="128016"/>
-            <a:ext cx="2029968" cy="749808"/>
-          </a:xfrm>
-          <a:prstGeom prst="rect">
-            <a:avLst/>
-          </a:prstGeom>
-          <a:solidFill>
-            <a:srgbClr val="FFC2DA"/>
-          </a:solidFill>
-          <a:ln>
-            <a:solidFill>
-              <a:srgbClr val="FFC2DA"/>
-            </a:solidFill>
-          </a:ln>
-          <a:effectLst>
-            <a:outerShdw sx="100000" sy="100000" kx="0" ky="0" algn="bl" rotWithShape="0" blurRad="88900" dist="31750" dir="5400000">
-              <a:srgbClr val="1B2559">
-                <a:alpha val="15000"/>
-              </a:srgbClr>
-            </a:outerShdw>
-          </a:effectLst>
-        </p:spPr>
-        <p:txBody>
-          <a:bodyPr wrap="square" lIns="50800" tIns="50800" rIns="50800" bIns="50800" rtlCol="0" anchor="ctr">
-            <a:normAutofit/>
-          </a:bodyPr>
-          <a:lstStyle/>
-          <a:p>
-            <a:pPr algn="ctr" indent="0" marL="0">
-              <a:buNone/>
-            </a:pPr>
-            <a:r>
-              <a:rPr lang="en-US" sz="1100" dirty="0">
-                <a:solidFill>
-                  <a:srgbClr val="1B2559"/>
-                </a:solidFill>
-                <a:latin typeface="Segoe UI Semibold" pitchFamily="34" charset="0"/>
-                <a:ea typeface="Segoe UI Semibold" pitchFamily="34" charset="-122"/>
-                <a:cs typeface="Segoe UI Semibold" pitchFamily="34" charset="-120"/>
-              </a:rPr>
-              <a:t>⏱ 2 min   👥 pairs</a:t>
-            </a:r>
-            <a:endParaRPr lang="en-US" sz="1100" dirty="0"/>
-          </a:p>
-          <a:p>
-            <a:pPr algn="ctr" indent="0" marL="0">
-              <a:buNone/>
-            </a:pPr>
-            <a:r>
-              <a:rPr lang="en-US" sz="900" dirty="0">
-                <a:solidFill>
-                  <a:srgbClr val="5B6785"/>
-                </a:solidFill>
-                <a:latin typeface="Segoe UI Semibold" pitchFamily="34" charset="0"/>
-                <a:ea typeface="Segoe UI Semibold" pitchFamily="34" charset="-122"/>
-                <a:cs typeface="Segoe UI Semibold" pitchFamily="34" charset="-120"/>
-              </a:rPr>
-              <a:t>🎯 Revision · Retrieval</a:t>
-            </a:r>
-            <a:endParaRPr lang="en-US" sz="1100" dirty="0"/>
-          </a:p>
-        </p:txBody>
-      </p:sp>
-      <p:pic>
-        <p:nvPicPr>
-          <p:cNvPr id="10" name="logo_400" descr="/home/claude/lls-course/v2/img/logo.png">    </p:cNvPr>
-          <p:cNvPicPr>
-            <a:picLocks noChangeAspect="1"/>
-          </p:cNvPicPr>
-          <p:nvPr/>
-        </p:nvPicPr>
-        <p:blipFill>
-          <a:blip r:embed="rId4"/>
-          <a:stretch>
-            <a:fillRect/>
-          </a:stretch>
-        </p:blipFill>
-        <p:spPr>
-          <a:xfrm>
-            <a:off x="8485632" y="128016"/>
-            <a:ext cx="502920" cy="502920"/>
-          </a:xfrm>
-          <a:prstGeom prst="rect">
-            <a:avLst/>
-          </a:prstGeom>
-        </p:spPr>
-      </p:pic>
-      <p:sp>
-        <p:nvSpPr>
-          <p:cNvPr id="11" name="foot_401"/>
-          <p:cNvSpPr/>
-          <p:nvPr/>
-        </p:nvSpPr>
-        <p:spPr>
-          <a:xfrm>
-            <a:off x="274320" y="4873752"/>
-            <a:ext cx="6858000" cy="219456"/>
-          </a:xfrm>
-          <a:prstGeom prst="rect">
-            <a:avLst/>
-          </a:prstGeom>
-          <a:noFill/>
-          <a:ln/>
-        </p:spPr>
-        <p:txBody>
-          <a:bodyPr wrap="square" lIns="0" tIns="0" rIns="0" bIns="0" rtlCol="0" anchor="ctr"/>
-          <a:lstStyle/>
-          <a:p>
-            <a:pPr indent="0" marL="0">
-              <a:buNone/>
-            </a:pPr>
-            <a:r>
-              <a:rPr lang="en-US" sz="800" dirty="0">
-                <a:solidFill>
-                  <a:srgbClr val="5B6785"/>
-                </a:solidFill>
-                <a:latin typeface="Segoe UI Semibold" pitchFamily="34" charset="0"/>
-                <a:ea typeface="Segoe UI Semibold" pitchFamily="34" charset="-122"/>
-                <a:cs typeface="Segoe UI Semibold" pitchFamily="34" charset="-120"/>
-              </a:rPr>
-              <a:t>3B · Exit · what can you remember?</a:t>
-            </a:r>
-            <a:endParaRPr lang="en-US" sz="800" dirty="0"/>
-          </a:p>
-        </p:txBody>
-      </p:sp>
-      <p:sp>
-        <p:nvSpPr>
-          <p:cNvPr id="12" name="bd_402"/>
-          <p:cNvSpPr/>
-          <p:nvPr/>
-        </p:nvSpPr>
-        <p:spPr>
-          <a:xfrm>
-            <a:off x="457200" y="1508760"/>
-            <a:ext cx="777240" cy="777240"/>
-          </a:xfrm>
-          <a:prstGeom prst="ellipse">
-            <a:avLst/>
-          </a:prstGeom>
-          <a:solidFill>
-            <a:srgbClr val="E8508F"/>
-          </a:solidFill>
-          <a:ln w="28575">
-            <a:solidFill>
-              <a:srgbClr val="F7A6C4"/>
-            </a:solidFill>
-          </a:ln>
-          <a:effectLst>
-            <a:outerShdw sx="100000" sy="100000" kx="0" ky="0" algn="bl" rotWithShape="0" blurRad="88900" dist="31750" dir="5400000">
-              <a:srgbClr val="1B2559">
-                <a:alpha val="15000"/>
-              </a:srgbClr>
-            </a:outerShdw>
-          </a:effectLst>
-        </p:spPr>
-        <p:txBody>
-          <a:bodyPr wrap="square" lIns="0" tIns="0" rIns="0" bIns="0" rtlCol="0" anchor="ctr"/>
-          <a:lstStyle/>
-          <a:p>
-            <a:pPr algn="ctr" indent="0" marL="0">
-              <a:buNone/>
-            </a:pPr>
-            <a:r>
-              <a:rPr lang="en-US" sz="2600" dirty="0">
-                <a:solidFill>
-                  <a:srgbClr val="FFFFFF"/>
-                </a:solidFill>
-                <a:latin typeface="Arial Rounded MT Bold" pitchFamily="34" charset="0"/>
-                <a:ea typeface="Arial Rounded MT Bold" pitchFamily="34" charset="-122"/>
-                <a:cs typeface="Arial Rounded MT Bold" pitchFamily="34" charset="-120"/>
-              </a:rPr>
-              <a:t>3</a:t>
-            </a:r>
-            <a:endParaRPr lang="en-US" sz="2600" dirty="0"/>
-          </a:p>
-        </p:txBody>
-      </p:sp>
-      <p:sp>
-        <p:nvSpPr>
-          <p:cNvPr id="13" name="rt_403"/>
-          <p:cNvSpPr/>
-          <p:nvPr/>
-        </p:nvSpPr>
-        <p:spPr>
-          <a:xfrm>
-            <a:off x="1417320" y="1581912"/>
-            <a:ext cx="3931920" cy="640080"/>
-          </a:xfrm>
-          <a:prstGeom prst="roundRect">
-            <a:avLst>
-              <a:gd name="adj" fmla="val 20000"/>
-            </a:avLst>
-          </a:prstGeom>
-          <a:solidFill>
-            <a:srgbClr val="FFFFFF"/>
-          </a:solidFill>
-          <a:ln w="28575">
-            <a:solidFill>
-              <a:srgbClr val="F7A6C4"/>
-            </a:solidFill>
-          </a:ln>
-          <a:effectLst>
-            <a:outerShdw sx="100000" sy="100000" kx="0" ky="0" algn="bl" rotWithShape="0" blurRad="88900" dist="31750" dir="5400000">
-              <a:srgbClr val="1B2559">
-                <a:alpha val="8000"/>
-              </a:srgbClr>
-            </a:outerShdw>
-          </a:effectLst>
-        </p:spPr>
-        <p:txBody>
-          <a:bodyPr wrap="square" lIns="152400" tIns="0" rIns="152400" bIns="0" rtlCol="0" anchor="ctr">
-            <a:normAutofit/>
-          </a:bodyPr>
-          <a:lstStyle/>
-          <a:p>
-            <a:pPr indent="0" marL="0">
-              <a:buNone/>
-            </a:pPr>
-            <a:r>
-              <a:rPr lang="en-US" sz="1400" dirty="0">
-                <a:solidFill>
-                  <a:srgbClr val="1B2559"/>
-                </a:solidFill>
-                <a:latin typeface="Arial Rounded MT Bold" pitchFamily="34" charset="0"/>
-                <a:ea typeface="Arial Rounded MT Bold" pitchFamily="34" charset="-122"/>
-                <a:cs typeface="Arial Rounded MT Bold" pitchFamily="34" charset="-120"/>
-              </a:rPr>
-              <a:t>Tell me 3 verbs with their prepositions.</a:t>
-            </a:r>
-            <a:endParaRPr lang="en-US" sz="1400" dirty="0"/>
-          </a:p>
-        </p:txBody>
-      </p:sp>
-      <p:sp>
-        <p:nvSpPr>
-          <p:cNvPr id="14" name="bd_404"/>
-          <p:cNvSpPr/>
-          <p:nvPr/>
-        </p:nvSpPr>
-        <p:spPr>
-          <a:xfrm>
-            <a:off x="457200" y="2468880"/>
-            <a:ext cx="777240" cy="777240"/>
-          </a:xfrm>
-          <a:prstGeom prst="ellipse">
-            <a:avLst/>
-          </a:prstGeom>
-          <a:solidFill>
-            <a:srgbClr val="2F8DE4"/>
-          </a:solidFill>
-          <a:ln w="28575">
-            <a:solidFill>
-              <a:srgbClr val="A9D3F5"/>
-            </a:solidFill>
-          </a:ln>
-          <a:effectLst>
-            <a:outerShdw sx="100000" sy="100000" kx="0" ky="0" algn="bl" rotWithShape="0" blurRad="88900" dist="31750" dir="5400000">
-              <a:srgbClr val="1B2559">
-                <a:alpha val="15000"/>
-              </a:srgbClr>
-            </a:outerShdw>
-          </a:effectLst>
-        </p:spPr>
-        <p:txBody>
-          <a:bodyPr wrap="square" lIns="0" tIns="0" rIns="0" bIns="0" rtlCol="0" anchor="ctr"/>
-          <a:lstStyle/>
-          <a:p>
-            <a:pPr algn="ctr" indent="0" marL="0">
-              <a:buNone/>
-            </a:pPr>
-            <a:r>
-              <a:rPr lang="en-US" sz="2600" dirty="0">
-                <a:solidFill>
-                  <a:srgbClr val="FFFFFF"/>
-                </a:solidFill>
-                <a:latin typeface="Arial Rounded MT Bold" pitchFamily="34" charset="0"/>
-                <a:ea typeface="Arial Rounded MT Bold" pitchFamily="34" charset="-122"/>
-                <a:cs typeface="Arial Rounded MT Bold" pitchFamily="34" charset="-120"/>
-              </a:rPr>
-              <a:t>2</a:t>
-            </a:r>
-            <a:endParaRPr lang="en-US" sz="2600" dirty="0"/>
-          </a:p>
-        </p:txBody>
-      </p:sp>
-      <p:sp>
-        <p:nvSpPr>
-          <p:cNvPr id="15" name="rt_405"/>
-          <p:cNvSpPr/>
-          <p:nvPr/>
-        </p:nvSpPr>
-        <p:spPr>
-          <a:xfrm>
-            <a:off x="1417320" y="2542032"/>
-            <a:ext cx="3931920" cy="640080"/>
-          </a:xfrm>
-          <a:prstGeom prst="roundRect">
-            <a:avLst>
-              <a:gd name="adj" fmla="val 20000"/>
-            </a:avLst>
-          </a:prstGeom>
-          <a:solidFill>
-            <a:srgbClr val="FFFFFF"/>
-          </a:solidFill>
-          <a:ln w="28575">
-            <a:solidFill>
-              <a:srgbClr val="A9D3F5"/>
-            </a:solidFill>
-          </a:ln>
-          <a:effectLst>
-            <a:outerShdw sx="100000" sy="100000" kx="0" ky="0" algn="bl" rotWithShape="0" blurRad="88900" dist="31750" dir="5400000">
-              <a:srgbClr val="1B2559">
-                <a:alpha val="8000"/>
-              </a:srgbClr>
-            </a:outerShdw>
-          </a:effectLst>
-        </p:spPr>
-        <p:txBody>
-          <a:bodyPr wrap="square" lIns="152400" tIns="0" rIns="152400" bIns="0" rtlCol="0" anchor="ctr">
-            <a:normAutofit/>
-          </a:bodyPr>
-          <a:lstStyle/>
-          <a:p>
-            <a:pPr indent="0" marL="0">
-              <a:buNone/>
-            </a:pPr>
-            <a:r>
-              <a:rPr lang="en-US" sz="1400" dirty="0">
-                <a:solidFill>
-                  <a:srgbClr val="1B2559"/>
-                </a:solidFill>
-                <a:latin typeface="Arial Rounded MT Bold" pitchFamily="34" charset="0"/>
-                <a:ea typeface="Arial Rounded MT Bold" pitchFamily="34" charset="-122"/>
-                <a:cs typeface="Arial Rounded MT Bold" pitchFamily="34" charset="-120"/>
-              </a:rPr>
-              <a:t>Tell me 2 things in Jake's calendar for Tuesday.</a:t>
-            </a:r>
-            <a:endParaRPr lang="en-US" sz="1400" dirty="0"/>
-          </a:p>
-        </p:txBody>
-      </p:sp>
-      <p:sp>
-        <p:nvSpPr>
-          <p:cNvPr id="16" name="bd_406"/>
-          <p:cNvSpPr/>
-          <p:nvPr/>
-        </p:nvSpPr>
-        <p:spPr>
-          <a:xfrm>
-            <a:off x="457200" y="3429000"/>
-            <a:ext cx="777240" cy="777240"/>
-          </a:xfrm>
-          <a:prstGeom prst="ellipse">
-            <a:avLst/>
-          </a:prstGeom>
-          <a:solidFill>
-            <a:srgbClr val="2EB872"/>
-          </a:solidFill>
-          <a:ln w="28575">
-            <a:solidFill>
-              <a:srgbClr val="A8E5BE"/>
-            </a:solidFill>
-          </a:ln>
-          <a:effectLst>
-            <a:outerShdw sx="100000" sy="100000" kx="0" ky="0" algn="bl" rotWithShape="0" blurRad="88900" dist="31750" dir="5400000">
-              <a:srgbClr val="1B2559">
-                <a:alpha val="15000"/>
-              </a:srgbClr>
-            </a:outerShdw>
-          </a:effectLst>
-        </p:spPr>
-        <p:txBody>
-          <a:bodyPr wrap="square" lIns="0" tIns="0" rIns="0" bIns="0" rtlCol="0" anchor="ctr"/>
-          <a:lstStyle/>
-          <a:p>
-            <a:pPr algn="ctr" indent="0" marL="0">
-              <a:buNone/>
-            </a:pPr>
-            <a:r>
-              <a:rPr lang="en-US" sz="2600" dirty="0">
-                <a:solidFill>
-                  <a:srgbClr val="FFFFFF"/>
-                </a:solidFill>
-                <a:latin typeface="Arial Rounded MT Bold" pitchFamily="34" charset="0"/>
-                <a:ea typeface="Arial Rounded MT Bold" pitchFamily="34" charset="-122"/>
-                <a:cs typeface="Arial Rounded MT Bold" pitchFamily="34" charset="-120"/>
-              </a:rPr>
-              <a:t>1</a:t>
-            </a:r>
-            <a:endParaRPr lang="en-US" sz="2600" dirty="0"/>
-          </a:p>
-        </p:txBody>
-      </p:sp>
-      <p:sp>
-        <p:nvSpPr>
-          <p:cNvPr id="17" name="rt_407"/>
-          <p:cNvSpPr/>
-          <p:nvPr/>
-        </p:nvSpPr>
-        <p:spPr>
-          <a:xfrm>
-            <a:off x="1417320" y="3502152"/>
-            <a:ext cx="3931920" cy="640080"/>
-          </a:xfrm>
-          <a:prstGeom prst="roundRect">
-            <a:avLst>
-              <a:gd name="adj" fmla="val 20000"/>
-            </a:avLst>
-          </a:prstGeom>
-          <a:solidFill>
-            <a:srgbClr val="FFFFFF"/>
-          </a:solidFill>
-          <a:ln w="28575">
-            <a:solidFill>
-              <a:srgbClr val="A8E5BE"/>
-            </a:solidFill>
-          </a:ln>
-          <a:effectLst>
-            <a:outerShdw sx="100000" sy="100000" kx="0" ky="0" algn="bl" rotWithShape="0" blurRad="88900" dist="31750" dir="5400000">
-              <a:srgbClr val="1B2559">
-                <a:alpha val="8000"/>
-              </a:srgbClr>
-            </a:outerShdw>
-          </a:effectLst>
-        </p:spPr>
-        <p:txBody>
-          <a:bodyPr wrap="square" lIns="152400" tIns="0" rIns="152400" bIns="0" rtlCol="0" anchor="ctr">
-            <a:normAutofit/>
-          </a:bodyPr>
-          <a:lstStyle/>
-          <a:p>
-            <a:pPr indent="0" marL="0">
-              <a:buNone/>
-            </a:pPr>
-            <a:r>
-              <a:rPr lang="en-US" sz="1400" dirty="0">
-                <a:solidFill>
-                  <a:srgbClr val="1B2559"/>
-                </a:solidFill>
-                <a:latin typeface="Arial Rounded MT Bold" pitchFamily="34" charset="0"/>
-                <a:ea typeface="Arial Rounded MT Bold" pitchFamily="34" charset="-122"/>
-                <a:cs typeface="Arial Rounded MT Bold" pitchFamily="34" charset="-120"/>
-              </a:rPr>
-              <a:t>Tell me 1 arrangement you have for this weekend.</a:t>
-            </a:r>
-            <a:endParaRPr lang="en-US" sz="1400" dirty="0"/>
-          </a:p>
-        </p:txBody>
-      </p:sp>
-      <p:sp>
-        <p:nvSpPr>
-          <p:cNvPr id="18" name="cd_408"/>
-          <p:cNvSpPr/>
-          <p:nvPr/>
-        </p:nvSpPr>
-        <p:spPr>
-          <a:xfrm>
-            <a:off x="5669280" y="1417320"/>
-            <a:ext cx="3200400" cy="1453896"/>
-          </a:xfrm>
-          <a:prstGeom prst="roundRect">
-            <a:avLst>
-              <a:gd name="adj" fmla="val 8805"/>
-            </a:avLst>
-          </a:prstGeom>
-          <a:solidFill>
-            <a:srgbClr val="EEE8FB"/>
-          </a:solidFill>
-          <a:ln w="28575">
-            <a:solidFill>
-              <a:srgbClr val="CDBFF3"/>
-            </a:solidFill>
-            <a:prstDash val="solid"/>
-          </a:ln>
-          <a:effectLst>
-            <a:outerShdw sx="100000" sy="100000" kx="0" ky="0" algn="bl" rotWithShape="0" blurRad="88900" dist="31750" dir="5400000">
-              <a:srgbClr val="1B2559">
-                <a:alpha val="12000"/>
-              </a:srgbClr>
-            </a:outerShdw>
-          </a:effectLst>
-        </p:spPr>
-      </p:sp>
-      <p:sp>
-        <p:nvSpPr>
-          <p:cNvPr id="19" name="ii_409"/>
-          <p:cNvSpPr/>
-          <p:nvPr/>
-        </p:nvSpPr>
-        <p:spPr>
-          <a:xfrm>
-            <a:off x="5760720" y="1490472"/>
-            <a:ext cx="457200" cy="457200"/>
-          </a:xfrm>
-          <a:prstGeom prst="rect">
-            <a:avLst/>
-          </a:prstGeom>
-          <a:noFill/>
-          <a:ln/>
-        </p:spPr>
-        <p:txBody>
-          <a:bodyPr wrap="square" lIns="0" tIns="0" rIns="0" bIns="0" rtlCol="0" anchor="ctr"/>
-          <a:lstStyle/>
-          <a:p>
-            <a:pPr algn="ctr" indent="0" marL="0">
-              <a:buNone/>
-            </a:pPr>
-            <a:r>
-              <a:rPr lang="en-US" sz="2200" dirty="0">
-                <a:solidFill>
-                  <a:srgbClr val="000000"/>
-                </a:solidFill>
-              </a:rPr>
-              <a:t>📝</a:t>
-            </a:r>
-            <a:endParaRPr lang="en-US" sz="2200" dirty="0"/>
-          </a:p>
-        </p:txBody>
-      </p:sp>
-      <p:sp>
-        <p:nvSpPr>
-          <p:cNvPr id="20" name="ih_410"/>
-          <p:cNvSpPr/>
-          <p:nvPr/>
-        </p:nvSpPr>
-        <p:spPr>
-          <a:xfrm>
-            <a:off x="6236208" y="1508760"/>
-            <a:ext cx="2560320" cy="365760"/>
-          </a:xfrm>
-          <a:prstGeom prst="rect">
-            <a:avLst/>
-          </a:prstGeom>
-          <a:noFill/>
-          <a:ln/>
-        </p:spPr>
-        <p:txBody>
-          <a:bodyPr wrap="square" lIns="0" tIns="0" rIns="0" bIns="0" rtlCol="0" anchor="ctr"/>
-          <a:lstStyle/>
-          <a:p>
-            <a:pPr indent="0" marL="0">
-              <a:buNone/>
-            </a:pPr>
-            <a:r>
-              <a:rPr lang="en-US" sz="1400" dirty="0">
-                <a:solidFill>
-                  <a:srgbClr val="1B2559"/>
-                </a:solidFill>
-                <a:latin typeface="Arial Rounded MT Bold" pitchFamily="34" charset="0"/>
-                <a:ea typeface="Arial Rounded MT Bold" pitchFamily="34" charset="-122"/>
-                <a:cs typeface="Arial Rounded MT Bold" pitchFamily="34" charset="-120"/>
-              </a:rPr>
-              <a:t>Homework · Compiti</a:t>
-            </a:r>
-            <a:endParaRPr lang="en-US" sz="1400" dirty="0"/>
-          </a:p>
-        </p:txBody>
-      </p:sp>
-      <p:sp>
-        <p:nvSpPr>
-          <p:cNvPr id="21" name="il_411"/>
-          <p:cNvSpPr/>
-          <p:nvPr/>
-        </p:nvSpPr>
-        <p:spPr>
-          <a:xfrm>
-            <a:off x="6236208" y="1911096"/>
-            <a:ext cx="2542032" cy="886968"/>
-          </a:xfrm>
-          <a:prstGeom prst="rect">
-            <a:avLst/>
-          </a:prstGeom>
-          <a:noFill/>
-          <a:ln/>
-        </p:spPr>
-        <p:txBody>
-          <a:bodyPr wrap="square" lIns="0" tIns="0" rIns="0" bIns="0" rtlCol="0" anchor="t">
-            <a:normAutofit/>
-          </a:bodyPr>
-          <a:lstStyle/>
-          <a:p>
-            <a:pPr marL="152400" indent="-152400">
-              <a:spcAft>
-                <a:spcPts val="200"/>
-              </a:spcAft>
-              <a:buSzPct val="100000"/>
-              <a:buChar char="•"/>
-            </a:pPr>
-            <a:r>
-              <a:rPr lang="en-US" sz="1150" dirty="0">
-                <a:solidFill>
-                  <a:srgbClr val="1B2559"/>
-                </a:solidFill>
-                <a:latin typeface="Segoe UI Semibold" pitchFamily="34" charset="0"/>
-                <a:ea typeface="Segoe UI Semibold" pitchFamily="34" charset="-122"/>
-                <a:cs typeface="Segoe UI Semibold" pitchFamily="34" charset="-120"/>
-              </a:rPr>
-              <a:t>Workbook 3B pp.20–21: exercises 1–3</a:t>
-            </a:r>
-            <a:endParaRPr lang="en-US" sz="1150" dirty="0"/>
-          </a:p>
-          <a:p>
-            <a:pPr marL="152400" indent="-152400">
-              <a:spcBef>
-                <a:spcPts val="600"/>
-              </a:spcBef>
-              <a:spcAft>
-                <a:spcPts val="200"/>
-              </a:spcAft>
-              <a:buSzPct val="100000"/>
-              <a:buChar char="•"/>
-            </a:pPr>
-            <a:r>
-              <a:rPr lang="en-US" sz="1150" dirty="0">
-                <a:solidFill>
-                  <a:srgbClr val="1B2559"/>
-                </a:solidFill>
-                <a:latin typeface="Segoe UI Semibold" pitchFamily="34" charset="0"/>
-                <a:ea typeface="Segoe UI Semibold" pitchFamily="34" charset="-122"/>
-                <a:cs typeface="Segoe UI Semibold" pitchFamily="34" charset="-120"/>
-              </a:rPr>
-              <a:t>SB p.115: write an informal email about travel arrangements</a:t>
-            </a:r>
-            <a:endParaRPr lang="en-US" sz="1150" dirty="0"/>
-          </a:p>
-        </p:txBody>
-      </p:sp>
-      <p:sp>
-        <p:nvSpPr>
-          <p:cNvPr id="22" name="st_412"/>
-          <p:cNvSpPr/>
-          <p:nvPr/>
-        </p:nvSpPr>
-        <p:spPr>
-          <a:xfrm rot="-180000">
-            <a:off x="5806440" y="3099816"/>
-            <a:ext cx="2926080" cy="685800"/>
-          </a:xfrm>
-          <a:prstGeom prst="rect">
-            <a:avLst/>
-          </a:prstGeom>
-          <a:solidFill>
-            <a:srgbClr val="FFC2DA"/>
-          </a:solidFill>
-          <a:ln>
-            <a:solidFill>
-              <a:srgbClr val="FFC2DA"/>
-            </a:solidFill>
-          </a:ln>
-          <a:effectLst>
-            <a:outerShdw sx="100000" sy="100000" kx="0" ky="0" algn="bl" rotWithShape="0" blurRad="88900" dist="31750" dir="5400000">
-              <a:srgbClr val="1B2559">
-                <a:alpha val="15000"/>
-              </a:srgbClr>
-            </a:outerShdw>
-          </a:effectLst>
-        </p:spPr>
-        <p:txBody>
-          <a:bodyPr wrap="square" lIns="50800" tIns="50800" rIns="50800" bIns="50800" rtlCol="0" anchor="ctr">
-            <a:normAutofit/>
-          </a:bodyPr>
-          <a:lstStyle/>
-          <a:p>
-            <a:pPr algn="ctr" indent="0" marL="0">
-              <a:buNone/>
-            </a:pPr>
-            <a:r>
-              <a:rPr lang="en-US" sz="1100" dirty="0">
-                <a:solidFill>
-                  <a:srgbClr val="1B2559"/>
-                </a:solidFill>
-                <a:latin typeface="Arial Rounded MT Bold" pitchFamily="34" charset="0"/>
-                <a:ea typeface="Arial Rounded MT Bold" pitchFamily="34" charset="-122"/>
-                <a:cs typeface="Arial Rounded MT Bold" pitchFamily="34" charset="-120"/>
-              </a:rPr>
-              <a:t>Next lesson: 3C Word games – relative clauses (SB p.26)</a:t>
-            </a:r>
-            <a:endParaRPr lang="en-US" sz="1100" dirty="0"/>
-          </a:p>
-        </p:txBody>
-      </p:sp>
-    </p:spTree>
-  </p:cSld>
-  <p:clrMapOvr>
-    <a:masterClrMapping/>
-  </p:clrMapOvr>
-  <p:transition spd="med">
-    <p:push dir="l"/>
-  </p:transition>
-</p:sld>
-</file>
-
 <file path=ppt/slides/slide17.xml><?xml version="1.0" encoding="utf-8"?>
 <p:sld xmlns:a="http://schemas.openxmlformats.org/drawingml/2006/main" xmlns:r="http://schemas.openxmlformats.org/officeDocument/2006/relationships" xmlns:p="http://schemas.openxmlformats.org/presentationml/2006/main">
   <p:cSld name="Slide 17">
@@ -15633,7 +16835,7 @@
       </p:grpSpPr>
       <p:sp>
         <p:nvSpPr>
-          <p:cNvPr id="3" name="bd_413"/>
+          <p:cNvPr id="3" name="bd_414"/>
           <p:cNvSpPr/>
           <p:nvPr/>
         </p:nvSpPr>
@@ -15641,6 +16843,579 @@
           <a:xfrm>
             <a:off x="201168" y="164592"/>
             <a:ext cx="841248" cy="841248"/>
+          </a:xfrm>
+          <a:prstGeom prst="ellipse">
+            <a:avLst/>
+          </a:prstGeom>
+          <a:solidFill>
+            <a:srgbClr val="2F8DE4"/>
+          </a:solidFill>
+          <a:ln w="28575">
+            <a:solidFill>
+              <a:srgbClr val="A9D3F5"/>
+            </a:solidFill>
+          </a:ln>
+          <a:effectLst>
+            <a:outerShdw sx="100000" sy="100000" kx="0" ky="0" algn="bl" rotWithShape="0" blurRad="88900" dist="31750" dir="5400000">
+              <a:srgbClr val="1B2559">
+                <a:alpha val="15000"/>
+              </a:srgbClr>
+            </a:outerShdw>
+          </a:effectLst>
+        </p:spPr>
+        <p:txBody>
+          <a:bodyPr wrap="square" lIns="0" tIns="0" rIns="0" bIns="0" rtlCol="0" anchor="ctr"/>
+          <a:lstStyle/>
+          <a:p>
+            <a:pPr algn="ctr" indent="0" marL="0">
+              <a:buNone/>
+            </a:pPr>
+            <a:r>
+              <a:rPr lang="en-US" sz="2200" dirty="0">
+                <a:solidFill>
+                  <a:srgbClr val="FFFFFF"/>
+                </a:solidFill>
+                <a:latin typeface="Arial Rounded MT Bold" pitchFamily="34" charset="0"/>
+                <a:ea typeface="Arial Rounded MT Bold" pitchFamily="34" charset="-122"/>
+                <a:cs typeface="Arial Rounded MT Bold" pitchFamily="34" charset="-120"/>
+              </a:rPr>
+              <a:t>17</a:t>
+            </a:r>
+            <a:endParaRPr lang="en-US" sz="2200" dirty="0"/>
+          </a:p>
+        </p:txBody>
+      </p:sp>
+      <p:pic>
+        <p:nvPicPr>
+          <p:cNvPr id="4" name="brY_415" descr="/home/claude/lls-course/v2/assets/brush-yellow.png">    </p:cNvPr>
+          <p:cNvPicPr>
+            <a:picLocks noChangeAspect="1"/>
+          </p:cNvPicPr>
+          <p:nvPr/>
+        </p:nvPicPr>
+        <p:blipFill>
+          <a:blip r:embed="rId2"/>
+          <a:stretch>
+            <a:fillRect/>
+          </a:stretch>
+        </p:blipFill>
+        <p:spPr>
+          <a:xfrm>
+            <a:off x="1097280" y="146304"/>
+            <a:ext cx="2147011" cy="621792"/>
+          </a:xfrm>
+          <a:prstGeom prst="rect">
+            <a:avLst/>
+          </a:prstGeom>
+        </p:spPr>
+      </p:pic>
+      <p:sp>
+        <p:nvSpPr>
+          <p:cNvPr id="5" name="title_416"/>
+          <p:cNvSpPr/>
+          <p:nvPr/>
+        </p:nvSpPr>
+        <p:spPr>
+          <a:xfrm>
+            <a:off x="1261872" y="164592"/>
+            <a:ext cx="1872691" cy="566928"/>
+          </a:xfrm>
+          <a:prstGeom prst="rect">
+            <a:avLst/>
+          </a:prstGeom>
+          <a:noFill/>
+          <a:ln/>
+        </p:spPr>
+        <p:txBody>
+          <a:bodyPr wrap="square" lIns="0" tIns="0" rIns="0" bIns="0" rtlCol="0" anchor="ctr">
+            <a:normAutofit/>
+          </a:bodyPr>
+          <a:lstStyle/>
+          <a:p>
+            <a:pPr indent="0" marL="0">
+              <a:buNone/>
+            </a:pPr>
+            <a:r>
+              <a:rPr lang="en-US" sz="2500" dirty="0">
+                <a:solidFill>
+                  <a:srgbClr val="1B2559"/>
+                </a:solidFill>
+                <a:latin typeface="Arial Rounded MT Bold" pitchFamily="34" charset="0"/>
+                <a:ea typeface="Arial Rounded MT Bold" pitchFamily="34" charset="-122"/>
+                <a:cs typeface="Arial Rounded MT Bold" pitchFamily="34" charset="-120"/>
+              </a:rPr>
+              <a:t>3 · 2 · 1</a:t>
+            </a:r>
+            <a:endParaRPr lang="en-US" sz="2500" dirty="0"/>
+          </a:p>
+        </p:txBody>
+      </p:sp>
+      <p:pic>
+        <p:nvPicPr>
+          <p:cNvPr id="6" name="brP_417" descr="/home/claude/lls-course/v2/assets/brush-pink.png">    </p:cNvPr>
+          <p:cNvPicPr>
+            <a:picLocks noChangeAspect="1"/>
+          </p:cNvPicPr>
+          <p:nvPr/>
+        </p:nvPicPr>
+        <p:blipFill>
+          <a:blip r:embed="rId3"/>
+          <a:stretch>
+            <a:fillRect/>
+          </a:stretch>
+        </p:blipFill>
+        <p:spPr>
+          <a:xfrm>
+            <a:off x="1207008" y="731520"/>
+            <a:ext cx="3511296" cy="402336"/>
+          </a:xfrm>
+          <a:prstGeom prst="rect">
+            <a:avLst/>
+          </a:prstGeom>
+        </p:spPr>
+      </p:pic>
+      <p:sp>
+        <p:nvSpPr>
+          <p:cNvPr id="7" name="ins_418"/>
+          <p:cNvSpPr/>
+          <p:nvPr/>
+        </p:nvSpPr>
+        <p:spPr>
+          <a:xfrm>
+            <a:off x="1353312" y="731520"/>
+            <a:ext cx="3255264" cy="402336"/>
+          </a:xfrm>
+          <a:prstGeom prst="rect">
+            <a:avLst/>
+          </a:prstGeom>
+          <a:noFill/>
+          <a:ln/>
+        </p:spPr>
+        <p:txBody>
+          <a:bodyPr wrap="square" lIns="0" tIns="0" rIns="0" bIns="0" rtlCol="0" anchor="ctr">
+            <a:normAutofit/>
+          </a:bodyPr>
+          <a:lstStyle/>
+          <a:p>
+            <a:pPr indent="0" marL="0">
+              <a:buNone/>
+            </a:pPr>
+            <a:r>
+              <a:rPr lang="en-US" sz="1250" i="1" dirty="0">
+                <a:solidFill>
+                  <a:srgbClr val="1B2559"/>
+                </a:solidFill>
+                <a:latin typeface="Segoe UI Semibold" pitchFamily="34" charset="0"/>
+                <a:ea typeface="Segoe UI Semibold" pitchFamily="34" charset="-122"/>
+                <a:cs typeface="Segoe UI Semibold" pitchFamily="34" charset="-120"/>
+              </a:rPr>
+              <a:t>Books closed! Tell your partner…</a:t>
+            </a:r>
+            <a:endParaRPr lang="en-US" sz="1250" dirty="0"/>
+          </a:p>
+        </p:txBody>
+      </p:sp>
+      <p:sp>
+        <p:nvSpPr>
+          <p:cNvPr id="8" name="insIT_419"/>
+          <p:cNvSpPr/>
+          <p:nvPr/>
+        </p:nvSpPr>
+        <p:spPr>
+          <a:xfrm>
+            <a:off x="1371600" y="1115568"/>
+            <a:ext cx="5074920" cy="219456"/>
+          </a:xfrm>
+          <a:prstGeom prst="rect">
+            <a:avLst/>
+          </a:prstGeom>
+          <a:noFill/>
+          <a:ln/>
+        </p:spPr>
+        <p:txBody>
+          <a:bodyPr wrap="square" lIns="0" tIns="0" rIns="0" bIns="0" rtlCol="0" anchor="ctr">
+            <a:normAutofit/>
+          </a:bodyPr>
+          <a:lstStyle/>
+          <a:p>
+            <a:pPr indent="0" marL="0">
+              <a:buNone/>
+            </a:pPr>
+            <a:r>
+              <a:rPr lang="en-US" sz="950" i="1" dirty="0">
+                <a:solidFill>
+                  <a:srgbClr val="5B6785"/>
+                </a:solidFill>
+                <a:latin typeface="Segoe UI Semibold" pitchFamily="34" charset="0"/>
+                <a:ea typeface="Segoe UI Semibold" pitchFamily="34" charset="-122"/>
+                <a:cs typeface="Segoe UI Semibold" pitchFamily="34" charset="-120"/>
+              </a:rPr>
+              <a:t>Libri chiusi! Di' al compagno…</a:t>
+            </a:r>
+            <a:endParaRPr lang="en-US" sz="950" dirty="0"/>
+          </a:p>
+        </p:txBody>
+      </p:sp>
+      <p:sp>
+        <p:nvSpPr>
+          <p:cNvPr id="9" name="note_420"/>
+          <p:cNvSpPr/>
+          <p:nvPr/>
+        </p:nvSpPr>
+        <p:spPr>
+          <a:xfrm rot="180000">
+            <a:off x="6382512" y="128016"/>
+            <a:ext cx="2029968" cy="749808"/>
+          </a:xfrm>
+          <a:prstGeom prst="rect">
+            <a:avLst/>
+          </a:prstGeom>
+          <a:solidFill>
+            <a:srgbClr val="FFC2DA"/>
+          </a:solidFill>
+          <a:ln>
+            <a:solidFill>
+              <a:srgbClr val="FFC2DA"/>
+            </a:solidFill>
+          </a:ln>
+          <a:effectLst>
+            <a:outerShdw sx="100000" sy="100000" kx="0" ky="0" algn="bl" rotWithShape="0" blurRad="88900" dist="31750" dir="5400000">
+              <a:srgbClr val="1B2559">
+                <a:alpha val="15000"/>
+              </a:srgbClr>
+            </a:outerShdw>
+          </a:effectLst>
+        </p:spPr>
+        <p:txBody>
+          <a:bodyPr wrap="square" lIns="50800" tIns="50800" rIns="50800" bIns="50800" rtlCol="0" anchor="ctr">
+            <a:normAutofit/>
+          </a:bodyPr>
+          <a:lstStyle/>
+          <a:p>
+            <a:pPr algn="ctr" indent="0" marL="0">
+              <a:buNone/>
+            </a:pPr>
+            <a:r>
+              <a:rPr lang="en-US" sz="1100" dirty="0">
+                <a:solidFill>
+                  <a:srgbClr val="1B2559"/>
+                </a:solidFill>
+                <a:latin typeface="Segoe UI Semibold" pitchFamily="34" charset="0"/>
+                <a:ea typeface="Segoe UI Semibold" pitchFamily="34" charset="-122"/>
+                <a:cs typeface="Segoe UI Semibold" pitchFamily="34" charset="-120"/>
+              </a:rPr>
+              <a:t>⏱ 2 min   👥 pairs</a:t>
+            </a:r>
+            <a:endParaRPr lang="en-US" sz="1100" dirty="0"/>
+          </a:p>
+          <a:p>
+            <a:pPr algn="ctr" indent="0" marL="0">
+              <a:buNone/>
+            </a:pPr>
+            <a:r>
+              <a:rPr lang="en-US" sz="900" dirty="0">
+                <a:solidFill>
+                  <a:srgbClr val="5B6785"/>
+                </a:solidFill>
+                <a:latin typeface="Segoe UI Semibold" pitchFamily="34" charset="0"/>
+                <a:ea typeface="Segoe UI Semibold" pitchFamily="34" charset="-122"/>
+                <a:cs typeface="Segoe UI Semibold" pitchFamily="34" charset="-120"/>
+              </a:rPr>
+              <a:t>🎯 Revision · Retrieval</a:t>
+            </a:r>
+            <a:endParaRPr lang="en-US" sz="1100" dirty="0"/>
+          </a:p>
+        </p:txBody>
+      </p:sp>
+      <p:pic>
+        <p:nvPicPr>
+          <p:cNvPr id="10" name="logo_421" descr="/home/claude/lls-course/v2/img/logo.png">    </p:cNvPr>
+          <p:cNvPicPr>
+            <a:picLocks noChangeAspect="1"/>
+          </p:cNvPicPr>
+          <p:nvPr/>
+        </p:nvPicPr>
+        <p:blipFill>
+          <a:blip r:embed="rId4"/>
+          <a:stretch>
+            <a:fillRect/>
+          </a:stretch>
+        </p:blipFill>
+        <p:spPr>
+          <a:xfrm>
+            <a:off x="8485632" y="128016"/>
+            <a:ext cx="502920" cy="502920"/>
+          </a:xfrm>
+          <a:prstGeom prst="rect">
+            <a:avLst/>
+          </a:prstGeom>
+        </p:spPr>
+      </p:pic>
+      <p:sp>
+        <p:nvSpPr>
+          <p:cNvPr id="11" name="foot_422"/>
+          <p:cNvSpPr/>
+          <p:nvPr/>
+        </p:nvSpPr>
+        <p:spPr>
+          <a:xfrm>
+            <a:off x="274320" y="4873752"/>
+            <a:ext cx="6858000" cy="219456"/>
+          </a:xfrm>
+          <a:prstGeom prst="rect">
+            <a:avLst/>
+          </a:prstGeom>
+          <a:noFill/>
+          <a:ln/>
+        </p:spPr>
+        <p:txBody>
+          <a:bodyPr wrap="square" lIns="0" tIns="0" rIns="0" bIns="0" rtlCol="0" anchor="ctr"/>
+          <a:lstStyle/>
+          <a:p>
+            <a:pPr indent="0" marL="0">
+              <a:buNone/>
+            </a:pPr>
+            <a:r>
+              <a:rPr lang="en-US" sz="800" dirty="0">
+                <a:solidFill>
+                  <a:srgbClr val="5B6785"/>
+                </a:solidFill>
+                <a:latin typeface="Segoe UI Semibold" pitchFamily="34" charset="0"/>
+                <a:ea typeface="Segoe UI Semibold" pitchFamily="34" charset="-122"/>
+                <a:cs typeface="Segoe UI Semibold" pitchFamily="34" charset="-120"/>
+              </a:rPr>
+              <a:t>3B · Exit · what can you remember?</a:t>
+            </a:r>
+            <a:endParaRPr lang="en-US" sz="800" dirty="0"/>
+          </a:p>
+        </p:txBody>
+      </p:sp>
+      <p:sp>
+        <p:nvSpPr>
+          <p:cNvPr id="12" name="bd_423"/>
+          <p:cNvSpPr/>
+          <p:nvPr/>
+        </p:nvSpPr>
+        <p:spPr>
+          <a:xfrm>
+            <a:off x="457200" y="1508760"/>
+            <a:ext cx="777240" cy="777240"/>
+          </a:xfrm>
+          <a:prstGeom prst="ellipse">
+            <a:avLst/>
+          </a:prstGeom>
+          <a:solidFill>
+            <a:srgbClr val="E8508F"/>
+          </a:solidFill>
+          <a:ln w="28575">
+            <a:solidFill>
+              <a:srgbClr val="F7A6C4"/>
+            </a:solidFill>
+          </a:ln>
+          <a:effectLst>
+            <a:outerShdw sx="100000" sy="100000" kx="0" ky="0" algn="bl" rotWithShape="0" blurRad="88900" dist="31750" dir="5400000">
+              <a:srgbClr val="1B2559">
+                <a:alpha val="15000"/>
+              </a:srgbClr>
+            </a:outerShdw>
+          </a:effectLst>
+        </p:spPr>
+        <p:txBody>
+          <a:bodyPr wrap="square" lIns="0" tIns="0" rIns="0" bIns="0" rtlCol="0" anchor="ctr"/>
+          <a:lstStyle/>
+          <a:p>
+            <a:pPr algn="ctr" indent="0" marL="0">
+              <a:buNone/>
+            </a:pPr>
+            <a:r>
+              <a:rPr lang="en-US" sz="2600" dirty="0">
+                <a:solidFill>
+                  <a:srgbClr val="FFFFFF"/>
+                </a:solidFill>
+                <a:latin typeface="Arial Rounded MT Bold" pitchFamily="34" charset="0"/>
+                <a:ea typeface="Arial Rounded MT Bold" pitchFamily="34" charset="-122"/>
+                <a:cs typeface="Arial Rounded MT Bold" pitchFamily="34" charset="-120"/>
+              </a:rPr>
+              <a:t>3</a:t>
+            </a:r>
+            <a:endParaRPr lang="en-US" sz="2600" dirty="0"/>
+          </a:p>
+        </p:txBody>
+      </p:sp>
+      <p:sp>
+        <p:nvSpPr>
+          <p:cNvPr id="13" name="rt_424"/>
+          <p:cNvSpPr/>
+          <p:nvPr/>
+        </p:nvSpPr>
+        <p:spPr>
+          <a:xfrm>
+            <a:off x="1417320" y="1581912"/>
+            <a:ext cx="3931920" cy="640080"/>
+          </a:xfrm>
+          <a:prstGeom prst="roundRect">
+            <a:avLst>
+              <a:gd name="adj" fmla="val 20000"/>
+            </a:avLst>
+          </a:prstGeom>
+          <a:solidFill>
+            <a:srgbClr val="FFFFFF"/>
+          </a:solidFill>
+          <a:ln w="28575">
+            <a:solidFill>
+              <a:srgbClr val="F7A6C4"/>
+            </a:solidFill>
+          </a:ln>
+          <a:effectLst>
+            <a:outerShdw sx="100000" sy="100000" kx="0" ky="0" algn="bl" rotWithShape="0" blurRad="88900" dist="31750" dir="5400000">
+              <a:srgbClr val="1B2559">
+                <a:alpha val="8000"/>
+              </a:srgbClr>
+            </a:outerShdw>
+          </a:effectLst>
+        </p:spPr>
+        <p:txBody>
+          <a:bodyPr wrap="square" lIns="152400" tIns="0" rIns="152400" bIns="0" rtlCol="0" anchor="ctr">
+            <a:normAutofit/>
+          </a:bodyPr>
+          <a:lstStyle/>
+          <a:p>
+            <a:pPr indent="0" marL="0">
+              <a:buNone/>
+            </a:pPr>
+            <a:r>
+              <a:rPr lang="en-US" sz="1400" dirty="0">
+                <a:solidFill>
+                  <a:srgbClr val="1B2559"/>
+                </a:solidFill>
+                <a:latin typeface="Arial Rounded MT Bold" pitchFamily="34" charset="0"/>
+                <a:ea typeface="Arial Rounded MT Bold" pitchFamily="34" charset="-122"/>
+                <a:cs typeface="Arial Rounded MT Bold" pitchFamily="34" charset="-120"/>
+              </a:rPr>
+              <a:t>Tell me 3 verbs with their prepositions.</a:t>
+            </a:r>
+            <a:endParaRPr lang="en-US" sz="1400" dirty="0"/>
+          </a:p>
+        </p:txBody>
+      </p:sp>
+      <p:sp>
+        <p:nvSpPr>
+          <p:cNvPr id="14" name="bd_425"/>
+          <p:cNvSpPr/>
+          <p:nvPr/>
+        </p:nvSpPr>
+        <p:spPr>
+          <a:xfrm>
+            <a:off x="457200" y="2468880"/>
+            <a:ext cx="777240" cy="777240"/>
+          </a:xfrm>
+          <a:prstGeom prst="ellipse">
+            <a:avLst/>
+          </a:prstGeom>
+          <a:solidFill>
+            <a:srgbClr val="2F8DE4"/>
+          </a:solidFill>
+          <a:ln w="28575">
+            <a:solidFill>
+              <a:srgbClr val="A9D3F5"/>
+            </a:solidFill>
+          </a:ln>
+          <a:effectLst>
+            <a:outerShdw sx="100000" sy="100000" kx="0" ky="0" algn="bl" rotWithShape="0" blurRad="88900" dist="31750" dir="5400000">
+              <a:srgbClr val="1B2559">
+                <a:alpha val="15000"/>
+              </a:srgbClr>
+            </a:outerShdw>
+          </a:effectLst>
+        </p:spPr>
+        <p:txBody>
+          <a:bodyPr wrap="square" lIns="0" tIns="0" rIns="0" bIns="0" rtlCol="0" anchor="ctr"/>
+          <a:lstStyle/>
+          <a:p>
+            <a:pPr algn="ctr" indent="0" marL="0">
+              <a:buNone/>
+            </a:pPr>
+            <a:r>
+              <a:rPr lang="en-US" sz="2600" dirty="0">
+                <a:solidFill>
+                  <a:srgbClr val="FFFFFF"/>
+                </a:solidFill>
+                <a:latin typeface="Arial Rounded MT Bold" pitchFamily="34" charset="0"/>
+                <a:ea typeface="Arial Rounded MT Bold" pitchFamily="34" charset="-122"/>
+                <a:cs typeface="Arial Rounded MT Bold" pitchFamily="34" charset="-120"/>
+              </a:rPr>
+              <a:t>2</a:t>
+            </a:r>
+            <a:endParaRPr lang="en-US" sz="2600" dirty="0"/>
+          </a:p>
+        </p:txBody>
+      </p:sp>
+      <p:sp>
+        <p:nvSpPr>
+          <p:cNvPr id="15" name="rt_426"/>
+          <p:cNvSpPr/>
+          <p:nvPr/>
+        </p:nvSpPr>
+        <p:spPr>
+          <a:xfrm>
+            <a:off x="1417320" y="2542032"/>
+            <a:ext cx="3931920" cy="640080"/>
+          </a:xfrm>
+          <a:prstGeom prst="roundRect">
+            <a:avLst>
+              <a:gd name="adj" fmla="val 20000"/>
+            </a:avLst>
+          </a:prstGeom>
+          <a:solidFill>
+            <a:srgbClr val="FFFFFF"/>
+          </a:solidFill>
+          <a:ln w="28575">
+            <a:solidFill>
+              <a:srgbClr val="A9D3F5"/>
+            </a:solidFill>
+          </a:ln>
+          <a:effectLst>
+            <a:outerShdw sx="100000" sy="100000" kx="0" ky="0" algn="bl" rotWithShape="0" blurRad="88900" dist="31750" dir="5400000">
+              <a:srgbClr val="1B2559">
+                <a:alpha val="8000"/>
+              </a:srgbClr>
+            </a:outerShdw>
+          </a:effectLst>
+        </p:spPr>
+        <p:txBody>
+          <a:bodyPr wrap="square" lIns="152400" tIns="0" rIns="152400" bIns="0" rtlCol="0" anchor="ctr">
+            <a:normAutofit/>
+          </a:bodyPr>
+          <a:lstStyle/>
+          <a:p>
+            <a:pPr indent="0" marL="0">
+              <a:buNone/>
+            </a:pPr>
+            <a:r>
+              <a:rPr lang="en-US" sz="1400" dirty="0">
+                <a:solidFill>
+                  <a:srgbClr val="1B2559"/>
+                </a:solidFill>
+                <a:latin typeface="Arial Rounded MT Bold" pitchFamily="34" charset="0"/>
+                <a:ea typeface="Arial Rounded MT Bold" pitchFamily="34" charset="-122"/>
+                <a:cs typeface="Arial Rounded MT Bold" pitchFamily="34" charset="-120"/>
+              </a:rPr>
+              <a:t>Tell me 2 things in Jake's calendar for Tuesday.</a:t>
+            </a:r>
+            <a:endParaRPr lang="en-US" sz="1400" dirty="0"/>
+          </a:p>
+        </p:txBody>
+      </p:sp>
+      <p:sp>
+        <p:nvSpPr>
+          <p:cNvPr id="16" name="bd_427"/>
+          <p:cNvSpPr/>
+          <p:nvPr/>
+        </p:nvSpPr>
+        <p:spPr>
+          <a:xfrm>
+            <a:off x="457200" y="3429000"/>
+            <a:ext cx="777240" cy="777240"/>
           </a:xfrm>
           <a:prstGeom prst="ellipse">
             <a:avLst/>
@@ -15669,7 +17444,7 @@
               <a:buNone/>
             </a:pPr>
             <a:r>
-              <a:rPr lang="en-US" sz="2200" dirty="0">
+              <a:rPr lang="en-US" sz="2600" dirty="0">
                 <a:solidFill>
                   <a:srgbClr val="FFFFFF"/>
                 </a:solidFill>
@@ -15677,55 +17452,46 @@
                 <a:ea typeface="Arial Rounded MT Bold" pitchFamily="34" charset="-122"/>
                 <a:cs typeface="Arial Rounded MT Bold" pitchFamily="34" charset="-120"/>
               </a:rPr>
-              <a:t>17</a:t>
-            </a:r>
-            <a:endParaRPr lang="en-US" sz="2200" dirty="0"/>
-          </a:p>
-        </p:txBody>
-      </p:sp>
-      <p:pic>
-        <p:nvPicPr>
-          <p:cNvPr id="4" name="brY_414" descr="/home/claude/lls-course/v2/assets/brush-yellow.png">    </p:cNvPr>
-          <p:cNvPicPr>
-            <a:picLocks noChangeAspect="1"/>
-          </p:cNvPicPr>
-          <p:nvPr/>
-        </p:nvPicPr>
-        <p:blipFill>
-          <a:blip r:embed="rId2"/>
-          <a:stretch>
-            <a:fillRect/>
-          </a:stretch>
-        </p:blipFill>
-        <p:spPr>
-          <a:xfrm>
-            <a:off x="1097280" y="146304"/>
-            <a:ext cx="2304288" cy="621792"/>
-          </a:xfrm>
-          <a:prstGeom prst="rect">
-            <a:avLst/>
-          </a:prstGeom>
-        </p:spPr>
-      </p:pic>
-      <p:sp>
-        <p:nvSpPr>
-          <p:cNvPr id="5" name="title_415"/>
-          <p:cNvSpPr/>
-          <p:nvPr/>
-        </p:nvSpPr>
-        <p:spPr>
-          <a:xfrm>
-            <a:off x="1261872" y="164592"/>
-            <a:ext cx="2029968" cy="566928"/>
-          </a:xfrm>
-          <a:prstGeom prst="rect">
-            <a:avLst/>
-          </a:prstGeom>
-          <a:noFill/>
-          <a:ln/>
-        </p:spPr>
-        <p:txBody>
-          <a:bodyPr wrap="square" lIns="0" tIns="0" rIns="0" bIns="0" rtlCol="0" anchor="ctr">
+              <a:t>1</a:t>
+            </a:r>
+            <a:endParaRPr lang="en-US" sz="2600" dirty="0"/>
+          </a:p>
+        </p:txBody>
+      </p:sp>
+      <p:sp>
+        <p:nvSpPr>
+          <p:cNvPr id="17" name="rt_428"/>
+          <p:cNvSpPr/>
+          <p:nvPr/>
+        </p:nvSpPr>
+        <p:spPr>
+          <a:xfrm>
+            <a:off x="1417320" y="3502152"/>
+            <a:ext cx="3931920" cy="640080"/>
+          </a:xfrm>
+          <a:prstGeom prst="roundRect">
+            <a:avLst>
+              <a:gd name="adj" fmla="val 20000"/>
+            </a:avLst>
+          </a:prstGeom>
+          <a:solidFill>
+            <a:srgbClr val="FFFFFF"/>
+          </a:solidFill>
+          <a:ln w="28575">
+            <a:solidFill>
+              <a:srgbClr val="A8E5BE"/>
+            </a:solidFill>
+          </a:ln>
+          <a:effectLst>
+            <a:outerShdw sx="100000" sy="100000" kx="0" ky="0" algn="bl" rotWithShape="0" blurRad="88900" dist="31750" dir="5400000">
+              <a:srgbClr val="1B2559">
+                <a:alpha val="8000"/>
+              </a:srgbClr>
+            </a:outerShdw>
+          </a:effectLst>
+        </p:spPr>
+        <p:txBody>
+          <a:bodyPr wrap="square" lIns="152400" tIns="0" rIns="152400" bIns="0" rtlCol="0" anchor="ctr">
             <a:normAutofit/>
           </a:bodyPr>
           <a:lstStyle/>
@@ -15734,7 +17500,7 @@
               <a:buNone/>
             </a:pPr>
             <a:r>
-              <a:rPr lang="en-US" sz="2400" dirty="0">
+              <a:rPr lang="en-US" sz="1400" dirty="0">
                 <a:solidFill>
                   <a:srgbClr val="1B2559"/>
                 </a:solidFill>
@@ -15742,46 +17508,92 @@
                 <a:ea typeface="Arial Rounded MT Bold" pitchFamily="34" charset="-122"/>
                 <a:cs typeface="Arial Rounded MT Bold" pitchFamily="34" charset="-120"/>
               </a:rPr>
-              <a:t>Today you…</a:t>
-            </a:r>
-            <a:endParaRPr lang="en-US" sz="2400" dirty="0"/>
-          </a:p>
-        </p:txBody>
-      </p:sp>
-      <p:pic>
-        <p:nvPicPr>
-          <p:cNvPr id="6" name="brP_416" descr="/home/claude/lls-course/v2/assets/brush-pink.png">    </p:cNvPr>
-          <p:cNvPicPr>
-            <a:picLocks noChangeAspect="1"/>
-          </p:cNvPicPr>
-          <p:nvPr/>
-        </p:nvPicPr>
-        <p:blipFill>
-          <a:blip r:embed="rId3"/>
-          <a:stretch>
-            <a:fillRect/>
-          </a:stretch>
-        </p:blipFill>
-        <p:spPr>
-          <a:xfrm>
-            <a:off x="1207008" y="731520"/>
-            <a:ext cx="4553712" cy="402336"/>
+              <a:t>Tell me 1 arrangement you have for this weekend.</a:t>
+            </a:r>
+            <a:endParaRPr lang="en-US" sz="1400" dirty="0"/>
+          </a:p>
+        </p:txBody>
+      </p:sp>
+      <p:sp>
+        <p:nvSpPr>
+          <p:cNvPr id="18" name="cd_429"/>
+          <p:cNvSpPr/>
+          <p:nvPr/>
+        </p:nvSpPr>
+        <p:spPr>
+          <a:xfrm>
+            <a:off x="5669280" y="1417320"/>
+            <a:ext cx="3200400" cy="1453896"/>
+          </a:xfrm>
+          <a:prstGeom prst="roundRect">
+            <a:avLst>
+              <a:gd name="adj" fmla="val 8805"/>
+            </a:avLst>
+          </a:prstGeom>
+          <a:solidFill>
+            <a:srgbClr val="EEE8FB"/>
+          </a:solidFill>
+          <a:ln w="28575">
+            <a:solidFill>
+              <a:srgbClr val="CDBFF3"/>
+            </a:solidFill>
+            <a:prstDash val="solid"/>
+          </a:ln>
+          <a:effectLst>
+            <a:outerShdw sx="100000" sy="100000" kx="0" ky="0" algn="bl" rotWithShape="0" blurRad="88900" dist="31750" dir="5400000">
+              <a:srgbClr val="1B2559">
+                <a:alpha val="12000"/>
+              </a:srgbClr>
+            </a:outerShdw>
+          </a:effectLst>
+        </p:spPr>
+      </p:sp>
+      <p:sp>
+        <p:nvSpPr>
+          <p:cNvPr id="19" name="ii_430"/>
+          <p:cNvSpPr/>
+          <p:nvPr/>
+        </p:nvSpPr>
+        <p:spPr>
+          <a:xfrm>
+            <a:off x="5760720" y="1490472"/>
+            <a:ext cx="457200" cy="457200"/>
           </a:xfrm>
           <a:prstGeom prst="rect">
             <a:avLst/>
           </a:prstGeom>
-        </p:spPr>
-      </p:pic>
-      <p:sp>
-        <p:nvSpPr>
-          <p:cNvPr id="7" name="ins_417"/>
-          <p:cNvSpPr/>
-          <p:nvPr/>
-        </p:nvSpPr>
-        <p:spPr>
-          <a:xfrm>
-            <a:off x="1353312" y="731520"/>
-            <a:ext cx="4297680" cy="402336"/>
+          <a:noFill/>
+          <a:ln/>
+        </p:spPr>
+        <p:txBody>
+          <a:bodyPr wrap="square" lIns="0" tIns="0" rIns="0" bIns="0" rtlCol="0" anchor="ctr"/>
+          <a:lstStyle/>
+          <a:p>
+            <a:pPr algn="ctr" indent="0" marL="0">
+              <a:buNone/>
+            </a:pPr>
+            <a:r>
+              <a:rPr lang="en-US" sz="2200" dirty="0">
+                <a:solidFill>
+                  <a:srgbClr val="000000"/>
+                </a:solidFill>
+              </a:rPr>
+              <a:t>📝</a:t>
+            </a:r>
+            <a:endParaRPr lang="en-US" sz="2200" dirty="0"/>
+          </a:p>
+        </p:txBody>
+      </p:sp>
+      <p:sp>
+        <p:nvSpPr>
+          <p:cNvPr id="20" name="ih_431"/>
+          <p:cNvSpPr/>
+          <p:nvPr/>
+        </p:nvSpPr>
+        <p:spPr>
+          <a:xfrm>
+            <a:off x="6236208" y="1508760"/>
+            <a:ext cx="2560320" cy="365760"/>
           </a:xfrm>
           <a:prstGeom prst="rect">
             <a:avLst/>
@@ -15790,80 +17602,106 @@
           <a:ln/>
         </p:spPr>
         <p:txBody>
-          <a:bodyPr wrap="square" lIns="0" tIns="0" rIns="0" bIns="0" rtlCol="0" anchor="ctr">
+          <a:bodyPr wrap="square" lIns="0" tIns="0" rIns="0" bIns="0" rtlCol="0" anchor="ctr"/>
+          <a:lstStyle/>
+          <a:p>
+            <a:pPr indent="0" marL="0">
+              <a:buNone/>
+            </a:pPr>
+            <a:r>
+              <a:rPr lang="en-US" sz="1400" dirty="0">
+                <a:solidFill>
+                  <a:srgbClr val="1B2559"/>
+                </a:solidFill>
+                <a:latin typeface="Arial Rounded MT Bold" pitchFamily="34" charset="0"/>
+                <a:ea typeface="Arial Rounded MT Bold" pitchFamily="34" charset="-122"/>
+                <a:cs typeface="Arial Rounded MT Bold" pitchFamily="34" charset="-120"/>
+              </a:rPr>
+              <a:t>Homework · Compiti</a:t>
+            </a:r>
+            <a:endParaRPr lang="en-US" sz="1400" dirty="0"/>
+          </a:p>
+        </p:txBody>
+      </p:sp>
+      <p:sp>
+        <p:nvSpPr>
+          <p:cNvPr id="21" name="il_432"/>
+          <p:cNvSpPr/>
+          <p:nvPr/>
+        </p:nvSpPr>
+        <p:spPr>
+          <a:xfrm>
+            <a:off x="6236208" y="1911096"/>
+            <a:ext cx="2542032" cy="886968"/>
+          </a:xfrm>
+          <a:prstGeom prst="rect">
+            <a:avLst/>
+          </a:prstGeom>
+          <a:noFill/>
+          <a:ln/>
+        </p:spPr>
+        <p:txBody>
+          <a:bodyPr wrap="square" lIns="0" tIns="0" rIns="0" bIns="0" rtlCol="0" anchor="t">
             <a:normAutofit/>
           </a:bodyPr>
           <a:lstStyle/>
           <a:p>
-            <a:pPr indent="0" marL="0">
-              <a:buNone/>
-            </a:pPr>
-            <a:r>
-              <a:rPr lang="en-US" sz="1250" i="1" dirty="0">
-                <a:solidFill>
-                  <a:srgbClr val="1B2559"/>
-                </a:solidFill>
-                <a:latin typeface="Segoe UI Semibold" pitchFamily="34" charset="0"/>
-                <a:ea typeface="Segoe UI Semibold" pitchFamily="34" charset="-122"/>
-                <a:cs typeface="Segoe UI Semibold" pitchFamily="34" charset="-120"/>
-              </a:rPr>
-              <a:t>Can you do it now? Thumbs up or thumbs down!</a:t>
-            </a:r>
-            <a:endParaRPr lang="en-US" sz="1250" dirty="0"/>
-          </a:p>
-        </p:txBody>
-      </p:sp>
-      <p:sp>
-        <p:nvSpPr>
-          <p:cNvPr id="8" name="insIT_418"/>
-          <p:cNvSpPr/>
-          <p:nvPr/>
-        </p:nvSpPr>
-        <p:spPr>
-          <a:xfrm>
-            <a:off x="1371600" y="1115568"/>
-            <a:ext cx="5074920" cy="219456"/>
-          </a:xfrm>
-          <a:prstGeom prst="rect">
-            <a:avLst/>
-          </a:prstGeom>
-          <a:noFill/>
-          <a:ln/>
-        </p:spPr>
-        <p:txBody>
-          <a:bodyPr wrap="square" lIns="0" tIns="0" rIns="0" bIns="0" rtlCol="0" anchor="ctr">
-            <a:normAutofit/>
-          </a:bodyPr>
-          <a:lstStyle/>
-          <a:p>
-            <a:pPr indent="0" marL="0">
-              <a:buNone/>
-            </a:pPr>
-            <a:r>
-              <a:rPr lang="en-US" sz="950" i="1" dirty="0">
-                <a:solidFill>
-                  <a:srgbClr val="5B6785"/>
-                </a:solidFill>
-                <a:latin typeface="Segoe UI Semibold" pitchFamily="34" charset="0"/>
-                <a:ea typeface="Segoe UI Semibold" pitchFamily="34" charset="-122"/>
-                <a:cs typeface="Segoe UI Semibold" pitchFamily="34" charset="-120"/>
-              </a:rPr>
-              <a:t>Ora sai farlo? Pollice su o pollice giù!</a:t>
-            </a:r>
-            <a:endParaRPr lang="en-US" sz="950" dirty="0"/>
-          </a:p>
-        </p:txBody>
-      </p:sp>
-      <p:sp>
-        <p:nvSpPr>
-          <p:cNvPr id="9" name="note_419"/>
-          <p:cNvSpPr/>
-          <p:nvPr/>
-        </p:nvSpPr>
-        <p:spPr>
-          <a:xfrm rot="180000">
-            <a:off x="6382512" y="128016"/>
-            <a:ext cx="2029968" cy="1024128"/>
+            <a:pPr marL="152400" indent="-152400">
+              <a:spcAft>
+                <a:spcPts val="200"/>
+              </a:spcAft>
+              <a:buSzPct val="100000"/>
+              <a:buChar char="•"/>
+            </a:pPr>
+            <a:r>
+              <a:rPr lang="en-US" sz="1150" dirty="0">
+                <a:solidFill>
+                  <a:srgbClr val="1B2559"/>
+                </a:solidFill>
+                <a:latin typeface="Segoe UI Semibold" pitchFamily="34" charset="0"/>
+                <a:ea typeface="Segoe UI Semibold" pitchFamily="34" charset="-122"/>
+                <a:cs typeface="Segoe UI Semibold" pitchFamily="34" charset="-120"/>
+              </a:rPr>
+              <a:t>Workbook 3B pp.20–21: exercises 1–3</a:t>
+            </a:r>
+            <a:endParaRPr lang="en-US" sz="1150" dirty="0"/>
+          </a:p>
+          <a:p>
+            <a:pPr marL="152400" indent="-152400">
+              <a:spcBef>
+                <a:spcPts val="600"/>
+              </a:spcBef>
+              <a:spcAft>
+                <a:spcPts val="200"/>
+              </a:spcAft>
+              <a:buSzPct val="100000"/>
+              <a:buChar char="•"/>
+            </a:pPr>
+            <a:r>
+              <a:rPr lang="en-US" sz="1150" dirty="0">
+                <a:solidFill>
+                  <a:srgbClr val="1B2559"/>
+                </a:solidFill>
+                <a:latin typeface="Segoe UI Semibold" pitchFamily="34" charset="0"/>
+                <a:ea typeface="Segoe UI Semibold" pitchFamily="34" charset="-122"/>
+                <a:cs typeface="Segoe UI Semibold" pitchFamily="34" charset="-120"/>
+              </a:rPr>
+              <a:t>SB p.115: write an informal email about travel arrangements</a:t>
+            </a:r>
+            <a:endParaRPr lang="en-US" sz="1150" dirty="0"/>
+          </a:p>
+        </p:txBody>
+      </p:sp>
+      <p:sp>
+        <p:nvSpPr>
+          <p:cNvPr id="22" name="st_433"/>
+          <p:cNvSpPr/>
+          <p:nvPr/>
+        </p:nvSpPr>
+        <p:spPr>
+          <a:xfrm rot="-180000">
+            <a:off x="5806440" y="3099816"/>
+            <a:ext cx="2926080" cy="685800"/>
           </a:xfrm>
           <a:prstGeom prst="rect">
             <a:avLst/>
@@ -15894,7 +17732,7 @@
               <a:buNone/>
             </a:pPr>
             <a:r>
-              <a:rPr lang="en-US" sz="1250" dirty="0">
+              <a:rPr lang="en-US" sz="1100" dirty="0">
                 <a:solidFill>
                   <a:srgbClr val="1B2559"/>
                 </a:solidFill>
@@ -15902,63 +17740,382 @@
                 <a:ea typeface="Arial Rounded MT Bold" pitchFamily="34" charset="-122"/>
                 <a:cs typeface="Arial Rounded MT Bold" pitchFamily="34" charset="-120"/>
               </a:rPr>
-              <a:t>💡 THINK</a:t>
-            </a:r>
+              <a:t>Next lesson: 3C Word games – relative clauses (SB p.26)</a:t>
+            </a:r>
+            <a:endParaRPr lang="en-US" sz="1100" dirty="0"/>
+          </a:p>
+        </p:txBody>
+      </p:sp>
+    </p:spTree>
+  </p:cSld>
+  <p:clrMapOvr>
+    <a:masterClrMapping/>
+  </p:clrMapOvr>
+  <p:transition spd="med">
+    <p:push dir="l"/>
+  </p:transition>
+</p:sld>
+</file>
+
+<file path=ppt/slides/slide18.xml><?xml version="1.0" encoding="utf-8"?>
+<p:sld xmlns:a="http://schemas.openxmlformats.org/drawingml/2006/main" xmlns:r="http://schemas.openxmlformats.org/officeDocument/2006/relationships" xmlns:p="http://schemas.openxmlformats.org/presentationml/2006/main">
+  <p:cSld name="Slide 18">
+    <p:bg>
+      <p:bgPr>
+        <a:blipFill dpi="0" rotWithShape="1">
+          <a:blip r:embed="rId1">
+            <a:lum/>
+          </a:blip>
+          <a:srcRect/>
+          <a:stretch>
+            <a:fillRect/>
+          </a:stretch>
+        </a:blipFill>
+        <a:effectLst/>
+      </p:bgPr>
+    </p:bg>
+    <p:spTree>
+      <p:nvGrpSpPr>
+        <p:cNvPr id="2" name=""/>
+        <p:cNvGrpSpPr/>
+        <p:nvPr/>
+      </p:nvGrpSpPr>
+      <p:grpSpPr>
+        <a:xfrm>
+          <a:off x="0" y="0"/>
+          <a:ext cx="0" cy="0"/>
+          <a:chOff x="0" y="0"/>
+          <a:chExt cx="0" cy="0"/>
+        </a:xfrm>
+      </p:grpSpPr>
+      <p:sp>
+        <p:nvSpPr>
+          <p:cNvPr id="3" name="bd_434"/>
+          <p:cNvSpPr/>
+          <p:nvPr/>
+        </p:nvSpPr>
+        <p:spPr>
+          <a:xfrm>
+            <a:off x="201168" y="164592"/>
+            <a:ext cx="841248" cy="841248"/>
+          </a:xfrm>
+          <a:prstGeom prst="ellipse">
+            <a:avLst/>
+          </a:prstGeom>
+          <a:solidFill>
+            <a:srgbClr val="2EB872"/>
+          </a:solidFill>
+          <a:ln w="28575">
+            <a:solidFill>
+              <a:srgbClr val="A8E5BE"/>
+            </a:solidFill>
+          </a:ln>
+          <a:effectLst>
+            <a:outerShdw sx="100000" sy="100000" kx="0" ky="0" algn="bl" rotWithShape="0" blurRad="88900" dist="31750" dir="5400000">
+              <a:srgbClr val="1B2559">
+                <a:alpha val="15000"/>
+              </a:srgbClr>
+            </a:outerShdw>
+          </a:effectLst>
+        </p:spPr>
+        <p:txBody>
+          <a:bodyPr wrap="square" lIns="0" tIns="0" rIns="0" bIns="0" rtlCol="0" anchor="ctr"/>
+          <a:lstStyle/>
+          <a:p>
             <a:pPr algn="ctr" indent="0" marL="0">
               <a:buNone/>
             </a:pPr>
             <a:r>
-              <a:rPr lang="en-US" sz="1250" dirty="0">
-                <a:solidFill>
-                  <a:srgbClr val="1B2559"/>
+              <a:rPr lang="en-US" sz="2200" dirty="0">
+                <a:solidFill>
+                  <a:srgbClr val="FFFFFF"/>
                 </a:solidFill>
                 <a:latin typeface="Arial Rounded MT Bold" pitchFamily="34" charset="0"/>
                 <a:ea typeface="Arial Rounded MT Bold" pitchFamily="34" charset="-122"/>
                 <a:cs typeface="Arial Rounded MT Bold" pitchFamily="34" charset="-120"/>
               </a:rPr>
-              <a:t> · PENSA</a:t>
-            </a:r>
-            <a:endParaRPr lang="en-US" sz="1250" dirty="0"/>
-          </a:p>
-          <a:p>
-            <a:pPr algn="ctr" indent="0" marL="0">
-              <a:buNone/>
-            </a:pPr>
-            <a:r>
-              <a:rPr lang="en-US" sz="1100" dirty="0">
-                <a:solidFill>
-                  <a:srgbClr val="1B2559"/>
-                </a:solidFill>
-                <a:latin typeface="Segoe UI Semibold" pitchFamily="34" charset="0"/>
-                <a:ea typeface="Segoe UI Semibold" pitchFamily="34" charset="-122"/>
-                <a:cs typeface="Segoe UI Semibold" pitchFamily="34" charset="-120"/>
-              </a:rPr>
-              <a:t>⏱ 1 min   🙋 whole class</a:t>
-            </a:r>
-            <a:endParaRPr lang="en-US" sz="1250" dirty="0"/>
-          </a:p>
-          <a:p>
-            <a:pPr algn="ctr" indent="0" marL="0">
-              <a:buNone/>
-            </a:pPr>
-            <a:r>
-              <a:rPr lang="en-US" sz="900" dirty="0">
-                <a:solidFill>
-                  <a:srgbClr val="5B6785"/>
-                </a:solidFill>
-                <a:latin typeface="Segoe UI Semibold" pitchFamily="34" charset="0"/>
-                <a:ea typeface="Segoe UI Semibold" pitchFamily="34" charset="-122"/>
-                <a:cs typeface="Segoe UI Semibold" pitchFamily="34" charset="-120"/>
-              </a:rPr>
-              <a:t>🎯 Revision · Reflection</a:t>
-            </a:r>
-            <a:endParaRPr lang="en-US" sz="1250" dirty="0"/>
+              <a:t>18</a:t>
+            </a:r>
+            <a:endParaRPr lang="en-US" sz="2200" dirty="0"/>
           </a:p>
         </p:txBody>
       </p:sp>
       <p:pic>
         <p:nvPicPr>
-          <p:cNvPr id="10" name="logo_420" descr="/home/claude/lls-course/v2/img/logo.png">    </p:cNvPr>
+          <p:cNvPr id="4" name="brY_435" descr="/home/claude/lls-course/v2/assets/brush-yellow.png">    </p:cNvPr>
+          <p:cNvPicPr>
+            <a:picLocks noChangeAspect="1"/>
+          </p:cNvPicPr>
+          <p:nvPr/>
+        </p:nvPicPr>
+        <p:blipFill>
+          <a:blip r:embed="rId2"/>
+          <a:stretch>
+            <a:fillRect/>
+          </a:stretch>
+        </p:blipFill>
+        <p:spPr>
+          <a:xfrm>
+            <a:off x="1097280" y="146304"/>
+            <a:ext cx="2304288" cy="621792"/>
+          </a:xfrm>
+          <a:prstGeom prst="rect">
+            <a:avLst/>
+          </a:prstGeom>
+        </p:spPr>
+      </p:pic>
+      <p:sp>
+        <p:nvSpPr>
+          <p:cNvPr id="5" name="title_436"/>
+          <p:cNvSpPr/>
+          <p:nvPr/>
+        </p:nvSpPr>
+        <p:spPr>
+          <a:xfrm>
+            <a:off x="1261872" y="164592"/>
+            <a:ext cx="2029968" cy="566928"/>
+          </a:xfrm>
+          <a:prstGeom prst="rect">
+            <a:avLst/>
+          </a:prstGeom>
+          <a:noFill/>
+          <a:ln/>
+        </p:spPr>
+        <p:txBody>
+          <a:bodyPr wrap="square" lIns="0" tIns="0" rIns="0" bIns="0" rtlCol="0" anchor="ctr">
+            <a:normAutofit/>
+          </a:bodyPr>
+          <a:lstStyle/>
+          <a:p>
+            <a:pPr indent="0" marL="0">
+              <a:buNone/>
+            </a:pPr>
+            <a:r>
+              <a:rPr lang="en-US" sz="2400" dirty="0">
+                <a:solidFill>
+                  <a:srgbClr val="1B2559"/>
+                </a:solidFill>
+                <a:latin typeface="Arial Rounded MT Bold" pitchFamily="34" charset="0"/>
+                <a:ea typeface="Arial Rounded MT Bold" pitchFamily="34" charset="-122"/>
+                <a:cs typeface="Arial Rounded MT Bold" pitchFamily="34" charset="-120"/>
+              </a:rPr>
+              <a:t>Today you…</a:t>
+            </a:r>
+            <a:endParaRPr lang="en-US" sz="2400" dirty="0"/>
+          </a:p>
+        </p:txBody>
+      </p:sp>
+      <p:pic>
+        <p:nvPicPr>
+          <p:cNvPr id="6" name="brP_437" descr="/home/claude/lls-course/v2/assets/brush-pink.png">    </p:cNvPr>
+          <p:cNvPicPr>
+            <a:picLocks noChangeAspect="1"/>
+          </p:cNvPicPr>
+          <p:nvPr/>
+        </p:nvPicPr>
+        <p:blipFill>
+          <a:blip r:embed="rId3"/>
+          <a:stretch>
+            <a:fillRect/>
+          </a:stretch>
+        </p:blipFill>
+        <p:spPr>
+          <a:xfrm>
+            <a:off x="1207008" y="731520"/>
+            <a:ext cx="4553712" cy="402336"/>
+          </a:xfrm>
+          <a:prstGeom prst="rect">
+            <a:avLst/>
+          </a:prstGeom>
+        </p:spPr>
+      </p:pic>
+      <p:sp>
+        <p:nvSpPr>
+          <p:cNvPr id="7" name="ins_438"/>
+          <p:cNvSpPr/>
+          <p:nvPr/>
+        </p:nvSpPr>
+        <p:spPr>
+          <a:xfrm>
+            <a:off x="1353312" y="731520"/>
+            <a:ext cx="4297680" cy="402336"/>
+          </a:xfrm>
+          <a:prstGeom prst="rect">
+            <a:avLst/>
+          </a:prstGeom>
+          <a:noFill/>
+          <a:ln/>
+        </p:spPr>
+        <p:txBody>
+          <a:bodyPr wrap="square" lIns="0" tIns="0" rIns="0" bIns="0" rtlCol="0" anchor="ctr">
+            <a:normAutofit/>
+          </a:bodyPr>
+          <a:lstStyle/>
+          <a:p>
+            <a:pPr indent="0" marL="0">
+              <a:buNone/>
+            </a:pPr>
+            <a:r>
+              <a:rPr lang="en-US" sz="1250" i="1" dirty="0">
+                <a:solidFill>
+                  <a:srgbClr val="1B2559"/>
+                </a:solidFill>
+                <a:latin typeface="Segoe UI Semibold" pitchFamily="34" charset="0"/>
+                <a:ea typeface="Segoe UI Semibold" pitchFamily="34" charset="-122"/>
+                <a:cs typeface="Segoe UI Semibold" pitchFamily="34" charset="-120"/>
+              </a:rPr>
+              <a:t>Can you do it now? Thumbs up or thumbs down!</a:t>
+            </a:r>
+            <a:endParaRPr lang="en-US" sz="1250" dirty="0"/>
+          </a:p>
+        </p:txBody>
+      </p:sp>
+      <p:sp>
+        <p:nvSpPr>
+          <p:cNvPr id="8" name="insIT_439"/>
+          <p:cNvSpPr/>
+          <p:nvPr/>
+        </p:nvSpPr>
+        <p:spPr>
+          <a:xfrm>
+            <a:off x="1371600" y="1115568"/>
+            <a:ext cx="5074920" cy="219456"/>
+          </a:xfrm>
+          <a:prstGeom prst="rect">
+            <a:avLst/>
+          </a:prstGeom>
+          <a:noFill/>
+          <a:ln/>
+        </p:spPr>
+        <p:txBody>
+          <a:bodyPr wrap="square" lIns="0" tIns="0" rIns="0" bIns="0" rtlCol="0" anchor="ctr">
+            <a:normAutofit/>
+          </a:bodyPr>
+          <a:lstStyle/>
+          <a:p>
+            <a:pPr indent="0" marL="0">
+              <a:buNone/>
+            </a:pPr>
+            <a:r>
+              <a:rPr lang="en-US" sz="950" i="1" dirty="0">
+                <a:solidFill>
+                  <a:srgbClr val="5B6785"/>
+                </a:solidFill>
+                <a:latin typeface="Segoe UI Semibold" pitchFamily="34" charset="0"/>
+                <a:ea typeface="Segoe UI Semibold" pitchFamily="34" charset="-122"/>
+                <a:cs typeface="Segoe UI Semibold" pitchFamily="34" charset="-120"/>
+              </a:rPr>
+              <a:t>Ora sai farlo? Pollice su o pollice giù!</a:t>
+            </a:r>
+            <a:endParaRPr lang="en-US" sz="950" dirty="0"/>
+          </a:p>
+        </p:txBody>
+      </p:sp>
+      <p:sp>
+        <p:nvSpPr>
+          <p:cNvPr id="9" name="note_440"/>
+          <p:cNvSpPr/>
+          <p:nvPr/>
+        </p:nvSpPr>
+        <p:spPr>
+          <a:xfrm rot="180000">
+            <a:off x="6382512" y="128016"/>
+            <a:ext cx="2029968" cy="1024128"/>
+          </a:xfrm>
+          <a:prstGeom prst="rect">
+            <a:avLst/>
+          </a:prstGeom>
+          <a:solidFill>
+            <a:srgbClr val="FFC2DA"/>
+          </a:solidFill>
+          <a:ln>
+            <a:solidFill>
+              <a:srgbClr val="FFC2DA"/>
+            </a:solidFill>
+          </a:ln>
+          <a:effectLst>
+            <a:outerShdw sx="100000" sy="100000" kx="0" ky="0" algn="bl" rotWithShape="0" blurRad="88900" dist="31750" dir="5400000">
+              <a:srgbClr val="1B2559">
+                <a:alpha val="15000"/>
+              </a:srgbClr>
+            </a:outerShdw>
+          </a:effectLst>
+        </p:spPr>
+        <p:txBody>
+          <a:bodyPr wrap="square" lIns="50800" tIns="50800" rIns="50800" bIns="50800" rtlCol="0" anchor="ctr">
+            <a:normAutofit/>
+          </a:bodyPr>
+          <a:lstStyle/>
+          <a:p>
+            <a:pPr algn="ctr" indent="0" marL="0">
+              <a:buNone/>
+            </a:pPr>
+            <a:r>
+              <a:rPr lang="en-US" sz="1250" dirty="0">
+                <a:solidFill>
+                  <a:srgbClr val="1B2559"/>
+                </a:solidFill>
+                <a:latin typeface="Arial Rounded MT Bold" pitchFamily="34" charset="0"/>
+                <a:ea typeface="Arial Rounded MT Bold" pitchFamily="34" charset="-122"/>
+                <a:cs typeface="Arial Rounded MT Bold" pitchFamily="34" charset="-120"/>
+              </a:rPr>
+              <a:t>💡 THINK</a:t>
+            </a:r>
+            <a:pPr algn="ctr" indent="0" marL="0">
+              <a:buNone/>
+            </a:pPr>
+            <a:r>
+              <a:rPr lang="en-US" sz="1250" dirty="0">
+                <a:solidFill>
+                  <a:srgbClr val="1B2559"/>
+                </a:solidFill>
+                <a:latin typeface="Arial Rounded MT Bold" pitchFamily="34" charset="0"/>
+                <a:ea typeface="Arial Rounded MT Bold" pitchFamily="34" charset="-122"/>
+                <a:cs typeface="Arial Rounded MT Bold" pitchFamily="34" charset="-120"/>
+              </a:rPr>
+              <a:t> · PENSA</a:t>
+            </a:r>
+            <a:endParaRPr lang="en-US" sz="1250" dirty="0"/>
+          </a:p>
+          <a:p>
+            <a:pPr algn="ctr" indent="0" marL="0">
+              <a:buNone/>
+            </a:pPr>
+            <a:r>
+              <a:rPr lang="en-US" sz="1100" dirty="0">
+                <a:solidFill>
+                  <a:srgbClr val="1B2559"/>
+                </a:solidFill>
+                <a:latin typeface="Segoe UI Semibold" pitchFamily="34" charset="0"/>
+                <a:ea typeface="Segoe UI Semibold" pitchFamily="34" charset="-122"/>
+                <a:cs typeface="Segoe UI Semibold" pitchFamily="34" charset="-120"/>
+              </a:rPr>
+              <a:t>⏱ 1 min   🙋 whole class</a:t>
+            </a:r>
+            <a:endParaRPr lang="en-US" sz="1250" dirty="0"/>
+          </a:p>
+          <a:p>
+            <a:pPr algn="ctr" indent="0" marL="0">
+              <a:buNone/>
+            </a:pPr>
+            <a:r>
+              <a:rPr lang="en-US" sz="900" dirty="0">
+                <a:solidFill>
+                  <a:srgbClr val="5B6785"/>
+                </a:solidFill>
+                <a:latin typeface="Segoe UI Semibold" pitchFamily="34" charset="0"/>
+                <a:ea typeface="Segoe UI Semibold" pitchFamily="34" charset="-122"/>
+                <a:cs typeface="Segoe UI Semibold" pitchFamily="34" charset="-120"/>
+              </a:rPr>
+              <a:t>🎯 Revision · Reflection</a:t>
+            </a:r>
+            <a:endParaRPr lang="en-US" sz="1250" dirty="0"/>
+          </a:p>
+        </p:txBody>
+      </p:sp>
+      <p:pic>
+        <p:nvPicPr>
+          <p:cNvPr id="10" name="logo_441" descr="/home/claude/lls-course/v2/img/logo.png">    </p:cNvPr>
           <p:cNvPicPr>
             <a:picLocks noChangeAspect="1"/>
           </p:cNvPicPr>
@@ -15982,7 +18139,7 @@
       </p:pic>
       <p:sp>
         <p:nvSpPr>
-          <p:cNvPr id="11" name="foot_421"/>
+          <p:cNvPr id="11" name="foot_442"/>
           <p:cNvSpPr/>
           <p:nvPr/>
         </p:nvSpPr>
@@ -16021,7 +18178,7 @@
       </p:sp>
       <p:sp>
         <p:nvSpPr>
-          <p:cNvPr id="12" name="cd_422"/>
+          <p:cNvPr id="12" name="cd_443"/>
           <p:cNvSpPr/>
           <p:nvPr/>
         </p:nvSpPr>
@@ -16055,7 +18212,7 @@
       </p:sp>
       <p:sp>
         <p:nvSpPr>
-          <p:cNvPr id="13" name="te_423"/>
+          <p:cNvPr id="13" name="te_444"/>
           <p:cNvSpPr/>
           <p:nvPr/>
         </p:nvSpPr>
@@ -16091,7 +18248,7 @@
       </p:sp>
       <p:sp>
         <p:nvSpPr>
-          <p:cNvPr id="14" name="tt_424"/>
+          <p:cNvPr id="14" name="tt_445"/>
           <p:cNvSpPr/>
           <p:nvPr/>
         </p:nvSpPr>
@@ -16132,7 +18289,7 @@
       </p:sp>
       <p:sp>
         <p:nvSpPr>
-          <p:cNvPr id="15" name="R1_tk425"/>
+          <p:cNvPr id="15" name="R1_tk446"/>
           <p:cNvSpPr/>
           <p:nvPr/>
         </p:nvSpPr>
@@ -16168,7 +18325,7 @@
       </p:sp>
       <p:sp>
         <p:nvSpPr>
-          <p:cNvPr id="16" name="cd_426"/>
+          <p:cNvPr id="16" name="cd_447"/>
           <p:cNvSpPr/>
           <p:nvPr/>
         </p:nvSpPr>
@@ -16202,7 +18359,7 @@
       </p:sp>
       <p:sp>
         <p:nvSpPr>
-          <p:cNvPr id="17" name="te_427"/>
+          <p:cNvPr id="17" name="te_448"/>
           <p:cNvSpPr/>
           <p:nvPr/>
         </p:nvSpPr>
@@ -16238,7 +18395,7 @@
       </p:sp>
       <p:sp>
         <p:nvSpPr>
-          <p:cNvPr id="18" name="tt_428"/>
+          <p:cNvPr id="18" name="tt_449"/>
           <p:cNvSpPr/>
           <p:nvPr/>
         </p:nvSpPr>
@@ -16279,7 +18436,7 @@
       </p:sp>
       <p:sp>
         <p:nvSpPr>
-          <p:cNvPr id="19" name="R2_tk429"/>
+          <p:cNvPr id="19" name="R2_tk450"/>
           <p:cNvSpPr/>
           <p:nvPr/>
         </p:nvSpPr>
@@ -16315,7 +18472,7 @@
       </p:sp>
       <p:sp>
         <p:nvSpPr>
-          <p:cNvPr id="20" name="cd_430"/>
+          <p:cNvPr id="20" name="cd_451"/>
           <p:cNvSpPr/>
           <p:nvPr/>
         </p:nvSpPr>
@@ -16349,7 +18506,7 @@
       </p:sp>
       <p:sp>
         <p:nvSpPr>
-          <p:cNvPr id="21" name="te_431"/>
+          <p:cNvPr id="21" name="te_452"/>
           <p:cNvSpPr/>
           <p:nvPr/>
         </p:nvSpPr>
@@ -16385,7 +18542,7 @@
       </p:sp>
       <p:sp>
         <p:nvSpPr>
-          <p:cNvPr id="22" name="tt_432"/>
+          <p:cNvPr id="22" name="tt_453"/>
           <p:cNvSpPr/>
           <p:nvPr/>
         </p:nvSpPr>
@@ -16426,7 +18583,7 @@
       </p:sp>
       <p:sp>
         <p:nvSpPr>
-          <p:cNvPr id="23" name="R3_tk433"/>
+          <p:cNvPr id="23" name="R3_tk454"/>
           <p:cNvSpPr/>
           <p:nvPr/>
         </p:nvSpPr>
@@ -16462,7 +18619,7 @@
       </p:sp>
       <p:sp>
         <p:nvSpPr>
-          <p:cNvPr id="24" name="cd_434"/>
+          <p:cNvPr id="24" name="cd_455"/>
           <p:cNvSpPr/>
           <p:nvPr/>
         </p:nvSpPr>
@@ -16496,7 +18653,7 @@
       </p:sp>
       <p:sp>
         <p:nvSpPr>
-          <p:cNvPr id="25" name="te_435"/>
+          <p:cNvPr id="25" name="te_456"/>
           <p:cNvSpPr/>
           <p:nvPr/>
         </p:nvSpPr>
@@ -16532,7 +18689,7 @@
       </p:sp>
       <p:sp>
         <p:nvSpPr>
-          <p:cNvPr id="26" name="tt_436"/>
+          <p:cNvPr id="26" name="tt_457"/>
           <p:cNvSpPr/>
           <p:nvPr/>
         </p:nvSpPr>
@@ -16573,7 +18730,7 @@
       </p:sp>
       <p:sp>
         <p:nvSpPr>
-          <p:cNvPr id="27" name="R4_tk437"/>
+          <p:cNvPr id="27" name="R4_tk458"/>
           <p:cNvSpPr/>
           <p:nvPr/>
         </p:nvSpPr>
@@ -16609,7 +18766,7 @@
       </p:sp>
       <p:sp>
         <p:nvSpPr>
-          <p:cNvPr id="28" name="cd_438"/>
+          <p:cNvPr id="28" name="cd_459"/>
           <p:cNvSpPr/>
           <p:nvPr/>
         </p:nvSpPr>
@@ -16643,7 +18800,7 @@
       </p:sp>
       <p:sp>
         <p:nvSpPr>
-          <p:cNvPr id="29" name="te_439"/>
+          <p:cNvPr id="29" name="te_460"/>
           <p:cNvSpPr/>
           <p:nvPr/>
         </p:nvSpPr>
@@ -16679,7 +18836,7 @@
       </p:sp>
       <p:sp>
         <p:nvSpPr>
-          <p:cNvPr id="30" name="tt_440"/>
+          <p:cNvPr id="30" name="tt_461"/>
           <p:cNvSpPr/>
           <p:nvPr/>
         </p:nvSpPr>
@@ -16720,7 +18877,7 @@
       </p:sp>
       <p:sp>
         <p:nvSpPr>
-          <p:cNvPr id="31" name="R5_tk441"/>
+          <p:cNvPr id="31" name="R5_tk462"/>
           <p:cNvSpPr/>
           <p:nvPr/>
         </p:nvSpPr>
@@ -16756,7 +18913,7 @@
       </p:sp>
       <p:sp>
         <p:nvSpPr>
-          <p:cNvPr id="32" name="st_442"/>
+          <p:cNvPr id="32" name="st_463"/>
           <p:cNvSpPr/>
           <p:nvPr/>
         </p:nvSpPr>
